--- a/presentations/Sur - Board Presentation.pptx
+++ b/presentations/Sur - Board Presentation.pptx
@@ -36,9 +36,10 @@
     <p:sldId id="284" r:id="rId30"/>
     <p:sldId id="285" r:id="rId31"/>
     <p:sldId id="286" r:id="rId32"/>
+    <p:sldId id="287" r:id="rId33"/>
   </p:sldIdLst>
   <p:notesMasterIdLst>
-    <p:notesMasterId r:id="rId33"/>
+    <p:notesMasterId r:id="rId34"/>
   </p:notesMasterIdLst>
   <p:sldSz cx="12192000" cy="6858000"/>
   <p:notesSz cx="6858000" cy="12192000"/>
@@ -2668,6 +2669,94 @@
             <a:fld id="{F7021451-1387-4CA6-816F-3879F97B5CBC}" type="slidenum">
               <a:rPr lang="en-US"/>
               <a:t>31</a:t>
+            </a:fld>
+            <a:endParaRPr lang="en-US"/>
+          </a:p>
+        </p:txBody>
+      </p:sp>
+    </p:spTree>
+    <p:extLst>
+      <p:ext uri="{BB962C8B-B14F-4D97-AF65-F5344CB8AC3E}">
+        <p14:creationId xmlns:p14="http://schemas.microsoft.com/office/powerpoint/2010/main" val="1024086991"/>
+      </p:ext>
+    </p:extLst>
+  </p:cSld>
+  <p:clrMapOvr>
+    <a:masterClrMapping/>
+  </p:clrMapOvr>
+</p:notes>
+</file>
+
+<file path=ppt/notesSlides/notesSlide32.xml><?xml version="1.0" encoding="utf-8"?>
+<p:notes xmlns:a="http://schemas.openxmlformats.org/drawingml/2006/main" xmlns:r="http://schemas.openxmlformats.org/officeDocument/2006/relationships" xmlns:p="http://schemas.openxmlformats.org/presentationml/2006/main">
+  <p:cSld>
+    <p:spTree>
+      <p:nvGrpSpPr>
+        <p:cNvPr id="1" name=""/>
+        <p:cNvGrpSpPr/>
+        <p:nvPr/>
+      </p:nvGrpSpPr>
+      <p:grpSpPr>
+        <a:xfrm>
+          <a:off x="0" y="0"/>
+          <a:ext cx="0" cy="0"/>
+          <a:chOff x="0" y="0"/>
+          <a:chExt cx="0" cy="0"/>
+        </a:xfrm>
+      </p:grpSpPr>
+      <p:sp>
+        <p:nvSpPr>
+          <p:cNvPr id="2" name="Slide Image Placeholder 1"/>
+          <p:cNvSpPr>
+            <a:spLocks noGrp="1" noRot="1" noChangeAspect="1"/>
+          </p:cNvSpPr>
+          <p:nvPr>
+            <p:ph type="sldImg"/>
+          </p:nvPr>
+        </p:nvSpPr>
+        <p:spPr/>
+      </p:sp>
+      <p:sp>
+        <p:nvSpPr>
+          <p:cNvPr id="3" name="Notes Placeholder 2"/>
+          <p:cNvSpPr>
+            <a:spLocks noGrp="1"/>
+          </p:cNvSpPr>
+          <p:nvPr>
+            <p:ph type="body" idx="1"/>
+          </p:nvPr>
+        </p:nvSpPr>
+        <p:spPr/>
+        <p:txBody>
+          <a:bodyPr/>
+          <a:lstStyle/>
+          <a:p>
+            <a:r>
+              <a:rPr lang="en-US" dirty="0"/>
+              <a:t/>
+            </a:r>
+            <a:endParaRPr lang="en-US" dirty="0"/>
+          </a:p>
+        </p:txBody>
+      </p:sp>
+      <p:sp>
+        <p:nvSpPr>
+          <p:cNvPr id="4" name="Slide Number Placeholder 3"/>
+          <p:cNvSpPr>
+            <a:spLocks noGrp="1"/>
+          </p:cNvSpPr>
+          <p:nvPr>
+            <p:ph type="sldNum" sz="quarter" idx="10"/>
+          </p:nvPr>
+        </p:nvSpPr>
+        <p:spPr/>
+        <p:txBody>
+          <a:bodyPr/>
+          <a:lstStyle/>
+          <a:p>
+            <a:fld id="{F7021451-1387-4CA6-816F-3879F97B5CBC}" type="slidenum">
+              <a:rPr lang="en-US"/>
+              <a:t>32</a:t>
             </a:fld>
             <a:endParaRPr lang="en-US"/>
           </a:p>
@@ -10887,6 +10976,1031 @@
     <p:bg>
       <p:bgPr>
         <a:solidFill>
+          <a:srgbClr val="FFFFFF"/>
+        </a:solidFill>
+      </p:bgPr>
+    </p:bg>
+    <p:spTree>
+      <p:nvGrpSpPr>
+        <p:cNvPr id="1" name=""/>
+        <p:cNvGrpSpPr/>
+        <p:nvPr/>
+      </p:nvGrpSpPr>
+      <p:grpSpPr>
+        <a:xfrm>
+          <a:off x="0" y="0"/>
+          <a:ext cx="0" cy="0"/>
+          <a:chOff x="0" y="0"/>
+          <a:chExt cx="0" cy="0"/>
+        </a:xfrm>
+      </p:grpSpPr>
+      <p:sp>
+        <p:nvSpPr>
+          <p:cNvPr id="2" name="Text 0"/>
+          <p:cNvSpPr txBox="1"/>
+          <p:nvPr/>
+        </p:nvSpPr>
+        <p:spPr>
+          <a:xfrm>
+            <a:off x="548640" y="292608"/>
+            <a:ext cx="11064240" cy="320040"/>
+          </a:xfrm>
+          <a:prstGeom prst="rect">
+            <a:avLst/>
+          </a:prstGeom>
+          <a:noFill/>
+          <a:ln/>
+        </p:spPr>
+        <p:txBody>
+          <a:bodyPr wrap="square" lIns="0" tIns="0" rIns="0" bIns="0" rtlCol="0" anchor="ctr"/>
+          <a:lstStyle/>
+          <a:p>
+            <a:pPr rtl="1" algn="r" indent="0" marL="0">
+              <a:buNone/>
+            </a:pPr>
+            <a:r>
+              <a:rPr lang="en-US" sz="1250" b="1" spc="150" kern="0" dirty="0">
+                <a:solidFill>
+                  <a:srgbClr val="2F3690"/>
+                </a:solidFill>
+                <a:latin typeface="Calibri" pitchFamily="34" charset="0"/>
+                <a:ea typeface="Calibri" pitchFamily="34" charset="-122"/>
+                <a:cs typeface="Calibri" pitchFamily="34" charset="-120"/>
+              </a:rPr>
+              <a:t>پیامد غیرفعالی</a:t>
+            </a:r>
+            <a:endParaRPr lang="en-US" sz="1250" dirty="0"/>
+          </a:p>
+        </p:txBody>
+      </p:sp>
+      <p:sp>
+        <p:nvSpPr>
+          <p:cNvPr id="3" name="Text 1"/>
+          <p:cNvSpPr txBox="1"/>
+          <p:nvPr/>
+        </p:nvSpPr>
+        <p:spPr>
+          <a:xfrm>
+            <a:off x="548640" y="576072"/>
+            <a:ext cx="11064240" cy="685800"/>
+          </a:xfrm>
+          <a:prstGeom prst="rect">
+            <a:avLst/>
+          </a:prstGeom>
+          <a:noFill/>
+          <a:ln/>
+        </p:spPr>
+        <p:txBody>
+          <a:bodyPr wrap="square" lIns="0" tIns="0" rIns="0" bIns="0" rtlCol="0" anchor="ctr"/>
+          <a:lstStyle/>
+          <a:p>
+            <a:pPr rtl="1" algn="r" indent="0" marL="0">
+              <a:buNone/>
+            </a:pPr>
+            <a:r>
+              <a:rPr lang="en-US" sz="2500" b="1" dirty="0">
+                <a:solidFill>
+                  <a:srgbClr val="1B1B2F"/>
+                </a:solidFill>
+                <a:latin typeface="Cambria" pitchFamily="34" charset="0"/>
+                <a:ea typeface="Cambria" pitchFamily="34" charset="-122"/>
+                <a:cs typeface="Cambria" pitchFamily="34" charset="-120"/>
+              </a:rPr>
+              <a:t>چه اتفاقی می‌افتد وقتی سرور یک ولیدیتور از کار می‌افتد</a:t>
+            </a:r>
+            <a:endParaRPr lang="en-US" sz="2500" dirty="0"/>
+          </a:p>
+        </p:txBody>
+      </p:sp>
+      <p:sp>
+        <p:nvSpPr>
+          <p:cNvPr id="4" name="Shape 2"/>
+          <p:cNvSpPr/>
+          <p:nvPr/>
+        </p:nvSpPr>
+        <p:spPr>
+          <a:xfrm>
+            <a:off x="9589770" y="2103120"/>
+            <a:ext cx="731520" cy="731520"/>
+          </a:xfrm>
+          <a:prstGeom prst="ellipse">
+            <a:avLst/>
+          </a:prstGeom>
+          <a:solidFill>
+            <a:srgbClr val="2F3690"/>
+          </a:solidFill>
+          <a:ln/>
+        </p:spPr>
+      </p:sp>
+      <p:pic>
+        <p:nvPicPr>
+          <p:cNvPr id="5" name="Image 0" descr="/home/claude/deck1/icons/warning.png">    </p:cNvPr>
+          <p:cNvPicPr>
+            <a:picLocks noChangeAspect="1"/>
+          </p:cNvPicPr>
+          <p:nvPr/>
+        </p:nvPicPr>
+        <p:blipFill>
+          <a:blip r:embed="rId1"/>
+          <a:stretch>
+            <a:fillRect/>
+          </a:stretch>
+        </p:blipFill>
+        <p:spPr>
+          <a:xfrm>
+            <a:off x="9779965" y="2293315"/>
+            <a:ext cx="351130" cy="351130"/>
+          </a:xfrm>
+          <a:prstGeom prst="rect">
+            <a:avLst/>
+          </a:prstGeom>
+        </p:spPr>
+      </p:pic>
+      <p:sp>
+        <p:nvSpPr>
+          <p:cNvPr id="6" name="Shape 3"/>
+          <p:cNvSpPr/>
+          <p:nvPr/>
+        </p:nvSpPr>
+        <p:spPr>
+          <a:xfrm>
+            <a:off x="9571482" y="1965960"/>
+            <a:ext cx="329184" cy="329184"/>
+          </a:xfrm>
+          <a:prstGeom prst="ellipse">
+            <a:avLst/>
+          </a:prstGeom>
+          <a:solidFill>
+            <a:srgbClr val="D4AF37"/>
+          </a:solidFill>
+          <a:ln/>
+        </p:spPr>
+      </p:sp>
+      <p:sp>
+        <p:nvSpPr>
+          <p:cNvPr id="7" name="Text 4"/>
+          <p:cNvSpPr txBox="1"/>
+          <p:nvPr/>
+        </p:nvSpPr>
+        <p:spPr>
+          <a:xfrm>
+            <a:off x="9571482" y="1956816"/>
+            <a:ext cx="329184" cy="329184"/>
+          </a:xfrm>
+          <a:prstGeom prst="rect">
+            <a:avLst/>
+          </a:prstGeom>
+          <a:noFill/>
+          <a:ln/>
+        </p:spPr>
+        <p:txBody>
+          <a:bodyPr wrap="square" lIns="0" tIns="0" rIns="0" bIns="0" rtlCol="0" anchor="ctr"/>
+          <a:lstStyle/>
+          <a:p>
+            <a:pPr algn="ctr" indent="0" marL="0">
+              <a:buNone/>
+            </a:pPr>
+            <a:r>
+              <a:rPr lang="en-US" sz="1300" b="1" dirty="0">
+                <a:solidFill>
+                  <a:srgbClr val="2F3690"/>
+                </a:solidFill>
+                <a:latin typeface="Arial" pitchFamily="34" charset="0"/>
+                <a:ea typeface="Arial" pitchFamily="34" charset="-122"/>
+                <a:cs typeface="Arial" pitchFamily="34" charset="-120"/>
+              </a:rPr>
+              <a:t>1</a:t>
+            </a:r>
+            <a:endParaRPr lang="en-US" sz="1300" dirty="0"/>
+          </a:p>
+        </p:txBody>
+      </p:sp>
+      <p:sp>
+        <p:nvSpPr>
+          <p:cNvPr id="8" name="Text 5"/>
+          <p:cNvSpPr txBox="1"/>
+          <p:nvPr/>
+        </p:nvSpPr>
+        <p:spPr>
+          <a:xfrm>
+            <a:off x="8709660" y="3063240"/>
+            <a:ext cx="2491740" cy="548640"/>
+          </a:xfrm>
+          <a:prstGeom prst="rect">
+            <a:avLst/>
+          </a:prstGeom>
+          <a:noFill/>
+          <a:ln/>
+        </p:spPr>
+        <p:txBody>
+          <a:bodyPr wrap="square" lIns="0" tIns="0" rIns="0" bIns="0" rtlCol="0" anchor="ctr"/>
+          <a:lstStyle/>
+          <a:p>
+            <a:pPr rtl="1" algn="ctr" indent="0" marL="0">
+              <a:buNone/>
+            </a:pPr>
+            <a:r>
+              <a:rPr lang="en-US" sz="1300" b="1" dirty="0">
+                <a:solidFill>
+                  <a:srgbClr val="1B1B2F"/>
+                </a:solidFill>
+                <a:latin typeface="Calibri" pitchFamily="34" charset="0"/>
+                <a:ea typeface="Calibri" pitchFamily="34" charset="-122"/>
+                <a:cs typeface="Calibri" pitchFamily="34" charset="-120"/>
+              </a:rPr>
+              <a:t>تشخیص خودکار</a:t>
+            </a:r>
+            <a:endParaRPr lang="en-US" sz="1300" dirty="0"/>
+          </a:p>
+        </p:txBody>
+      </p:sp>
+      <p:sp>
+        <p:nvSpPr>
+          <p:cNvPr id="9" name="Text 6"/>
+          <p:cNvSpPr txBox="1"/>
+          <p:nvPr/>
+        </p:nvSpPr>
+        <p:spPr>
+          <a:xfrm>
+            <a:off x="8709660" y="3611880"/>
+            <a:ext cx="2491740" cy="2011680"/>
+          </a:xfrm>
+          <a:prstGeom prst="rect">
+            <a:avLst/>
+          </a:prstGeom>
+          <a:noFill/>
+          <a:ln/>
+        </p:spPr>
+        <p:txBody>
+          <a:bodyPr wrap="square" lIns="0" tIns="0" rIns="0" bIns="0" rtlCol="0" anchor="t"/>
+          <a:lstStyle/>
+          <a:p>
+            <a:pPr rtl="1" algn="ctr" indent="0" marL="0">
+              <a:buNone/>
+            </a:pPr>
+            <a:r>
+              <a:rPr lang="en-US" sz="1100" dirty="0">
+                <a:solidFill>
+                  <a:srgbClr val="444B66"/>
+                </a:solidFill>
+                <a:latin typeface="Calibri" pitchFamily="34" charset="0"/>
+                <a:ea typeface="Calibri" pitchFamily="34" charset="-122"/>
+                <a:cs typeface="Calibri" pitchFamily="34" charset="-120"/>
+              </a:rPr>
+              <a:t>بعد از عبور از آستانه‌ی غیرفعالی، هر شخصی (نه فقط بنیاد/هیأت) می‌تواند دموت را permissionless فعال کند</a:t>
+            </a:r>
+            <a:endParaRPr lang="en-US" sz="1100" dirty="0"/>
+          </a:p>
+        </p:txBody>
+      </p:sp>
+      <p:sp>
+        <p:nvSpPr>
+          <p:cNvPr id="10" name="Shape 7"/>
+          <p:cNvSpPr/>
+          <p:nvPr/>
+        </p:nvSpPr>
+        <p:spPr>
+          <a:xfrm>
+            <a:off x="8481060" y="2468880"/>
+            <a:ext cx="228600" cy="0"/>
+          </a:xfrm>
+          <a:prstGeom prst="line">
+            <a:avLst/>
+          </a:prstGeom>
+          <a:noFill/>
+          <a:ln w="19050">
+            <a:solidFill>
+              <a:srgbClr val="C9CEE0"/>
+            </a:solidFill>
+            <a:prstDash val="solid"/>
+          </a:ln>
+        </p:spPr>
+      </p:sp>
+      <p:sp>
+        <p:nvSpPr>
+          <p:cNvPr id="11" name="Shape 8"/>
+          <p:cNvSpPr/>
+          <p:nvPr/>
+        </p:nvSpPr>
+        <p:spPr>
+          <a:xfrm>
+            <a:off x="6869430" y="2103120"/>
+            <a:ext cx="731520" cy="731520"/>
+          </a:xfrm>
+          <a:prstGeom prst="ellipse">
+            <a:avLst/>
+          </a:prstGeom>
+          <a:solidFill>
+            <a:srgbClr val="2F3690"/>
+          </a:solidFill>
+          <a:ln/>
+        </p:spPr>
+      </p:sp>
+      <p:pic>
+        <p:nvPicPr>
+          <p:cNvPr id="12" name="Image 1" descr="/home/claude/deck1/icons/money.png">    </p:cNvPr>
+          <p:cNvPicPr>
+            <a:picLocks noChangeAspect="1"/>
+          </p:cNvPicPr>
+          <p:nvPr/>
+        </p:nvPicPr>
+        <p:blipFill>
+          <a:blip r:embed="rId2"/>
+          <a:stretch>
+            <a:fillRect/>
+          </a:stretch>
+        </p:blipFill>
+        <p:spPr>
+          <a:xfrm>
+            <a:off x="7059625" y="2293315"/>
+            <a:ext cx="351130" cy="351130"/>
+          </a:xfrm>
+          <a:prstGeom prst="rect">
+            <a:avLst/>
+          </a:prstGeom>
+        </p:spPr>
+      </p:pic>
+      <p:sp>
+        <p:nvSpPr>
+          <p:cNvPr id="13" name="Shape 9"/>
+          <p:cNvSpPr/>
+          <p:nvPr/>
+        </p:nvSpPr>
+        <p:spPr>
+          <a:xfrm>
+            <a:off x="6851142" y="1965960"/>
+            <a:ext cx="329184" cy="329184"/>
+          </a:xfrm>
+          <a:prstGeom prst="ellipse">
+            <a:avLst/>
+          </a:prstGeom>
+          <a:solidFill>
+            <a:srgbClr val="D4AF37"/>
+          </a:solidFill>
+          <a:ln/>
+        </p:spPr>
+      </p:sp>
+      <p:sp>
+        <p:nvSpPr>
+          <p:cNvPr id="14" name="Text 10"/>
+          <p:cNvSpPr txBox="1"/>
+          <p:nvPr/>
+        </p:nvSpPr>
+        <p:spPr>
+          <a:xfrm>
+            <a:off x="6851142" y="1956816"/>
+            <a:ext cx="329184" cy="329184"/>
+          </a:xfrm>
+          <a:prstGeom prst="rect">
+            <a:avLst/>
+          </a:prstGeom>
+          <a:noFill/>
+          <a:ln/>
+        </p:spPr>
+        <p:txBody>
+          <a:bodyPr wrap="square" lIns="0" tIns="0" rIns="0" bIns="0" rtlCol="0" anchor="ctr"/>
+          <a:lstStyle/>
+          <a:p>
+            <a:pPr algn="ctr" indent="0" marL="0">
+              <a:buNone/>
+            </a:pPr>
+            <a:r>
+              <a:rPr lang="en-US" sz="1300" b="1" dirty="0">
+                <a:solidFill>
+                  <a:srgbClr val="2F3690"/>
+                </a:solidFill>
+                <a:latin typeface="Arial" pitchFamily="34" charset="0"/>
+                <a:ea typeface="Arial" pitchFamily="34" charset="-122"/>
+                <a:cs typeface="Arial" pitchFamily="34" charset="-120"/>
+              </a:rPr>
+              <a:t>2</a:t>
+            </a:r>
+            <a:endParaRPr lang="en-US" sz="1300" dirty="0"/>
+          </a:p>
+        </p:txBody>
+      </p:sp>
+      <p:sp>
+        <p:nvSpPr>
+          <p:cNvPr id="15" name="Text 11"/>
+          <p:cNvSpPr txBox="1"/>
+          <p:nvPr/>
+        </p:nvSpPr>
+        <p:spPr>
+          <a:xfrm>
+            <a:off x="5989320" y="3063240"/>
+            <a:ext cx="2491740" cy="548640"/>
+          </a:xfrm>
+          <a:prstGeom prst="rect">
+            <a:avLst/>
+          </a:prstGeom>
+          <a:noFill/>
+          <a:ln/>
+        </p:spPr>
+        <p:txBody>
+          <a:bodyPr wrap="square" lIns="0" tIns="0" rIns="0" bIns="0" rtlCol="0" anchor="ctr"/>
+          <a:lstStyle/>
+          <a:p>
+            <a:pPr rtl="1" algn="ctr" indent="0" marL="0">
+              <a:buNone/>
+            </a:pPr>
+            <a:r>
+              <a:rPr lang="en-US" sz="1300" b="1" dirty="0">
+                <a:solidFill>
+                  <a:srgbClr val="1B1B2F"/>
+                </a:solidFill>
+                <a:latin typeface="Calibri" pitchFamily="34" charset="0"/>
+                <a:ea typeface="Calibri" pitchFamily="34" charset="-122"/>
+                <a:cs typeface="Calibri" pitchFamily="34" charset="-120"/>
+              </a:rPr>
+              <a:t>توقف فوری درآمد</a:t>
+            </a:r>
+            <a:endParaRPr lang="en-US" sz="1300" dirty="0"/>
+          </a:p>
+        </p:txBody>
+      </p:sp>
+      <p:sp>
+        <p:nvSpPr>
+          <p:cNvPr id="16" name="Text 12"/>
+          <p:cNvSpPr txBox="1"/>
+          <p:nvPr/>
+        </p:nvSpPr>
+        <p:spPr>
+          <a:xfrm>
+            <a:off x="5989320" y="3611880"/>
+            <a:ext cx="2491740" cy="2011680"/>
+          </a:xfrm>
+          <a:prstGeom prst="rect">
+            <a:avLst/>
+          </a:prstGeom>
+          <a:noFill/>
+          <a:ln/>
+        </p:spPr>
+        <p:txBody>
+          <a:bodyPr wrap="square" lIns="0" tIns="0" rIns="0" bIns="0" rtlCol="0" anchor="t"/>
+          <a:lstStyle/>
+          <a:p>
+            <a:pPr rtl="1" algn="ctr" indent="0" marL="0">
+              <a:buNone/>
+            </a:pPr>
+            <a:r>
+              <a:rPr lang="en-US" sz="1100" dirty="0">
+                <a:solidFill>
+                  <a:srgbClr val="444B66"/>
+                </a:solidFill>
+                <a:latin typeface="Calibri" pitchFamily="34" charset="0"/>
+                <a:ea typeface="Calibri" pitchFamily="34" charset="-122"/>
+                <a:cs typeface="Calibri" pitchFamily="34" charset="-120"/>
+              </a:rPr>
+              <a:t>از همان لحظه، سهم ریوارد/فی به این ولیدیتور دیگر تعلق نمی‌گیرد</a:t>
+            </a:r>
+            <a:endParaRPr lang="en-US" sz="1100" dirty="0"/>
+          </a:p>
+        </p:txBody>
+      </p:sp>
+      <p:sp>
+        <p:nvSpPr>
+          <p:cNvPr id="17" name="Shape 13"/>
+          <p:cNvSpPr/>
+          <p:nvPr/>
+        </p:nvSpPr>
+        <p:spPr>
+          <a:xfrm>
+            <a:off x="5760720" y="2468880"/>
+            <a:ext cx="228600" cy="0"/>
+          </a:xfrm>
+          <a:prstGeom prst="line">
+            <a:avLst/>
+          </a:prstGeom>
+          <a:noFill/>
+          <a:ln w="19050">
+            <a:solidFill>
+              <a:srgbClr val="C9CEE0"/>
+            </a:solidFill>
+            <a:prstDash val="solid"/>
+          </a:ln>
+        </p:spPr>
+      </p:sp>
+      <p:sp>
+        <p:nvSpPr>
+          <p:cNvPr id="18" name="Shape 14"/>
+          <p:cNvSpPr/>
+          <p:nvPr/>
+        </p:nvSpPr>
+        <p:spPr>
+          <a:xfrm>
+            <a:off x="4149090" y="2103120"/>
+            <a:ext cx="731520" cy="731520"/>
+          </a:xfrm>
+          <a:prstGeom prst="ellipse">
+            <a:avLst/>
+          </a:prstGeom>
+          <a:solidFill>
+            <a:srgbClr val="2F3690"/>
+          </a:solidFill>
+          <a:ln/>
+        </p:spPr>
+      </p:sp>
+      <p:pic>
+        <p:nvPicPr>
+          <p:cNvPr id="19" name="Image 2" descr="/home/claude/deck1/icons/sync.png">    </p:cNvPr>
+          <p:cNvPicPr>
+            <a:picLocks noChangeAspect="1"/>
+          </p:cNvPicPr>
+          <p:nvPr/>
+        </p:nvPicPr>
+        <p:blipFill>
+          <a:blip r:embed="rId3"/>
+          <a:stretch>
+            <a:fillRect/>
+          </a:stretch>
+        </p:blipFill>
+        <p:spPr>
+          <a:xfrm>
+            <a:off x="4339285" y="2293315"/>
+            <a:ext cx="351130" cy="351130"/>
+          </a:xfrm>
+          <a:prstGeom prst="rect">
+            <a:avLst/>
+          </a:prstGeom>
+        </p:spPr>
+      </p:pic>
+      <p:sp>
+        <p:nvSpPr>
+          <p:cNvPr id="20" name="Shape 15"/>
+          <p:cNvSpPr/>
+          <p:nvPr/>
+        </p:nvSpPr>
+        <p:spPr>
+          <a:xfrm>
+            <a:off x="4130802" y="1965960"/>
+            <a:ext cx="329184" cy="329184"/>
+          </a:xfrm>
+          <a:prstGeom prst="ellipse">
+            <a:avLst/>
+          </a:prstGeom>
+          <a:solidFill>
+            <a:srgbClr val="D4AF37"/>
+          </a:solidFill>
+          <a:ln/>
+        </p:spPr>
+      </p:sp>
+      <p:sp>
+        <p:nvSpPr>
+          <p:cNvPr id="21" name="Text 16"/>
+          <p:cNvSpPr txBox="1"/>
+          <p:nvPr/>
+        </p:nvSpPr>
+        <p:spPr>
+          <a:xfrm>
+            <a:off x="4130802" y="1956816"/>
+            <a:ext cx="329184" cy="329184"/>
+          </a:xfrm>
+          <a:prstGeom prst="rect">
+            <a:avLst/>
+          </a:prstGeom>
+          <a:noFill/>
+          <a:ln/>
+        </p:spPr>
+        <p:txBody>
+          <a:bodyPr wrap="square" lIns="0" tIns="0" rIns="0" bIns="0" rtlCol="0" anchor="ctr"/>
+          <a:lstStyle/>
+          <a:p>
+            <a:pPr algn="ctr" indent="0" marL="0">
+              <a:buNone/>
+            </a:pPr>
+            <a:r>
+              <a:rPr lang="en-US" sz="1300" b="1" dirty="0">
+                <a:solidFill>
+                  <a:srgbClr val="2F3690"/>
+                </a:solidFill>
+                <a:latin typeface="Arial" pitchFamily="34" charset="0"/>
+                <a:ea typeface="Arial" pitchFamily="34" charset="-122"/>
+                <a:cs typeface="Arial" pitchFamily="34" charset="-120"/>
+              </a:rPr>
+              <a:t>3</a:t>
+            </a:r>
+            <a:endParaRPr lang="en-US" sz="1300" dirty="0"/>
+          </a:p>
+        </p:txBody>
+      </p:sp>
+      <p:sp>
+        <p:nvSpPr>
+          <p:cNvPr id="22" name="Text 17"/>
+          <p:cNvSpPr txBox="1"/>
+          <p:nvPr/>
+        </p:nvSpPr>
+        <p:spPr>
+          <a:xfrm>
+            <a:off x="3268980" y="3063240"/>
+            <a:ext cx="2491740" cy="548640"/>
+          </a:xfrm>
+          <a:prstGeom prst="rect">
+            <a:avLst/>
+          </a:prstGeom>
+          <a:noFill/>
+          <a:ln/>
+        </p:spPr>
+        <p:txBody>
+          <a:bodyPr wrap="square" lIns="0" tIns="0" rIns="0" bIns="0" rtlCol="0" anchor="ctr"/>
+          <a:lstStyle/>
+          <a:p>
+            <a:pPr rtl="1" algn="ctr" indent="0" marL="0">
+              <a:buNone/>
+            </a:pPr>
+            <a:r>
+              <a:rPr lang="en-US" sz="1300" b="1" dirty="0">
+                <a:solidFill>
+                  <a:srgbClr val="1B1B2F"/>
+                </a:solidFill>
+                <a:latin typeface="Calibri" pitchFamily="34" charset="0"/>
+                <a:ea typeface="Calibri" pitchFamily="34" charset="-122"/>
+                <a:cs typeface="Calibri" pitchFamily="34" charset="-120"/>
+              </a:rPr>
+              <a:t>فرصت بازگشت</a:t>
+            </a:r>
+            <a:endParaRPr lang="en-US" sz="1300" dirty="0"/>
+          </a:p>
+        </p:txBody>
+      </p:sp>
+      <p:sp>
+        <p:nvSpPr>
+          <p:cNvPr id="23" name="Text 18"/>
+          <p:cNvSpPr txBox="1"/>
+          <p:nvPr/>
+        </p:nvSpPr>
+        <p:spPr>
+          <a:xfrm>
+            <a:off x="3268980" y="3611880"/>
+            <a:ext cx="2491740" cy="2011680"/>
+          </a:xfrm>
+          <a:prstGeom prst="rect">
+            <a:avLst/>
+          </a:prstGeom>
+          <a:noFill/>
+          <a:ln/>
+        </p:spPr>
+        <p:txBody>
+          <a:bodyPr wrap="square" lIns="0" tIns="0" rIns="0" bIns="0" rtlCol="0" anchor="t"/>
+          <a:lstStyle/>
+          <a:p>
+            <a:pPr rtl="1" algn="ctr" indent="0" marL="0">
+              <a:buNone/>
+            </a:pPr>
+            <a:r>
+              <a:rPr lang="en-US" sz="1100" dirty="0">
+                <a:solidFill>
+                  <a:srgbClr val="444B66"/>
+                </a:solidFill>
+                <a:latin typeface="Calibri" pitchFamily="34" charset="0"/>
+                <a:ea typeface="Calibri" pitchFamily="34" charset="-122"/>
+                <a:cs typeface="Calibri" pitchFamily="34" charset="-120"/>
+              </a:rPr>
+              <a:t>در یک دوره‌ی بازگشت مشخص، اگر دوباره لایوینس تأیید شود، بدون هیچ جریمه‌ای به فعال برمی‌گردد</a:t>
+            </a:r>
+            <a:endParaRPr lang="en-US" sz="1100" dirty="0"/>
+          </a:p>
+        </p:txBody>
+      </p:sp>
+      <p:sp>
+        <p:nvSpPr>
+          <p:cNvPr id="24" name="Shape 19"/>
+          <p:cNvSpPr/>
+          <p:nvPr/>
+        </p:nvSpPr>
+        <p:spPr>
+          <a:xfrm>
+            <a:off x="3040380" y="2468880"/>
+            <a:ext cx="228600" cy="0"/>
+          </a:xfrm>
+          <a:prstGeom prst="line">
+            <a:avLst/>
+          </a:prstGeom>
+          <a:noFill/>
+          <a:ln w="19050">
+            <a:solidFill>
+              <a:srgbClr val="C9CEE0"/>
+            </a:solidFill>
+            <a:prstDash val="solid"/>
+          </a:ln>
+        </p:spPr>
+      </p:sp>
+      <p:sp>
+        <p:nvSpPr>
+          <p:cNvPr id="25" name="Shape 20"/>
+          <p:cNvSpPr/>
+          <p:nvPr/>
+        </p:nvSpPr>
+        <p:spPr>
+          <a:xfrm>
+            <a:off x="1428750" y="2103120"/>
+            <a:ext cx="731520" cy="731520"/>
+          </a:xfrm>
+          <a:prstGeom prst="ellipse">
+            <a:avLst/>
+          </a:prstGeom>
+          <a:solidFill>
+            <a:srgbClr val="2F3690"/>
+          </a:solidFill>
+          <a:ln/>
+        </p:spPr>
+      </p:sp>
+      <p:pic>
+        <p:nvPicPr>
+          <p:cNvPr id="26" name="Image 3" descr="/home/claude/deck1/icons/lock.png">    </p:cNvPr>
+          <p:cNvPicPr>
+            <a:picLocks noChangeAspect="1"/>
+          </p:cNvPicPr>
+          <p:nvPr/>
+        </p:nvPicPr>
+        <p:blipFill>
+          <a:blip r:embed="rId4"/>
+          <a:stretch>
+            <a:fillRect/>
+          </a:stretch>
+        </p:blipFill>
+        <p:spPr>
+          <a:xfrm>
+            <a:off x="1618945" y="2293315"/>
+            <a:ext cx="351130" cy="351130"/>
+          </a:xfrm>
+          <a:prstGeom prst="rect">
+            <a:avLst/>
+          </a:prstGeom>
+        </p:spPr>
+      </p:pic>
+      <p:sp>
+        <p:nvSpPr>
+          <p:cNvPr id="27" name="Shape 21"/>
+          <p:cNvSpPr/>
+          <p:nvPr/>
+        </p:nvSpPr>
+        <p:spPr>
+          <a:xfrm>
+            <a:off x="1410462" y="1965960"/>
+            <a:ext cx="329184" cy="329184"/>
+          </a:xfrm>
+          <a:prstGeom prst="ellipse">
+            <a:avLst/>
+          </a:prstGeom>
+          <a:solidFill>
+            <a:srgbClr val="D4AF37"/>
+          </a:solidFill>
+          <a:ln/>
+        </p:spPr>
+      </p:sp>
+      <p:sp>
+        <p:nvSpPr>
+          <p:cNvPr id="28" name="Text 22"/>
+          <p:cNvSpPr txBox="1"/>
+          <p:nvPr/>
+        </p:nvSpPr>
+        <p:spPr>
+          <a:xfrm>
+            <a:off x="1410462" y="1956816"/>
+            <a:ext cx="329184" cy="329184"/>
+          </a:xfrm>
+          <a:prstGeom prst="rect">
+            <a:avLst/>
+          </a:prstGeom>
+          <a:noFill/>
+          <a:ln/>
+        </p:spPr>
+        <p:txBody>
+          <a:bodyPr wrap="square" lIns="0" tIns="0" rIns="0" bIns="0" rtlCol="0" anchor="ctr"/>
+          <a:lstStyle/>
+          <a:p>
+            <a:pPr algn="ctr" indent="0" marL="0">
+              <a:buNone/>
+            </a:pPr>
+            <a:r>
+              <a:rPr lang="en-US" sz="1300" b="1" dirty="0">
+                <a:solidFill>
+                  <a:srgbClr val="2F3690"/>
+                </a:solidFill>
+                <a:latin typeface="Arial" pitchFamily="34" charset="0"/>
+                <a:ea typeface="Arial" pitchFamily="34" charset="-122"/>
+                <a:cs typeface="Arial" pitchFamily="34" charset="-120"/>
+              </a:rPr>
+              <a:t>4</a:t>
+            </a:r>
+            <a:endParaRPr lang="en-US" sz="1300" dirty="0"/>
+          </a:p>
+        </p:txBody>
+      </p:sp>
+      <p:sp>
+        <p:nvSpPr>
+          <p:cNvPr id="29" name="Text 23"/>
+          <p:cNvSpPr txBox="1"/>
+          <p:nvPr/>
+        </p:nvSpPr>
+        <p:spPr>
+          <a:xfrm>
+            <a:off x="548640" y="3063240"/>
+            <a:ext cx="2491740" cy="548640"/>
+          </a:xfrm>
+          <a:prstGeom prst="rect">
+            <a:avLst/>
+          </a:prstGeom>
+          <a:noFill/>
+          <a:ln/>
+        </p:spPr>
+        <p:txBody>
+          <a:bodyPr wrap="square" lIns="0" tIns="0" rIns="0" bIns="0" rtlCol="0" anchor="ctr"/>
+          <a:lstStyle/>
+          <a:p>
+            <a:pPr rtl="1" algn="ctr" indent="0" marL="0">
+              <a:buNone/>
+            </a:pPr>
+            <a:r>
+              <a:rPr lang="en-US" sz="1300" b="1" dirty="0">
+                <a:solidFill>
+                  <a:srgbClr val="1B1B2F"/>
+                </a:solidFill>
+                <a:latin typeface="Calibri" pitchFamily="34" charset="0"/>
+                <a:ea typeface="Calibri" pitchFamily="34" charset="-122"/>
+                <a:cs typeface="Calibri" pitchFamily="34" charset="-120"/>
+              </a:rPr>
+              <a:t>عدم بازگشت = خروج + اسلش</a:t>
+            </a:r>
+            <a:endParaRPr lang="en-US" sz="1300" dirty="0"/>
+          </a:p>
+        </p:txBody>
+      </p:sp>
+      <p:sp>
+        <p:nvSpPr>
+          <p:cNvPr id="30" name="Text 24"/>
+          <p:cNvSpPr txBox="1"/>
+          <p:nvPr/>
+        </p:nvSpPr>
+        <p:spPr>
+          <a:xfrm>
+            <a:off x="548640" y="3611880"/>
+            <a:ext cx="2491740" cy="2011680"/>
+          </a:xfrm>
+          <a:prstGeom prst="rect">
+            <a:avLst/>
+          </a:prstGeom>
+          <a:noFill/>
+          <a:ln/>
+        </p:spPr>
+        <p:txBody>
+          <a:bodyPr wrap="square" lIns="0" tIns="0" rIns="0" bIns="0" rtlCol="0" anchor="t"/>
+          <a:lstStyle/>
+          <a:p>
+            <a:pPr rtl="1" algn="ctr" indent="0" marL="0">
+              <a:buNone/>
+            </a:pPr>
+            <a:r>
+              <a:rPr lang="en-US" sz="1100" dirty="0">
+                <a:solidFill>
+                  <a:srgbClr val="444B66"/>
+                </a:solidFill>
+                <a:latin typeface="Calibri" pitchFamily="34" charset="0"/>
+                <a:ea typeface="Calibri" pitchFamily="34" charset="-122"/>
+                <a:cs typeface="Calibri" pitchFamily="34" charset="-120"/>
+              </a:rPr>
+              <a:t>بعد از دوره‌ی بازگشت، خروج رسمی با cooldown؛ بخشی از وثیقه طبق درصد اسلش کسر می‌شود</a:t>
+            </a:r>
+            <a:endParaRPr lang="en-US" sz="1100" dirty="0"/>
+          </a:p>
+        </p:txBody>
+      </p:sp>
+      <p:sp>
+        <p:nvSpPr>
+          <p:cNvPr id="31" name="Shape 25"/>
+          <p:cNvSpPr/>
+          <p:nvPr/>
+        </p:nvSpPr>
+        <p:spPr>
+          <a:xfrm>
+            <a:off x="429768" y="6446520"/>
+            <a:ext cx="310896" cy="310896"/>
+          </a:xfrm>
+          <a:prstGeom prst="ellipse">
+            <a:avLst/>
+          </a:prstGeom>
+          <a:solidFill>
+            <a:srgbClr val="FFFFFF"/>
+          </a:solidFill>
+          <a:ln/>
+        </p:spPr>
+      </p:sp>
+      <p:pic>
+        <p:nvPicPr>
+          <p:cNvPr id="32" name="Image 4" descr="/home/claude/deck1/assets/logo.png">    </p:cNvPr>
+          <p:cNvPicPr>
+            <a:picLocks noChangeAspect="1"/>
+          </p:cNvPicPr>
+          <p:nvPr/>
+        </p:nvPicPr>
+        <p:blipFill>
+          <a:blip r:embed="rId5"/>
+          <a:stretch>
+            <a:fillRect/>
+          </a:stretch>
+        </p:blipFill>
+        <p:spPr>
+          <a:xfrm>
+            <a:off x="457200" y="6473952"/>
+            <a:ext cx="256032" cy="256032"/>
+          </a:xfrm>
+          <a:prstGeom prst="rect">
+            <a:avLst/>
+          </a:prstGeom>
+        </p:spPr>
+      </p:pic>
+      <p:sp>
+        <p:nvSpPr>
+          <p:cNvPr id="33" name="Text 26"/>
+          <p:cNvSpPr txBox="1"/>
+          <p:nvPr/>
+        </p:nvSpPr>
+        <p:spPr>
+          <a:xfrm>
+            <a:off x="804672" y="6537960"/>
+            <a:ext cx="6949440" cy="274320"/>
+          </a:xfrm>
+          <a:prstGeom prst="rect">
+            <a:avLst/>
+          </a:prstGeom>
+          <a:noFill/>
+          <a:ln/>
+        </p:spPr>
+        <p:txBody>
+          <a:bodyPr wrap="square" lIns="0" tIns="0" rIns="0" bIns="0" rtlCol="0" anchor="ctr"/>
+          <a:lstStyle/>
+          <a:p>
+            <a:pPr rtl="1" algn="r" indent="0" marL="0">
+              <a:buNone/>
+            </a:pPr>
+            <a:r>
+              <a:rPr lang="en-US" sz="1000" dirty="0">
+                <a:solidFill>
+                  <a:srgbClr val="8B93B0"/>
+                </a:solidFill>
+                <a:latin typeface="Calibri" pitchFamily="34" charset="0"/>
+                <a:ea typeface="Calibri" pitchFamily="34" charset="-122"/>
+                <a:cs typeface="Calibri" pitchFamily="34" charset="-120"/>
+              </a:rPr>
+              <a:t>بلاک‌چین سور — ارائه به هیأت‌مدیره‌ی بنیاد</a:t>
+            </a:r>
+            <a:endParaRPr lang="en-US" sz="1000" dirty="0"/>
+          </a:p>
+        </p:txBody>
+      </p:sp>
+      <p:sp>
+        <p:nvSpPr>
+          <p:cNvPr id="34" name="Text 27"/>
+          <p:cNvSpPr txBox="1"/>
+          <p:nvPr/>
+        </p:nvSpPr>
+        <p:spPr>
+          <a:xfrm>
+            <a:off x="11430000" y="6537960"/>
+            <a:ext cx="365760" cy="274320"/>
+          </a:xfrm>
+          <a:prstGeom prst="rect">
+            <a:avLst/>
+          </a:prstGeom>
+          <a:noFill/>
+          <a:ln/>
+        </p:spPr>
+        <p:txBody>
+          <a:bodyPr wrap="square" lIns="0" tIns="0" rIns="0" bIns="0" rtlCol="0" anchor="ctr"/>
+          <a:lstStyle/>
+          <a:p>
+            <a:pPr rtl="1" algn="r" indent="0" marL="0">
+              <a:buNone/>
+            </a:pPr>
+            <a:r>
+              <a:rPr lang="en-US" sz="1000" dirty="0">
+                <a:solidFill>
+                  <a:srgbClr val="8B93B0"/>
+                </a:solidFill>
+                <a:latin typeface="Calibri" pitchFamily="34" charset="0"/>
+                <a:ea typeface="Calibri" pitchFamily="34" charset="-122"/>
+                <a:cs typeface="Calibri" pitchFamily="34" charset="-120"/>
+              </a:rPr>
+              <a:t>19</a:t>
+            </a:r>
+            <a:endParaRPr lang="en-US" sz="1000" dirty="0"/>
+          </a:p>
+        </p:txBody>
+      </p:sp>
+    </p:spTree>
+  </p:cSld>
+  <p:clrMapOvr>
+    <a:masterClrMapping/>
+  </p:clrMapOvr>
+</p:sld>
+</file>
+
+<file path=ppt/slides/slide21.xml><?xml version="1.0" encoding="utf-8"?>
+<p:sld xmlns:a="http://schemas.openxmlformats.org/drawingml/2006/main" xmlns:r="http://schemas.openxmlformats.org/officeDocument/2006/relationships" xmlns:p="http://schemas.openxmlformats.org/presentationml/2006/main">
+  <p:cSld name="Slide 21">
+    <p:bg>
+      <p:bgPr>
+        <a:solidFill>
           <a:srgbClr val="2F3690"/>
         </a:solidFill>
       </p:bgPr>
@@ -11069,505 +12183,6 @@
       <p:sp>
         <p:nvSpPr>
           <p:cNvPr id="7" name="Text 4"/>
-          <p:cNvSpPr txBox="1"/>
-          <p:nvPr/>
-        </p:nvSpPr>
-        <p:spPr>
-          <a:xfrm>
-            <a:off x="11430000" y="6537960"/>
-            <a:ext cx="365760" cy="274320"/>
-          </a:xfrm>
-          <a:prstGeom prst="rect">
-            <a:avLst/>
-          </a:prstGeom>
-          <a:noFill/>
-          <a:ln/>
-        </p:spPr>
-        <p:txBody>
-          <a:bodyPr wrap="square" lIns="0" tIns="0" rIns="0" bIns="0" rtlCol="0" anchor="ctr"/>
-          <a:lstStyle/>
-          <a:p>
-            <a:pPr rtl="1" algn="r" indent="0" marL="0">
-              <a:buNone/>
-            </a:pPr>
-            <a:r>
-              <a:rPr lang="en-US" sz="1000" dirty="0">
-                <a:solidFill>
-                  <a:srgbClr val="8B93B0"/>
-                </a:solidFill>
-                <a:latin typeface="Calibri" pitchFamily="34" charset="0"/>
-                <a:ea typeface="Calibri" pitchFamily="34" charset="-122"/>
-                <a:cs typeface="Calibri" pitchFamily="34" charset="-120"/>
-              </a:rPr>
-              <a:t>19</a:t>
-            </a:r>
-            <a:endParaRPr lang="en-US" sz="1000" dirty="0"/>
-          </a:p>
-        </p:txBody>
-      </p:sp>
-    </p:spTree>
-  </p:cSld>
-  <p:clrMapOvr>
-    <a:masterClrMapping/>
-  </p:clrMapOvr>
-</p:sld>
-</file>
-
-<file path=ppt/slides/slide21.xml><?xml version="1.0" encoding="utf-8"?>
-<p:sld xmlns:a="http://schemas.openxmlformats.org/drawingml/2006/main" xmlns:r="http://schemas.openxmlformats.org/officeDocument/2006/relationships" xmlns:p="http://schemas.openxmlformats.org/presentationml/2006/main">
-  <p:cSld name="Slide 21">
-    <p:bg>
-      <p:bgPr>
-        <a:solidFill>
-          <a:srgbClr val="FFFFFF"/>
-        </a:solidFill>
-      </p:bgPr>
-    </p:bg>
-    <p:spTree>
-      <p:nvGrpSpPr>
-        <p:cNvPr id="1" name=""/>
-        <p:cNvGrpSpPr/>
-        <p:nvPr/>
-      </p:nvGrpSpPr>
-      <p:grpSpPr>
-        <a:xfrm>
-          <a:off x="0" y="0"/>
-          <a:ext cx="0" cy="0"/>
-          <a:chOff x="0" y="0"/>
-          <a:chExt cx="0" cy="0"/>
-        </a:xfrm>
-      </p:grpSpPr>
-      <p:sp>
-        <p:nvSpPr>
-          <p:cNvPr id="2" name="Text 0"/>
-          <p:cNvSpPr txBox="1"/>
-          <p:nvPr/>
-        </p:nvSpPr>
-        <p:spPr>
-          <a:xfrm>
-            <a:off x="548640" y="292608"/>
-            <a:ext cx="11064240" cy="320040"/>
-          </a:xfrm>
-          <a:prstGeom prst="rect">
-            <a:avLst/>
-          </a:prstGeom>
-          <a:noFill/>
-          <a:ln/>
-        </p:spPr>
-        <p:txBody>
-          <a:bodyPr wrap="square" lIns="0" tIns="0" rIns="0" bIns="0" rtlCol="0" anchor="ctr"/>
-          <a:lstStyle/>
-          <a:p>
-            <a:pPr rtl="1" algn="r" indent="0" marL="0">
-              <a:buNone/>
-            </a:pPr>
-            <a:r>
-              <a:rPr lang="en-US" sz="1250" b="1" spc="150" kern="0" dirty="0">
-                <a:solidFill>
-                  <a:srgbClr val="2F3690"/>
-                </a:solidFill>
-                <a:latin typeface="Calibri" pitchFamily="34" charset="0"/>
-                <a:ea typeface="Calibri" pitchFamily="34" charset="-122"/>
-                <a:cs typeface="Calibri" pitchFamily="34" charset="-120"/>
-              </a:rPr>
-              <a:t>مجمع عمومی بنیاد</a:t>
-            </a:r>
-            <a:endParaRPr lang="en-US" sz="1250" dirty="0"/>
-          </a:p>
-        </p:txBody>
-      </p:sp>
-      <p:sp>
-        <p:nvSpPr>
-          <p:cNvPr id="3" name="Text 1"/>
-          <p:cNvSpPr txBox="1"/>
-          <p:nvPr/>
-        </p:nvSpPr>
-        <p:spPr>
-          <a:xfrm>
-            <a:off x="548640" y="576072"/>
-            <a:ext cx="11064240" cy="685800"/>
-          </a:xfrm>
-          <a:prstGeom prst="rect">
-            <a:avLst/>
-          </a:prstGeom>
-          <a:noFill/>
-          <a:ln/>
-        </p:spPr>
-        <p:txBody>
-          <a:bodyPr wrap="square" lIns="0" tIns="0" rIns="0" bIns="0" rtlCol="0" anchor="ctr"/>
-          <a:lstStyle/>
-          <a:p>
-            <a:pPr rtl="1" algn="r" indent="0" marL="0">
-              <a:buNone/>
-            </a:pPr>
-            <a:r>
-              <a:rPr lang="en-US" sz="2500" b="1" dirty="0">
-                <a:solidFill>
-                  <a:srgbClr val="1B1B2F"/>
-                </a:solidFill>
-                <a:latin typeface="Cambria" pitchFamily="34" charset="0"/>
-                <a:ea typeface="Cambria" pitchFamily="34" charset="-122"/>
-                <a:cs typeface="Cambria" pitchFamily="34" charset="-120"/>
-              </a:rPr>
-              <a:t>۱۵ عضو، دو نوع نصاب</a:t>
-            </a:r>
-            <a:endParaRPr lang="en-US" sz="2500" dirty="0"/>
-          </a:p>
-        </p:txBody>
-      </p:sp>
-      <p:sp>
-        <p:nvSpPr>
-          <p:cNvPr id="4" name="Shape 2"/>
-          <p:cNvSpPr/>
-          <p:nvPr/>
-        </p:nvSpPr>
-        <p:spPr>
-          <a:xfrm>
-            <a:off x="9966960" y="2409444"/>
-            <a:ext cx="621792" cy="621792"/>
-          </a:xfrm>
-          <a:prstGeom prst="ellipse">
-            <a:avLst/>
-          </a:prstGeom>
-          <a:solidFill>
-            <a:srgbClr val="2F3690"/>
-          </a:solidFill>
-          <a:ln/>
-        </p:spPr>
-      </p:sp>
-      <p:pic>
-        <p:nvPicPr>
-          <p:cNvPr id="5" name="Image 0" descr="/home/claude/deck1/icons/gavel.png">    </p:cNvPr>
-          <p:cNvPicPr>
-            <a:picLocks noChangeAspect="1"/>
-          </p:cNvPicPr>
-          <p:nvPr/>
-        </p:nvPicPr>
-        <p:blipFill>
-          <a:blip r:embed="rId1"/>
-          <a:stretch>
-            <a:fillRect/>
-          </a:stretch>
-        </p:blipFill>
-        <p:spPr>
-          <a:xfrm>
-            <a:off x="10128626" y="2571110"/>
-            <a:ext cx="298460" cy="298460"/>
-          </a:xfrm>
-          <a:prstGeom prst="rect">
-            <a:avLst/>
-          </a:prstGeom>
-        </p:spPr>
-      </p:pic>
-      <p:sp>
-        <p:nvSpPr>
-          <p:cNvPr id="6" name="Text 3"/>
-          <p:cNvSpPr txBox="1"/>
-          <p:nvPr/>
-        </p:nvSpPr>
-        <p:spPr>
-          <a:xfrm>
-            <a:off x="548640" y="1508760"/>
-            <a:ext cx="9144000" cy="365760"/>
-          </a:xfrm>
-          <a:prstGeom prst="rect">
-            <a:avLst/>
-          </a:prstGeom>
-          <a:noFill/>
-          <a:ln/>
-        </p:spPr>
-        <p:txBody>
-          <a:bodyPr wrap="square" lIns="0" tIns="0" rIns="0" bIns="0" rtlCol="0" anchor="ctr"/>
-          <a:lstStyle/>
-          <a:p>
-            <a:pPr rtl="1" algn="r" indent="0" marL="0">
-              <a:buNone/>
-            </a:pPr>
-            <a:r>
-              <a:rPr lang="en-US" sz="1550" b="1" dirty="0">
-                <a:solidFill>
-                  <a:srgbClr val="1B1B2F"/>
-                </a:solidFill>
-                <a:latin typeface="Calibri" pitchFamily="34" charset="0"/>
-                <a:ea typeface="Calibri" pitchFamily="34" charset="-122"/>
-                <a:cs typeface="Calibri" pitchFamily="34" charset="-120"/>
-              </a:rPr>
-              <a:t>نصاب دوسوم: افزودن/حذف عضو، خرج سورن (proposeSendETH)</a:t>
-            </a:r>
-            <a:endParaRPr lang="en-US" sz="1550" dirty="0"/>
-          </a:p>
-        </p:txBody>
-      </p:sp>
-      <p:sp>
-        <p:nvSpPr>
-          <p:cNvPr id="7" name="Text 4"/>
-          <p:cNvSpPr txBox="1"/>
-          <p:nvPr/>
-        </p:nvSpPr>
-        <p:spPr>
-          <a:xfrm>
-            <a:off x="548640" y="1856232"/>
-            <a:ext cx="9144000" cy="2039112"/>
-          </a:xfrm>
-          <a:prstGeom prst="rect">
-            <a:avLst/>
-          </a:prstGeom>
-          <a:noFill/>
-          <a:ln/>
-        </p:spPr>
-        <p:txBody>
-          <a:bodyPr wrap="square" lIns="0" tIns="0" rIns="0" bIns="0" rtlCol="0" anchor="t"/>
-          <a:lstStyle/>
-          <a:p>
-            <a:pPr rtl="1" algn="r" indent="0" marL="0">
-              <a:buNone/>
-            </a:pPr>
-            <a:r>
-              <a:rPr lang="en-US" sz="1200" dirty="0">
-                <a:solidFill>
-                  <a:srgbClr val="444B66"/>
-                </a:solidFill>
-                <a:latin typeface="Calibri" pitchFamily="34" charset="0"/>
-                <a:ea typeface="Calibri" pitchFamily="34" charset="-122"/>
-                <a:cs typeface="Calibri" pitchFamily="34" charset="-120"/>
-              </a:rPr>
-              <a:t>با ۱۵ عضو یعنی حداقل ۱۰ رأی — تصمیمات با ریسک بالاتر.</a:t>
-            </a:r>
-            <a:endParaRPr lang="en-US" sz="1200" dirty="0"/>
-          </a:p>
-        </p:txBody>
-      </p:sp>
-      <p:sp>
-        <p:nvSpPr>
-          <p:cNvPr id="8" name="Shape 5"/>
-          <p:cNvSpPr/>
-          <p:nvPr/>
-        </p:nvSpPr>
-        <p:spPr>
-          <a:xfrm>
-            <a:off x="548640" y="3877056"/>
-            <a:ext cx="10881360" cy="0"/>
-          </a:xfrm>
-          <a:prstGeom prst="line">
-            <a:avLst/>
-          </a:prstGeom>
-          <a:noFill/>
-          <a:ln w="12700">
-            <a:solidFill>
-              <a:srgbClr val="E5E8F0"/>
-            </a:solidFill>
-            <a:prstDash val="solid"/>
-          </a:ln>
-        </p:spPr>
-      </p:sp>
-      <p:sp>
-        <p:nvSpPr>
-          <p:cNvPr id="9" name="Shape 6"/>
-          <p:cNvSpPr/>
-          <p:nvPr/>
-        </p:nvSpPr>
-        <p:spPr>
-          <a:xfrm>
-            <a:off x="9966960" y="4832604"/>
-            <a:ext cx="621792" cy="621792"/>
-          </a:xfrm>
-          <a:prstGeom prst="ellipse">
-            <a:avLst/>
-          </a:prstGeom>
-          <a:solidFill>
-            <a:srgbClr val="8B6F00"/>
-          </a:solidFill>
-          <a:ln/>
-        </p:spPr>
-      </p:sp>
-      <p:pic>
-        <p:nvPicPr>
-          <p:cNvPr id="10" name="Image 1" descr="/home/claude/deck1/icons/balance.png">    </p:cNvPr>
-          <p:cNvPicPr>
-            <a:picLocks noChangeAspect="1"/>
-          </p:cNvPicPr>
-          <p:nvPr/>
-        </p:nvPicPr>
-        <p:blipFill>
-          <a:blip r:embed="rId2"/>
-          <a:stretch>
-            <a:fillRect/>
-          </a:stretch>
-        </p:blipFill>
-        <p:spPr>
-          <a:xfrm>
-            <a:off x="10128626" y="4994270"/>
-            <a:ext cx="298460" cy="298460"/>
-          </a:xfrm>
-          <a:prstGeom prst="rect">
-            <a:avLst/>
-          </a:prstGeom>
-        </p:spPr>
-      </p:pic>
-      <p:sp>
-        <p:nvSpPr>
-          <p:cNvPr id="11" name="Text 7"/>
-          <p:cNvSpPr txBox="1"/>
-          <p:nvPr/>
-        </p:nvSpPr>
-        <p:spPr>
-          <a:xfrm>
-            <a:off x="548640" y="3931920"/>
-            <a:ext cx="9144000" cy="365760"/>
-          </a:xfrm>
-          <a:prstGeom prst="rect">
-            <a:avLst/>
-          </a:prstGeom>
-          <a:noFill/>
-          <a:ln/>
-        </p:spPr>
-        <p:txBody>
-          <a:bodyPr wrap="square" lIns="0" tIns="0" rIns="0" bIns="0" rtlCol="0" anchor="ctr"/>
-          <a:lstStyle/>
-          <a:p>
-            <a:pPr rtl="1" algn="r" indent="0" marL="0">
-              <a:buNone/>
-            </a:pPr>
-            <a:r>
-              <a:rPr lang="en-US" sz="1550" b="1" dirty="0">
-                <a:solidFill>
-                  <a:srgbClr val="1B1B2F"/>
-                </a:solidFill>
-                <a:latin typeface="Calibri" pitchFamily="34" charset="0"/>
-                <a:ea typeface="Calibri" pitchFamily="34" charset="-122"/>
-                <a:cs typeface="Calibri" pitchFamily="34" charset="-120"/>
-              </a:rPr>
-              <a:t>نصاب اکثریت ساده: انتقال ERC20، اجرای دلخواه (Execute)</a:t>
-            </a:r>
-            <a:endParaRPr lang="en-US" sz="1550" dirty="0"/>
-          </a:p>
-        </p:txBody>
-      </p:sp>
-      <p:sp>
-        <p:nvSpPr>
-          <p:cNvPr id="12" name="Text 8"/>
-          <p:cNvSpPr txBox="1"/>
-          <p:nvPr/>
-        </p:nvSpPr>
-        <p:spPr>
-          <a:xfrm>
-            <a:off x="548640" y="4279392"/>
-            <a:ext cx="9144000" cy="2039112"/>
-          </a:xfrm>
-          <a:prstGeom prst="rect">
-            <a:avLst/>
-          </a:prstGeom>
-          <a:noFill/>
-          <a:ln/>
-        </p:spPr>
-        <p:txBody>
-          <a:bodyPr wrap="square" lIns="0" tIns="0" rIns="0" bIns="0" rtlCol="0" anchor="t"/>
-          <a:lstStyle/>
-          <a:p>
-            <a:pPr rtl="1" algn="r" indent="0" marL="0">
-              <a:buNone/>
-            </a:pPr>
-            <a:r>
-              <a:rPr lang="en-US" sz="1200" dirty="0">
-                <a:solidFill>
-                  <a:srgbClr val="444B66"/>
-                </a:solidFill>
-                <a:latin typeface="Calibri" pitchFamily="34" charset="0"/>
-                <a:ea typeface="Calibri" pitchFamily="34" charset="-122"/>
-                <a:cs typeface="Calibri" pitchFamily="34" charset="-120"/>
-              </a:rPr>
-              <a:t>با ۱۵ عضو یعنی حداقل ۸ رأی — تصمیمات با انعطاف بیشتر ولی ریسک کنترل‌شده.</a:t>
-            </a:r>
-            <a:endParaRPr lang="en-US" sz="1200" dirty="0"/>
-          </a:p>
-        </p:txBody>
-      </p:sp>
-      <p:sp>
-        <p:nvSpPr>
-          <p:cNvPr id="13" name="Shape 9"/>
-          <p:cNvSpPr/>
-          <p:nvPr/>
-        </p:nvSpPr>
-        <p:spPr>
-          <a:xfrm>
-            <a:off x="429768" y="6446520"/>
-            <a:ext cx="310896" cy="310896"/>
-          </a:xfrm>
-          <a:prstGeom prst="ellipse">
-            <a:avLst/>
-          </a:prstGeom>
-          <a:solidFill>
-            <a:srgbClr val="FFFFFF"/>
-          </a:solidFill>
-          <a:ln/>
-        </p:spPr>
-      </p:sp>
-      <p:pic>
-        <p:nvPicPr>
-          <p:cNvPr id="14" name="Image 2" descr="/home/claude/deck1/assets/logo.png">    </p:cNvPr>
-          <p:cNvPicPr>
-            <a:picLocks noChangeAspect="1"/>
-          </p:cNvPicPr>
-          <p:nvPr/>
-        </p:nvPicPr>
-        <p:blipFill>
-          <a:blip r:embed="rId3"/>
-          <a:stretch>
-            <a:fillRect/>
-          </a:stretch>
-        </p:blipFill>
-        <p:spPr>
-          <a:xfrm>
-            <a:off x="457200" y="6473952"/>
-            <a:ext cx="256032" cy="256032"/>
-          </a:xfrm>
-          <a:prstGeom prst="rect">
-            <a:avLst/>
-          </a:prstGeom>
-        </p:spPr>
-      </p:pic>
-      <p:sp>
-        <p:nvSpPr>
-          <p:cNvPr id="15" name="Text 10"/>
-          <p:cNvSpPr txBox="1"/>
-          <p:nvPr/>
-        </p:nvSpPr>
-        <p:spPr>
-          <a:xfrm>
-            <a:off x="804672" y="6537960"/>
-            <a:ext cx="6949440" cy="274320"/>
-          </a:xfrm>
-          <a:prstGeom prst="rect">
-            <a:avLst/>
-          </a:prstGeom>
-          <a:noFill/>
-          <a:ln/>
-        </p:spPr>
-        <p:txBody>
-          <a:bodyPr wrap="square" lIns="0" tIns="0" rIns="0" bIns="0" rtlCol="0" anchor="ctr"/>
-          <a:lstStyle/>
-          <a:p>
-            <a:pPr rtl="1" algn="r" indent="0" marL="0">
-              <a:buNone/>
-            </a:pPr>
-            <a:r>
-              <a:rPr lang="en-US" sz="1000" dirty="0">
-                <a:solidFill>
-                  <a:srgbClr val="8B93B0"/>
-                </a:solidFill>
-                <a:latin typeface="Calibri" pitchFamily="34" charset="0"/>
-                <a:ea typeface="Calibri" pitchFamily="34" charset="-122"/>
-                <a:cs typeface="Calibri" pitchFamily="34" charset="-120"/>
-              </a:rPr>
-              <a:t>بلاک‌چین سور — ارائه به هیأت‌مدیره‌ی بنیاد</a:t>
-            </a:r>
-            <a:endParaRPr lang="en-US" sz="1000" dirty="0"/>
-          </a:p>
-        </p:txBody>
-      </p:sp>
-      <p:sp>
-        <p:nvSpPr>
-          <p:cNvPr id="16" name="Text 11"/>
           <p:cNvSpPr txBox="1"/>
           <p:nvPr/>
         </p:nvSpPr>
@@ -11669,7 +12284,7 @@
                 <a:ea typeface="Calibri" pitchFamily="34" charset="-122"/>
                 <a:cs typeface="Calibri" pitchFamily="34" charset="-120"/>
               </a:rPr>
-              <a:t>مأموریت بنیاد</a:t>
+              <a:t>مجمع عمومی بنیاد</a:t>
             </a:r>
             <a:endParaRPr lang="en-US" sz="1250" dirty="0"/>
           </a:p>
@@ -11708,7 +12323,7 @@
                 <a:ea typeface="Cambria" pitchFamily="34" charset="-122"/>
                 <a:cs typeface="Cambria" pitchFamily="34" charset="-120"/>
               </a:rPr>
-              <a:t>وظایف بنیاد سور</a:t>
+              <a:t>۱۵ عضو، دو نوع نصاب</a:t>
             </a:r>
             <a:endParaRPr lang="en-US" sz="2500" dirty="0"/>
           </a:p>
@@ -11716,129 +12331,27 @@
       </p:sp>
       <p:sp>
         <p:nvSpPr>
-          <p:cNvPr id="4" name="Text 2"/>
-          <p:cNvSpPr txBox="1"/>
-          <p:nvPr/>
-        </p:nvSpPr>
-        <p:spPr>
-          <a:xfrm>
-            <a:off x="548640" y="1691640"/>
-            <a:ext cx="10881360" cy="4572000"/>
-          </a:xfrm>
-          <a:prstGeom prst="rect">
-            <a:avLst/>
-          </a:prstGeom>
-          <a:noFill/>
-          <a:ln/>
-        </p:spPr>
-        <p:txBody>
-          <a:bodyPr wrap="square" lIns="0" tIns="0" rIns="0" bIns="0" rtlCol="0" anchor="t"/>
-          <a:lstStyle/>
-          <a:p>
-            <a:pPr rtl="1" algn="r" indent="0" marL="0">
-              <a:spcAft>
-                <a:spcPts val="1400"/>
-              </a:spcAft>
-              <a:buNone/>
-            </a:pPr>
-            <a:r>
-              <a:rPr lang="en-US" sz="1400" dirty="0">
-                <a:solidFill>
-                  <a:srgbClr val="1B1B2F"/>
-                </a:solidFill>
-                <a:latin typeface="Calibri" pitchFamily="34" charset="0"/>
-                <a:ea typeface="Calibri" pitchFamily="34" charset="-122"/>
-                <a:cs typeface="Calibri" pitchFamily="34" charset="-120"/>
-              </a:rPr>
-              <a:t>◆  توسعه، آموزش، و تبلیغات اکوسیستم — طبق اساسنامه</a:t>
-            </a:r>
-            <a:endParaRPr lang="en-US" sz="1400" dirty="0"/>
-          </a:p>
-          <a:p>
-            <a:pPr rtl="1" algn="r" indent="0" marL="0">
-              <a:spcAft>
-                <a:spcPts val="1400"/>
-              </a:spcAft>
-              <a:buNone/>
-            </a:pPr>
-            <a:r>
-              <a:rPr lang="en-US" sz="1400" dirty="0">
-                <a:solidFill>
-                  <a:srgbClr val="1B1B2F"/>
-                </a:solidFill>
-                <a:latin typeface="Calibri" pitchFamily="34" charset="0"/>
-                <a:ea typeface="Calibri" pitchFamily="34" charset="-122"/>
-                <a:cs typeface="Calibri" pitchFamily="34" charset="-120"/>
-              </a:rPr>
-              <a:t>◆  مدیریت موجودی ۲۰میلیونی genesis و اجرای فروش دوره‌ی قیمت ثابت</a:t>
-            </a:r>
-            <a:endParaRPr lang="en-US" sz="1400" dirty="0"/>
-          </a:p>
-          <a:p>
-            <a:pPr rtl="1" algn="r" indent="0" marL="0">
-              <a:spcAft>
-                <a:spcPts val="1400"/>
-              </a:spcAft>
-              <a:buNone/>
-            </a:pPr>
-            <a:r>
-              <a:rPr lang="en-US" sz="1400" dirty="0">
-                <a:solidFill>
-                  <a:srgbClr val="1B1B2F"/>
-                </a:solidFill>
-                <a:latin typeface="Calibri" pitchFamily="34" charset="0"/>
-                <a:ea typeface="Calibri" pitchFamily="34" charset="-122"/>
-                <a:cs typeface="Calibri" pitchFamily="34" charset="-120"/>
-              </a:rPr>
-              <a:t>◆  هیچ کنترلی روی شبکه، ولیدیتورها، یا هیچ اوراکل عملیاتی‌ای ندارد</a:t>
-            </a:r>
-            <a:endParaRPr lang="en-US" sz="1400" dirty="0"/>
-          </a:p>
-          <a:p>
-            <a:pPr rtl="1" algn="r" indent="0" marL="0">
-              <a:spcAft>
-                <a:spcPts val="1400"/>
-              </a:spcAft>
-              <a:buNone/>
-            </a:pPr>
-            <a:r>
-              <a:rPr lang="en-US" sz="1400" dirty="0">
-                <a:solidFill>
-                  <a:srgbClr val="1B1B2F"/>
-                </a:solidFill>
-                <a:latin typeface="Calibri" pitchFamily="34" charset="0"/>
-                <a:ea typeface="Calibri" pitchFamily="34" charset="-122"/>
-                <a:cs typeface="Calibri" pitchFamily="34" charset="-120"/>
-              </a:rPr>
-              <a:t>◆  عضویت در بنیاد هیچ حقی را محدود نمی‌کند — یک نفر می‌تواند هم‌زمان عضو بنیاد و ولیدیتور باشد</a:t>
-            </a:r>
-            <a:endParaRPr lang="en-US" sz="1400" dirty="0"/>
-          </a:p>
-        </p:txBody>
-      </p:sp>
-      <p:sp>
-        <p:nvSpPr>
-          <p:cNvPr id="5" name="Shape 3"/>
+          <p:cNvPr id="4" name="Shape 2"/>
           <p:cNvSpPr/>
           <p:nvPr/>
         </p:nvSpPr>
         <p:spPr>
           <a:xfrm>
-            <a:off x="429768" y="6446520"/>
-            <a:ext cx="310896" cy="310896"/>
+            <a:off x="9966960" y="2409444"/>
+            <a:ext cx="621792" cy="621792"/>
           </a:xfrm>
           <a:prstGeom prst="ellipse">
             <a:avLst/>
           </a:prstGeom>
           <a:solidFill>
-            <a:srgbClr val="FFFFFF"/>
+            <a:srgbClr val="2F3690"/>
           </a:solidFill>
           <a:ln/>
         </p:spPr>
       </p:sp>
       <p:pic>
         <p:nvPicPr>
-          <p:cNvPr id="6" name="Image 0" descr="/home/claude/deck1/assets/logo.png">    </p:cNvPr>
+          <p:cNvPr id="5" name="Image 0" descr="/home/claude/deck1/icons/gavel.png">    </p:cNvPr>
           <p:cNvPicPr>
             <a:picLocks noChangeAspect="1"/>
           </p:cNvPicPr>
@@ -11852,8 +12365,8 @@
         </p:blipFill>
         <p:spPr>
           <a:xfrm>
-            <a:off x="457200" y="6473952"/>
-            <a:ext cx="256032" cy="256032"/>
+            <a:off x="10128626" y="2571110"/>
+            <a:ext cx="298460" cy="298460"/>
           </a:xfrm>
           <a:prstGeom prst="rect">
             <a:avLst/>
@@ -11862,14 +12375,14 @@
       </p:pic>
       <p:sp>
         <p:nvSpPr>
-          <p:cNvPr id="7" name="Text 4"/>
-          <p:cNvSpPr txBox="1"/>
-          <p:nvPr/>
-        </p:nvSpPr>
-        <p:spPr>
-          <a:xfrm>
-            <a:off x="804672" y="6537960"/>
-            <a:ext cx="6949440" cy="274320"/>
+          <p:cNvPr id="6" name="Text 3"/>
+          <p:cNvSpPr txBox="1"/>
+          <p:nvPr/>
+        </p:nvSpPr>
+        <p:spPr>
+          <a:xfrm>
+            <a:off x="548640" y="1508760"/>
+            <a:ext cx="9144000" cy="365760"/>
           </a:xfrm>
           <a:prstGeom prst="rect">
             <a:avLst/>
@@ -11885,14 +12398,281 @@
               <a:buNone/>
             </a:pPr>
             <a:r>
-              <a:rPr lang="en-US" sz="1000" dirty="0">
-                <a:solidFill>
-                  <a:srgbClr val="8B93B0"/>
+              <a:rPr lang="en-US" sz="1550" b="1" dirty="0">
+                <a:solidFill>
+                  <a:srgbClr val="1B1B2F"/>
                 </a:solidFill>
                 <a:latin typeface="Calibri" pitchFamily="34" charset="0"/>
                 <a:ea typeface="Calibri" pitchFamily="34" charset="-122"/>
                 <a:cs typeface="Calibri" pitchFamily="34" charset="-120"/>
               </a:rPr>
+              <a:t>نصاب دوسوم: افزودن/حذف عضو، خرج سورن (proposeSendETH)</a:t>
+            </a:r>
+            <a:endParaRPr lang="en-US" sz="1550" dirty="0"/>
+          </a:p>
+        </p:txBody>
+      </p:sp>
+      <p:sp>
+        <p:nvSpPr>
+          <p:cNvPr id="7" name="Text 4"/>
+          <p:cNvSpPr txBox="1"/>
+          <p:nvPr/>
+        </p:nvSpPr>
+        <p:spPr>
+          <a:xfrm>
+            <a:off x="548640" y="1856232"/>
+            <a:ext cx="9144000" cy="2039112"/>
+          </a:xfrm>
+          <a:prstGeom prst="rect">
+            <a:avLst/>
+          </a:prstGeom>
+          <a:noFill/>
+          <a:ln/>
+        </p:spPr>
+        <p:txBody>
+          <a:bodyPr wrap="square" lIns="0" tIns="0" rIns="0" bIns="0" rtlCol="0" anchor="t"/>
+          <a:lstStyle/>
+          <a:p>
+            <a:pPr rtl="1" algn="r" indent="0" marL="0">
+              <a:buNone/>
+            </a:pPr>
+            <a:r>
+              <a:rPr lang="en-US" sz="1200" dirty="0">
+                <a:solidFill>
+                  <a:srgbClr val="444B66"/>
+                </a:solidFill>
+                <a:latin typeface="Calibri" pitchFamily="34" charset="0"/>
+                <a:ea typeface="Calibri" pitchFamily="34" charset="-122"/>
+                <a:cs typeface="Calibri" pitchFamily="34" charset="-120"/>
+              </a:rPr>
+              <a:t>با ۱۵ عضو یعنی حداقل ۱۰ رأی — تصمیمات با ریسک بالاتر.</a:t>
+            </a:r>
+            <a:endParaRPr lang="en-US" sz="1200" dirty="0"/>
+          </a:p>
+        </p:txBody>
+      </p:sp>
+      <p:sp>
+        <p:nvSpPr>
+          <p:cNvPr id="8" name="Shape 5"/>
+          <p:cNvSpPr/>
+          <p:nvPr/>
+        </p:nvSpPr>
+        <p:spPr>
+          <a:xfrm>
+            <a:off x="548640" y="3877056"/>
+            <a:ext cx="10881360" cy="0"/>
+          </a:xfrm>
+          <a:prstGeom prst="line">
+            <a:avLst/>
+          </a:prstGeom>
+          <a:noFill/>
+          <a:ln w="12700">
+            <a:solidFill>
+              <a:srgbClr val="E5E8F0"/>
+            </a:solidFill>
+            <a:prstDash val="solid"/>
+          </a:ln>
+        </p:spPr>
+      </p:sp>
+      <p:sp>
+        <p:nvSpPr>
+          <p:cNvPr id="9" name="Shape 6"/>
+          <p:cNvSpPr/>
+          <p:nvPr/>
+        </p:nvSpPr>
+        <p:spPr>
+          <a:xfrm>
+            <a:off x="9966960" y="4832604"/>
+            <a:ext cx="621792" cy="621792"/>
+          </a:xfrm>
+          <a:prstGeom prst="ellipse">
+            <a:avLst/>
+          </a:prstGeom>
+          <a:solidFill>
+            <a:srgbClr val="8B6F00"/>
+          </a:solidFill>
+          <a:ln/>
+        </p:spPr>
+      </p:sp>
+      <p:pic>
+        <p:nvPicPr>
+          <p:cNvPr id="10" name="Image 1" descr="/home/claude/deck1/icons/balance.png">    </p:cNvPr>
+          <p:cNvPicPr>
+            <a:picLocks noChangeAspect="1"/>
+          </p:cNvPicPr>
+          <p:nvPr/>
+        </p:nvPicPr>
+        <p:blipFill>
+          <a:blip r:embed="rId2"/>
+          <a:stretch>
+            <a:fillRect/>
+          </a:stretch>
+        </p:blipFill>
+        <p:spPr>
+          <a:xfrm>
+            <a:off x="10128626" y="4994270"/>
+            <a:ext cx="298460" cy="298460"/>
+          </a:xfrm>
+          <a:prstGeom prst="rect">
+            <a:avLst/>
+          </a:prstGeom>
+        </p:spPr>
+      </p:pic>
+      <p:sp>
+        <p:nvSpPr>
+          <p:cNvPr id="11" name="Text 7"/>
+          <p:cNvSpPr txBox="1"/>
+          <p:nvPr/>
+        </p:nvSpPr>
+        <p:spPr>
+          <a:xfrm>
+            <a:off x="548640" y="3931920"/>
+            <a:ext cx="9144000" cy="365760"/>
+          </a:xfrm>
+          <a:prstGeom prst="rect">
+            <a:avLst/>
+          </a:prstGeom>
+          <a:noFill/>
+          <a:ln/>
+        </p:spPr>
+        <p:txBody>
+          <a:bodyPr wrap="square" lIns="0" tIns="0" rIns="0" bIns="0" rtlCol="0" anchor="ctr"/>
+          <a:lstStyle/>
+          <a:p>
+            <a:pPr rtl="1" algn="r" indent="0" marL="0">
+              <a:buNone/>
+            </a:pPr>
+            <a:r>
+              <a:rPr lang="en-US" sz="1550" b="1" dirty="0">
+                <a:solidFill>
+                  <a:srgbClr val="1B1B2F"/>
+                </a:solidFill>
+                <a:latin typeface="Calibri" pitchFamily="34" charset="0"/>
+                <a:ea typeface="Calibri" pitchFamily="34" charset="-122"/>
+                <a:cs typeface="Calibri" pitchFamily="34" charset="-120"/>
+              </a:rPr>
+              <a:t>نصاب اکثریت ساده: انتقال ERC20، اجرای دلخواه (Execute)</a:t>
+            </a:r>
+            <a:endParaRPr lang="en-US" sz="1550" dirty="0"/>
+          </a:p>
+        </p:txBody>
+      </p:sp>
+      <p:sp>
+        <p:nvSpPr>
+          <p:cNvPr id="12" name="Text 8"/>
+          <p:cNvSpPr txBox="1"/>
+          <p:nvPr/>
+        </p:nvSpPr>
+        <p:spPr>
+          <a:xfrm>
+            <a:off x="548640" y="4279392"/>
+            <a:ext cx="9144000" cy="2039112"/>
+          </a:xfrm>
+          <a:prstGeom prst="rect">
+            <a:avLst/>
+          </a:prstGeom>
+          <a:noFill/>
+          <a:ln/>
+        </p:spPr>
+        <p:txBody>
+          <a:bodyPr wrap="square" lIns="0" tIns="0" rIns="0" bIns="0" rtlCol="0" anchor="t"/>
+          <a:lstStyle/>
+          <a:p>
+            <a:pPr rtl="1" algn="r" indent="0" marL="0">
+              <a:buNone/>
+            </a:pPr>
+            <a:r>
+              <a:rPr lang="en-US" sz="1200" dirty="0">
+                <a:solidFill>
+                  <a:srgbClr val="444B66"/>
+                </a:solidFill>
+                <a:latin typeface="Calibri" pitchFamily="34" charset="0"/>
+                <a:ea typeface="Calibri" pitchFamily="34" charset="-122"/>
+                <a:cs typeface="Calibri" pitchFamily="34" charset="-120"/>
+              </a:rPr>
+              <a:t>با ۱۵ عضو یعنی حداقل ۸ رأی — تصمیمات با انعطاف بیشتر ولی ریسک کنترل‌شده.</a:t>
+            </a:r>
+            <a:endParaRPr lang="en-US" sz="1200" dirty="0"/>
+          </a:p>
+        </p:txBody>
+      </p:sp>
+      <p:sp>
+        <p:nvSpPr>
+          <p:cNvPr id="13" name="Shape 9"/>
+          <p:cNvSpPr/>
+          <p:nvPr/>
+        </p:nvSpPr>
+        <p:spPr>
+          <a:xfrm>
+            <a:off x="429768" y="6446520"/>
+            <a:ext cx="310896" cy="310896"/>
+          </a:xfrm>
+          <a:prstGeom prst="ellipse">
+            <a:avLst/>
+          </a:prstGeom>
+          <a:solidFill>
+            <a:srgbClr val="FFFFFF"/>
+          </a:solidFill>
+          <a:ln/>
+        </p:spPr>
+      </p:sp>
+      <p:pic>
+        <p:nvPicPr>
+          <p:cNvPr id="14" name="Image 2" descr="/home/claude/deck1/assets/logo.png">    </p:cNvPr>
+          <p:cNvPicPr>
+            <a:picLocks noChangeAspect="1"/>
+          </p:cNvPicPr>
+          <p:nvPr/>
+        </p:nvPicPr>
+        <p:blipFill>
+          <a:blip r:embed="rId3"/>
+          <a:stretch>
+            <a:fillRect/>
+          </a:stretch>
+        </p:blipFill>
+        <p:spPr>
+          <a:xfrm>
+            <a:off x="457200" y="6473952"/>
+            <a:ext cx="256032" cy="256032"/>
+          </a:xfrm>
+          <a:prstGeom prst="rect">
+            <a:avLst/>
+          </a:prstGeom>
+        </p:spPr>
+      </p:pic>
+      <p:sp>
+        <p:nvSpPr>
+          <p:cNvPr id="15" name="Text 10"/>
+          <p:cNvSpPr txBox="1"/>
+          <p:nvPr/>
+        </p:nvSpPr>
+        <p:spPr>
+          <a:xfrm>
+            <a:off x="804672" y="6537960"/>
+            <a:ext cx="6949440" cy="274320"/>
+          </a:xfrm>
+          <a:prstGeom prst="rect">
+            <a:avLst/>
+          </a:prstGeom>
+          <a:noFill/>
+          <a:ln/>
+        </p:spPr>
+        <p:txBody>
+          <a:bodyPr wrap="square" lIns="0" tIns="0" rIns="0" bIns="0" rtlCol="0" anchor="ctr"/>
+          <a:lstStyle/>
+          <a:p>
+            <a:pPr rtl="1" algn="r" indent="0" marL="0">
+              <a:buNone/>
+            </a:pPr>
+            <a:r>
+              <a:rPr lang="en-US" sz="1000" dirty="0">
+                <a:solidFill>
+                  <a:srgbClr val="8B93B0"/>
+                </a:solidFill>
+                <a:latin typeface="Calibri" pitchFamily="34" charset="0"/>
+                <a:ea typeface="Calibri" pitchFamily="34" charset="-122"/>
+                <a:cs typeface="Calibri" pitchFamily="34" charset="-120"/>
+              </a:rPr>
               <a:t>بلاک‌چین سور — ارائه به هیأت‌مدیره‌ی بنیاد</a:t>
             </a:r>
             <a:endParaRPr lang="en-US" sz="1000" dirty="0"/>
@@ -11901,7 +12681,7 @@
       </p:sp>
       <p:sp>
         <p:nvSpPr>
-          <p:cNvPr id="8" name="Text 5"/>
+          <p:cNvPr id="16" name="Text 11"/>
           <p:cNvSpPr txBox="1"/>
           <p:nvPr/>
         </p:nvSpPr>
@@ -12003,7 +12783,7 @@
                 <a:ea typeface="Calibri" pitchFamily="34" charset="-122"/>
                 <a:cs typeface="Calibri" pitchFamily="34" charset="-120"/>
               </a:rPr>
-              <a:t>مثال عملی</a:t>
+              <a:t>مأموریت بنیاد</a:t>
             </a:r>
             <a:endParaRPr lang="en-US" sz="1250" dirty="0"/>
           </a:p>
@@ -12042,7 +12822,7 @@
                 <a:ea typeface="Cambria" pitchFamily="34" charset="-122"/>
                 <a:cs typeface="Cambria" pitchFamily="34" charset="-120"/>
               </a:rPr>
-              <a:t>نحوه‌ی خرج از کیف‌پول بنیاد</a:t>
+              <a:t>وظایف بنیاد سور</a:t>
             </a:r>
             <a:endParaRPr lang="en-US" sz="2500" dirty="0"/>
           </a:p>
@@ -12050,27 +12830,129 @@
       </p:sp>
       <p:sp>
         <p:nvSpPr>
-          <p:cNvPr id="4" name="Shape 2"/>
+          <p:cNvPr id="4" name="Text 2"/>
+          <p:cNvSpPr txBox="1"/>
+          <p:nvPr/>
+        </p:nvSpPr>
+        <p:spPr>
+          <a:xfrm>
+            <a:off x="548640" y="1691640"/>
+            <a:ext cx="10881360" cy="4572000"/>
+          </a:xfrm>
+          <a:prstGeom prst="rect">
+            <a:avLst/>
+          </a:prstGeom>
+          <a:noFill/>
+          <a:ln/>
+        </p:spPr>
+        <p:txBody>
+          <a:bodyPr wrap="square" lIns="0" tIns="0" rIns="0" bIns="0" rtlCol="0" anchor="t"/>
+          <a:lstStyle/>
+          <a:p>
+            <a:pPr rtl="1" algn="r" indent="0" marL="0">
+              <a:spcAft>
+                <a:spcPts val="1400"/>
+              </a:spcAft>
+              <a:buNone/>
+            </a:pPr>
+            <a:r>
+              <a:rPr lang="en-US" sz="1400" dirty="0">
+                <a:solidFill>
+                  <a:srgbClr val="1B1B2F"/>
+                </a:solidFill>
+                <a:latin typeface="Calibri" pitchFamily="34" charset="0"/>
+                <a:ea typeface="Calibri" pitchFamily="34" charset="-122"/>
+                <a:cs typeface="Calibri" pitchFamily="34" charset="-120"/>
+              </a:rPr>
+              <a:t>◆  توسعه، آموزش، و تبلیغات اکوسیستم — طبق اساسنامه</a:t>
+            </a:r>
+            <a:endParaRPr lang="en-US" sz="1400" dirty="0"/>
+          </a:p>
+          <a:p>
+            <a:pPr rtl="1" algn="r" indent="0" marL="0">
+              <a:spcAft>
+                <a:spcPts val="1400"/>
+              </a:spcAft>
+              <a:buNone/>
+            </a:pPr>
+            <a:r>
+              <a:rPr lang="en-US" sz="1400" dirty="0">
+                <a:solidFill>
+                  <a:srgbClr val="1B1B2F"/>
+                </a:solidFill>
+                <a:latin typeface="Calibri" pitchFamily="34" charset="0"/>
+                <a:ea typeface="Calibri" pitchFamily="34" charset="-122"/>
+                <a:cs typeface="Calibri" pitchFamily="34" charset="-120"/>
+              </a:rPr>
+              <a:t>◆  مدیریت موجودی ۲۰میلیونی genesis و اجرای فروش دوره‌ی قیمت ثابت</a:t>
+            </a:r>
+            <a:endParaRPr lang="en-US" sz="1400" dirty="0"/>
+          </a:p>
+          <a:p>
+            <a:pPr rtl="1" algn="r" indent="0" marL="0">
+              <a:spcAft>
+                <a:spcPts val="1400"/>
+              </a:spcAft>
+              <a:buNone/>
+            </a:pPr>
+            <a:r>
+              <a:rPr lang="en-US" sz="1400" dirty="0">
+                <a:solidFill>
+                  <a:srgbClr val="1B1B2F"/>
+                </a:solidFill>
+                <a:latin typeface="Calibri" pitchFamily="34" charset="0"/>
+                <a:ea typeface="Calibri" pitchFamily="34" charset="-122"/>
+                <a:cs typeface="Calibri" pitchFamily="34" charset="-120"/>
+              </a:rPr>
+              <a:t>◆  هیچ کنترلی روی شبکه، ولیدیتورها، یا هیچ اوراکل عملیاتی‌ای ندارد</a:t>
+            </a:r>
+            <a:endParaRPr lang="en-US" sz="1400" dirty="0"/>
+          </a:p>
+          <a:p>
+            <a:pPr rtl="1" algn="r" indent="0" marL="0">
+              <a:spcAft>
+                <a:spcPts val="1400"/>
+              </a:spcAft>
+              <a:buNone/>
+            </a:pPr>
+            <a:r>
+              <a:rPr lang="en-US" sz="1400" dirty="0">
+                <a:solidFill>
+                  <a:srgbClr val="1B1B2F"/>
+                </a:solidFill>
+                <a:latin typeface="Calibri" pitchFamily="34" charset="0"/>
+                <a:ea typeface="Calibri" pitchFamily="34" charset="-122"/>
+                <a:cs typeface="Calibri" pitchFamily="34" charset="-120"/>
+              </a:rPr>
+              <a:t>◆  عضویت در بنیاد هیچ حقی را محدود نمی‌کند — یک نفر می‌تواند هم‌زمان عضو بنیاد و ولیدیتور باشد</a:t>
+            </a:r>
+            <a:endParaRPr lang="en-US" sz="1400" dirty="0"/>
+          </a:p>
+        </p:txBody>
+      </p:sp>
+      <p:sp>
+        <p:nvSpPr>
+          <p:cNvPr id="5" name="Shape 3"/>
           <p:cNvSpPr/>
           <p:nvPr/>
         </p:nvSpPr>
         <p:spPr>
           <a:xfrm>
-            <a:off x="9589770" y="2103120"/>
-            <a:ext cx="731520" cy="731520"/>
+            <a:off x="429768" y="6446520"/>
+            <a:ext cx="310896" cy="310896"/>
           </a:xfrm>
           <a:prstGeom prst="ellipse">
             <a:avLst/>
           </a:prstGeom>
           <a:solidFill>
-            <a:srgbClr val="2F3690"/>
+            <a:srgbClr val="FFFFFF"/>
           </a:solidFill>
           <a:ln/>
         </p:spPr>
       </p:sp>
       <p:pic>
         <p:nvPicPr>
-          <p:cNvPr id="5" name="Image 0" descr="/home/claude/deck1/icons/handshake.png">    </p:cNvPr>
+          <p:cNvPr id="6" name="Image 0" descr="/home/claude/deck1/assets/logo.png">    </p:cNvPr>
           <p:cNvPicPr>
             <a:picLocks noChangeAspect="1"/>
           </p:cNvPicPr>
@@ -12084,8 +12966,8 @@
         </p:blipFill>
         <p:spPr>
           <a:xfrm>
-            <a:off x="9779965" y="2293315"/>
-            <a:ext cx="351130" cy="351130"/>
+            <a:off x="457200" y="6473952"/>
+            <a:ext cx="256032" cy="256032"/>
           </a:xfrm>
           <a:prstGeom prst="rect">
             <a:avLst/>
@@ -12094,34 +12976,14 @@
       </p:pic>
       <p:sp>
         <p:nvSpPr>
-          <p:cNvPr id="6" name="Shape 3"/>
-          <p:cNvSpPr/>
-          <p:nvPr/>
-        </p:nvSpPr>
-        <p:spPr>
-          <a:xfrm>
-            <a:off x="9571482" y="1965960"/>
-            <a:ext cx="329184" cy="329184"/>
-          </a:xfrm>
-          <a:prstGeom prst="ellipse">
-            <a:avLst/>
-          </a:prstGeom>
-          <a:solidFill>
-            <a:srgbClr val="D4AF37"/>
-          </a:solidFill>
-          <a:ln/>
-        </p:spPr>
-      </p:sp>
-      <p:sp>
-        <p:nvSpPr>
           <p:cNvPr id="7" name="Text 4"/>
           <p:cNvSpPr txBox="1"/>
           <p:nvPr/>
         </p:nvSpPr>
         <p:spPr>
           <a:xfrm>
-            <a:off x="9571482" y="1956816"/>
-            <a:ext cx="329184" cy="329184"/>
+            <a:off x="804672" y="6537960"/>
+            <a:ext cx="6949440" cy="274320"/>
           </a:xfrm>
           <a:prstGeom prst="rect">
             <a:avLst/>
@@ -12133,791 +12995,18 @@
           <a:bodyPr wrap="square" lIns="0" tIns="0" rIns="0" bIns="0" rtlCol="0" anchor="ctr"/>
           <a:lstStyle/>
           <a:p>
-            <a:pPr algn="ctr" indent="0" marL="0">
-              <a:buNone/>
-            </a:pPr>
-            <a:r>
-              <a:rPr lang="en-US" sz="1300" b="1" dirty="0">
-                <a:solidFill>
-                  <a:srgbClr val="2F3690"/>
-                </a:solidFill>
-                <a:latin typeface="Arial" pitchFamily="34" charset="0"/>
-                <a:ea typeface="Arial" pitchFamily="34" charset="-122"/>
-                <a:cs typeface="Arial" pitchFamily="34" charset="-120"/>
-              </a:rPr>
-              <a:t>1</a:t>
-            </a:r>
-            <a:endParaRPr lang="en-US" sz="1300" dirty="0"/>
-          </a:p>
-        </p:txBody>
-      </p:sp>
-      <p:sp>
-        <p:nvSpPr>
-          <p:cNvPr id="8" name="Text 5"/>
-          <p:cNvSpPr txBox="1"/>
-          <p:nvPr/>
-        </p:nvSpPr>
-        <p:spPr>
-          <a:xfrm>
-            <a:off x="8709660" y="3063240"/>
-            <a:ext cx="2491740" cy="548640"/>
-          </a:xfrm>
-          <a:prstGeom prst="rect">
-            <a:avLst/>
-          </a:prstGeom>
-          <a:noFill/>
-          <a:ln/>
-        </p:spPr>
-        <p:txBody>
-          <a:bodyPr wrap="square" lIns="0" tIns="0" rIns="0" bIns="0" rtlCol="0" anchor="ctr"/>
-          <a:lstStyle/>
-          <a:p>
-            <a:pPr rtl="1" algn="ctr" indent="0" marL="0">
-              <a:buNone/>
-            </a:pPr>
-            <a:r>
-              <a:rPr lang="en-US" sz="1300" b="1" dirty="0">
-                <a:solidFill>
-                  <a:srgbClr val="1B1B2F"/>
+            <a:pPr rtl="1" algn="r" indent="0" marL="0">
+              <a:buNone/>
+            </a:pPr>
+            <a:r>
+              <a:rPr lang="en-US" sz="1000" dirty="0">
+                <a:solidFill>
+                  <a:srgbClr val="8B93B0"/>
                 </a:solidFill>
                 <a:latin typeface="Calibri" pitchFamily="34" charset="0"/>
                 <a:ea typeface="Calibri" pitchFamily="34" charset="-122"/>
                 <a:cs typeface="Calibri" pitchFamily="34" charset="-120"/>
               </a:rPr>
-              <a:t>پیشنهاد</a:t>
-            </a:r>
-            <a:endParaRPr lang="en-US" sz="1300" dirty="0"/>
-          </a:p>
-        </p:txBody>
-      </p:sp>
-      <p:sp>
-        <p:nvSpPr>
-          <p:cNvPr id="9" name="Text 6"/>
-          <p:cNvSpPr txBox="1"/>
-          <p:nvPr/>
-        </p:nvSpPr>
-        <p:spPr>
-          <a:xfrm>
-            <a:off x="8709660" y="3611880"/>
-            <a:ext cx="2491740" cy="2011680"/>
-          </a:xfrm>
-          <a:prstGeom prst="rect">
-            <a:avLst/>
-          </a:prstGeom>
-          <a:noFill/>
-          <a:ln/>
-        </p:spPr>
-        <p:txBody>
-          <a:bodyPr wrap="square" lIns="0" tIns="0" rIns="0" bIns="0" rtlCol="0" anchor="t"/>
-          <a:lstStyle/>
-          <a:p>
-            <a:pPr rtl="1" algn="ctr" indent="0" marL="0">
-              <a:buNone/>
-            </a:pPr>
-            <a:r>
-              <a:rPr lang="en-US" sz="1100" dirty="0">
-                <a:solidFill>
-                  <a:srgbClr val="444B66"/>
-                </a:solidFill>
-                <a:latin typeface="Calibri" pitchFamily="34" charset="0"/>
-                <a:ea typeface="Calibri" pitchFamily="34" charset="-122"/>
-                <a:cs typeface="Calibri" pitchFamily="34" charset="-120"/>
-              </a:rPr>
-              <a:t>یک عضو proposeSendETH را با توضیح، مقصد، و مبلغ فراخوانی می‌کند</a:t>
-            </a:r>
-            <a:endParaRPr lang="en-US" sz="1100" dirty="0"/>
-          </a:p>
-        </p:txBody>
-      </p:sp>
-      <p:sp>
-        <p:nvSpPr>
-          <p:cNvPr id="10" name="Shape 7"/>
-          <p:cNvSpPr/>
-          <p:nvPr/>
-        </p:nvSpPr>
-        <p:spPr>
-          <a:xfrm>
-            <a:off x="8481060" y="2468880"/>
-            <a:ext cx="228600" cy="0"/>
-          </a:xfrm>
-          <a:prstGeom prst="line">
-            <a:avLst/>
-          </a:prstGeom>
-          <a:noFill/>
-          <a:ln w="19050">
-            <a:solidFill>
-              <a:srgbClr val="C9CEE0"/>
-            </a:solidFill>
-            <a:prstDash val="solid"/>
-          </a:ln>
-        </p:spPr>
-      </p:sp>
-      <p:sp>
-        <p:nvSpPr>
-          <p:cNvPr id="11" name="Shape 8"/>
-          <p:cNvSpPr/>
-          <p:nvPr/>
-        </p:nvSpPr>
-        <p:spPr>
-          <a:xfrm>
-            <a:off x="6869430" y="2103120"/>
-            <a:ext cx="731520" cy="731520"/>
-          </a:xfrm>
-          <a:prstGeom prst="ellipse">
-            <a:avLst/>
-          </a:prstGeom>
-          <a:solidFill>
-            <a:srgbClr val="2F3690"/>
-          </a:solidFill>
-          <a:ln/>
-        </p:spPr>
-      </p:sp>
-      <p:pic>
-        <p:nvPicPr>
-          <p:cNvPr id="12" name="Image 1" descr="/home/claude/deck1/icons/users.png">    </p:cNvPr>
-          <p:cNvPicPr>
-            <a:picLocks noChangeAspect="1"/>
-          </p:cNvPicPr>
-          <p:nvPr/>
-        </p:nvPicPr>
-        <p:blipFill>
-          <a:blip r:embed="rId2"/>
-          <a:stretch>
-            <a:fillRect/>
-          </a:stretch>
-        </p:blipFill>
-        <p:spPr>
-          <a:xfrm>
-            <a:off x="7059625" y="2293315"/>
-            <a:ext cx="351130" cy="351130"/>
-          </a:xfrm>
-          <a:prstGeom prst="rect">
-            <a:avLst/>
-          </a:prstGeom>
-        </p:spPr>
-      </p:pic>
-      <p:sp>
-        <p:nvSpPr>
-          <p:cNvPr id="13" name="Shape 9"/>
-          <p:cNvSpPr/>
-          <p:nvPr/>
-        </p:nvSpPr>
-        <p:spPr>
-          <a:xfrm>
-            <a:off x="6851142" y="1965960"/>
-            <a:ext cx="329184" cy="329184"/>
-          </a:xfrm>
-          <a:prstGeom prst="ellipse">
-            <a:avLst/>
-          </a:prstGeom>
-          <a:solidFill>
-            <a:srgbClr val="D4AF37"/>
-          </a:solidFill>
-          <a:ln/>
-        </p:spPr>
-      </p:sp>
-      <p:sp>
-        <p:nvSpPr>
-          <p:cNvPr id="14" name="Text 10"/>
-          <p:cNvSpPr txBox="1"/>
-          <p:nvPr/>
-        </p:nvSpPr>
-        <p:spPr>
-          <a:xfrm>
-            <a:off x="6851142" y="1956816"/>
-            <a:ext cx="329184" cy="329184"/>
-          </a:xfrm>
-          <a:prstGeom prst="rect">
-            <a:avLst/>
-          </a:prstGeom>
-          <a:noFill/>
-          <a:ln/>
-        </p:spPr>
-        <p:txBody>
-          <a:bodyPr wrap="square" lIns="0" tIns="0" rIns="0" bIns="0" rtlCol="0" anchor="ctr"/>
-          <a:lstStyle/>
-          <a:p>
-            <a:pPr algn="ctr" indent="0" marL="0">
-              <a:buNone/>
-            </a:pPr>
-            <a:r>
-              <a:rPr lang="en-US" sz="1300" b="1" dirty="0">
-                <a:solidFill>
-                  <a:srgbClr val="2F3690"/>
-                </a:solidFill>
-                <a:latin typeface="Arial" pitchFamily="34" charset="0"/>
-                <a:ea typeface="Arial" pitchFamily="34" charset="-122"/>
-                <a:cs typeface="Arial" pitchFamily="34" charset="-120"/>
-              </a:rPr>
-              <a:t>2</a:t>
-            </a:r>
-            <a:endParaRPr lang="en-US" sz="1300" dirty="0"/>
-          </a:p>
-        </p:txBody>
-      </p:sp>
-      <p:sp>
-        <p:nvSpPr>
-          <p:cNvPr id="15" name="Text 11"/>
-          <p:cNvSpPr txBox="1"/>
-          <p:nvPr/>
-        </p:nvSpPr>
-        <p:spPr>
-          <a:xfrm>
-            <a:off x="5989320" y="3063240"/>
-            <a:ext cx="2491740" cy="548640"/>
-          </a:xfrm>
-          <a:prstGeom prst="rect">
-            <a:avLst/>
-          </a:prstGeom>
-          <a:noFill/>
-          <a:ln/>
-        </p:spPr>
-        <p:txBody>
-          <a:bodyPr wrap="square" lIns="0" tIns="0" rIns="0" bIns="0" rtlCol="0" anchor="ctr"/>
-          <a:lstStyle/>
-          <a:p>
-            <a:pPr rtl="1" algn="ctr" indent="0" marL="0">
-              <a:buNone/>
-            </a:pPr>
-            <a:r>
-              <a:rPr lang="en-US" sz="1300" b="1" dirty="0">
-                <a:solidFill>
-                  <a:srgbClr val="1B1B2F"/>
-                </a:solidFill>
-                <a:latin typeface="Calibri" pitchFamily="34" charset="0"/>
-                <a:ea typeface="Calibri" pitchFamily="34" charset="-122"/>
-                <a:cs typeface="Calibri" pitchFamily="34" charset="-120"/>
-              </a:rPr>
-              <a:t>رأی‌گیری</a:t>
-            </a:r>
-            <a:endParaRPr lang="en-US" sz="1300" dirty="0"/>
-          </a:p>
-        </p:txBody>
-      </p:sp>
-      <p:sp>
-        <p:nvSpPr>
-          <p:cNvPr id="16" name="Text 12"/>
-          <p:cNvSpPr txBox="1"/>
-          <p:nvPr/>
-        </p:nvSpPr>
-        <p:spPr>
-          <a:xfrm>
-            <a:off x="5989320" y="3611880"/>
-            <a:ext cx="2491740" cy="2011680"/>
-          </a:xfrm>
-          <a:prstGeom prst="rect">
-            <a:avLst/>
-          </a:prstGeom>
-          <a:noFill/>
-          <a:ln/>
-        </p:spPr>
-        <p:txBody>
-          <a:bodyPr wrap="square" lIns="0" tIns="0" rIns="0" bIns="0" rtlCol="0" anchor="t"/>
-          <a:lstStyle/>
-          <a:p>
-            <a:pPr rtl="1" algn="ctr" indent="0" marL="0">
-              <a:buNone/>
-            </a:pPr>
-            <a:r>
-              <a:rPr lang="en-US" sz="1100" dirty="0">
-                <a:solidFill>
-                  <a:srgbClr val="444B66"/>
-                </a:solidFill>
-                <a:latin typeface="Calibri" pitchFamily="34" charset="0"/>
-                <a:ea typeface="Calibri" pitchFamily="34" charset="-122"/>
-                <a:cs typeface="Calibri" pitchFamily="34" charset="-120"/>
-              </a:rPr>
-              <a:t>سایر اعضا با vote(proposalId) موافقت خود را ثبت می‌کنند</a:t>
-            </a:r>
-            <a:endParaRPr lang="en-US" sz="1100" dirty="0"/>
-          </a:p>
-        </p:txBody>
-      </p:sp>
-      <p:sp>
-        <p:nvSpPr>
-          <p:cNvPr id="17" name="Shape 13"/>
-          <p:cNvSpPr/>
-          <p:nvPr/>
-        </p:nvSpPr>
-        <p:spPr>
-          <a:xfrm>
-            <a:off x="5760720" y="2468880"/>
-            <a:ext cx="228600" cy="0"/>
-          </a:xfrm>
-          <a:prstGeom prst="line">
-            <a:avLst/>
-          </a:prstGeom>
-          <a:noFill/>
-          <a:ln w="19050">
-            <a:solidFill>
-              <a:srgbClr val="C9CEE0"/>
-            </a:solidFill>
-            <a:prstDash val="solid"/>
-          </a:ln>
-        </p:spPr>
-      </p:sp>
-      <p:sp>
-        <p:nvSpPr>
-          <p:cNvPr id="18" name="Shape 14"/>
-          <p:cNvSpPr/>
-          <p:nvPr/>
-        </p:nvSpPr>
-        <p:spPr>
-          <a:xfrm>
-            <a:off x="4149090" y="2103120"/>
-            <a:ext cx="731520" cy="731520"/>
-          </a:xfrm>
-          <a:prstGeom prst="ellipse">
-            <a:avLst/>
-          </a:prstGeom>
-          <a:solidFill>
-            <a:srgbClr val="2F3690"/>
-          </a:solidFill>
-          <a:ln/>
-        </p:spPr>
-      </p:sp>
-      <p:pic>
-        <p:nvPicPr>
-          <p:cNvPr id="19" name="Image 2" descr="/home/claude/deck1/icons/clipboard.png">    </p:cNvPr>
-          <p:cNvPicPr>
-            <a:picLocks noChangeAspect="1"/>
-          </p:cNvPicPr>
-          <p:nvPr/>
-        </p:nvPicPr>
-        <p:blipFill>
-          <a:blip r:embed="rId3"/>
-          <a:stretch>
-            <a:fillRect/>
-          </a:stretch>
-        </p:blipFill>
-        <p:spPr>
-          <a:xfrm>
-            <a:off x="4339285" y="2293315"/>
-            <a:ext cx="351130" cy="351130"/>
-          </a:xfrm>
-          <a:prstGeom prst="rect">
-            <a:avLst/>
-          </a:prstGeom>
-        </p:spPr>
-      </p:pic>
-      <p:sp>
-        <p:nvSpPr>
-          <p:cNvPr id="20" name="Shape 15"/>
-          <p:cNvSpPr/>
-          <p:nvPr/>
-        </p:nvSpPr>
-        <p:spPr>
-          <a:xfrm>
-            <a:off x="4130802" y="1965960"/>
-            <a:ext cx="329184" cy="329184"/>
-          </a:xfrm>
-          <a:prstGeom prst="ellipse">
-            <a:avLst/>
-          </a:prstGeom>
-          <a:solidFill>
-            <a:srgbClr val="D4AF37"/>
-          </a:solidFill>
-          <a:ln/>
-        </p:spPr>
-      </p:sp>
-      <p:sp>
-        <p:nvSpPr>
-          <p:cNvPr id="21" name="Text 16"/>
-          <p:cNvSpPr txBox="1"/>
-          <p:nvPr/>
-        </p:nvSpPr>
-        <p:spPr>
-          <a:xfrm>
-            <a:off x="4130802" y="1956816"/>
-            <a:ext cx="329184" cy="329184"/>
-          </a:xfrm>
-          <a:prstGeom prst="rect">
-            <a:avLst/>
-          </a:prstGeom>
-          <a:noFill/>
-          <a:ln/>
-        </p:spPr>
-        <p:txBody>
-          <a:bodyPr wrap="square" lIns="0" tIns="0" rIns="0" bIns="0" rtlCol="0" anchor="ctr"/>
-          <a:lstStyle/>
-          <a:p>
-            <a:pPr algn="ctr" indent="0" marL="0">
-              <a:buNone/>
-            </a:pPr>
-            <a:r>
-              <a:rPr lang="en-US" sz="1300" b="1" dirty="0">
-                <a:solidFill>
-                  <a:srgbClr val="2F3690"/>
-                </a:solidFill>
-                <a:latin typeface="Arial" pitchFamily="34" charset="0"/>
-                <a:ea typeface="Arial" pitchFamily="34" charset="-122"/>
-                <a:cs typeface="Arial" pitchFamily="34" charset="-120"/>
-              </a:rPr>
-              <a:t>3</a:t>
-            </a:r>
-            <a:endParaRPr lang="en-US" sz="1300" dirty="0"/>
-          </a:p>
-        </p:txBody>
-      </p:sp>
-      <p:sp>
-        <p:nvSpPr>
-          <p:cNvPr id="22" name="Text 17"/>
-          <p:cNvSpPr txBox="1"/>
-          <p:nvPr/>
-        </p:nvSpPr>
-        <p:spPr>
-          <a:xfrm>
-            <a:off x="3268980" y="3063240"/>
-            <a:ext cx="2491740" cy="548640"/>
-          </a:xfrm>
-          <a:prstGeom prst="rect">
-            <a:avLst/>
-          </a:prstGeom>
-          <a:noFill/>
-          <a:ln/>
-        </p:spPr>
-        <p:txBody>
-          <a:bodyPr wrap="square" lIns="0" tIns="0" rIns="0" bIns="0" rtlCol="0" anchor="ctr"/>
-          <a:lstStyle/>
-          <a:p>
-            <a:pPr rtl="1" algn="ctr" indent="0" marL="0">
-              <a:buNone/>
-            </a:pPr>
-            <a:r>
-              <a:rPr lang="en-US" sz="1300" b="1" dirty="0">
-                <a:solidFill>
-                  <a:srgbClr val="1B1B2F"/>
-                </a:solidFill>
-                <a:latin typeface="Calibri" pitchFamily="34" charset="0"/>
-                <a:ea typeface="Calibri" pitchFamily="34" charset="-122"/>
-                <a:cs typeface="Calibri" pitchFamily="34" charset="-120"/>
-              </a:rPr>
-              <a:t>رسیدن به نصاب</a:t>
-            </a:r>
-            <a:endParaRPr lang="en-US" sz="1300" dirty="0"/>
-          </a:p>
-        </p:txBody>
-      </p:sp>
-      <p:sp>
-        <p:nvSpPr>
-          <p:cNvPr id="23" name="Text 18"/>
-          <p:cNvSpPr txBox="1"/>
-          <p:nvPr/>
-        </p:nvSpPr>
-        <p:spPr>
-          <a:xfrm>
-            <a:off x="3268980" y="3611880"/>
-            <a:ext cx="2491740" cy="2011680"/>
-          </a:xfrm>
-          <a:prstGeom prst="rect">
-            <a:avLst/>
-          </a:prstGeom>
-          <a:noFill/>
-          <a:ln/>
-        </p:spPr>
-        <p:txBody>
-          <a:bodyPr wrap="square" lIns="0" tIns="0" rIns="0" bIns="0" rtlCol="0" anchor="t"/>
-          <a:lstStyle/>
-          <a:p>
-            <a:pPr rtl="1" algn="ctr" indent="0" marL="0">
-              <a:buNone/>
-            </a:pPr>
-            <a:r>
-              <a:rPr lang="en-US" sz="1100" dirty="0">
-                <a:solidFill>
-                  <a:srgbClr val="444B66"/>
-                </a:solidFill>
-                <a:latin typeface="Calibri" pitchFamily="34" charset="0"/>
-                <a:ea typeface="Calibri" pitchFamily="34" charset="-122"/>
-                <a:cs typeface="Calibri" pitchFamily="34" charset="-120"/>
-              </a:rPr>
-              <a:t>برای SendETH، حداقل ۱۰ رأی از ۱۵ عضو لازم است</a:t>
-            </a:r>
-            <a:endParaRPr lang="en-US" sz="1100" dirty="0"/>
-          </a:p>
-        </p:txBody>
-      </p:sp>
-      <p:sp>
-        <p:nvSpPr>
-          <p:cNvPr id="24" name="Shape 19"/>
-          <p:cNvSpPr/>
-          <p:nvPr/>
-        </p:nvSpPr>
-        <p:spPr>
-          <a:xfrm>
-            <a:off x="3040380" y="2468880"/>
-            <a:ext cx="228600" cy="0"/>
-          </a:xfrm>
-          <a:prstGeom prst="line">
-            <a:avLst/>
-          </a:prstGeom>
-          <a:noFill/>
-          <a:ln w="19050">
-            <a:solidFill>
-              <a:srgbClr val="C9CEE0"/>
-            </a:solidFill>
-            <a:prstDash val="solid"/>
-          </a:ln>
-        </p:spPr>
-      </p:sp>
-      <p:sp>
-        <p:nvSpPr>
-          <p:cNvPr id="25" name="Shape 20"/>
-          <p:cNvSpPr/>
-          <p:nvPr/>
-        </p:nvSpPr>
-        <p:spPr>
-          <a:xfrm>
-            <a:off x="1428750" y="2103120"/>
-            <a:ext cx="731520" cy="731520"/>
-          </a:xfrm>
-          <a:prstGeom prst="ellipse">
-            <a:avLst/>
-          </a:prstGeom>
-          <a:solidFill>
-            <a:srgbClr val="2F3690"/>
-          </a:solidFill>
-          <a:ln/>
-        </p:spPr>
-      </p:sp>
-      <p:pic>
-        <p:nvPicPr>
-          <p:cNvPr id="26" name="Image 3" descr="/home/claude/deck1/icons/coins.png">    </p:cNvPr>
-          <p:cNvPicPr>
-            <a:picLocks noChangeAspect="1"/>
-          </p:cNvPicPr>
-          <p:nvPr/>
-        </p:nvPicPr>
-        <p:blipFill>
-          <a:blip r:embed="rId4"/>
-          <a:stretch>
-            <a:fillRect/>
-          </a:stretch>
-        </p:blipFill>
-        <p:spPr>
-          <a:xfrm>
-            <a:off x="1618945" y="2293315"/>
-            <a:ext cx="351130" cy="351130"/>
-          </a:xfrm>
-          <a:prstGeom prst="rect">
-            <a:avLst/>
-          </a:prstGeom>
-        </p:spPr>
-      </p:pic>
-      <p:sp>
-        <p:nvSpPr>
-          <p:cNvPr id="27" name="Shape 21"/>
-          <p:cNvSpPr/>
-          <p:nvPr/>
-        </p:nvSpPr>
-        <p:spPr>
-          <a:xfrm>
-            <a:off x="1410462" y="1965960"/>
-            <a:ext cx="329184" cy="329184"/>
-          </a:xfrm>
-          <a:prstGeom prst="ellipse">
-            <a:avLst/>
-          </a:prstGeom>
-          <a:solidFill>
-            <a:srgbClr val="D4AF37"/>
-          </a:solidFill>
-          <a:ln/>
-        </p:spPr>
-      </p:sp>
-      <p:sp>
-        <p:nvSpPr>
-          <p:cNvPr id="28" name="Text 22"/>
-          <p:cNvSpPr txBox="1"/>
-          <p:nvPr/>
-        </p:nvSpPr>
-        <p:spPr>
-          <a:xfrm>
-            <a:off x="1410462" y="1956816"/>
-            <a:ext cx="329184" cy="329184"/>
-          </a:xfrm>
-          <a:prstGeom prst="rect">
-            <a:avLst/>
-          </a:prstGeom>
-          <a:noFill/>
-          <a:ln/>
-        </p:spPr>
-        <p:txBody>
-          <a:bodyPr wrap="square" lIns="0" tIns="0" rIns="0" bIns="0" rtlCol="0" anchor="ctr"/>
-          <a:lstStyle/>
-          <a:p>
-            <a:pPr algn="ctr" indent="0" marL="0">
-              <a:buNone/>
-            </a:pPr>
-            <a:r>
-              <a:rPr lang="en-US" sz="1300" b="1" dirty="0">
-                <a:solidFill>
-                  <a:srgbClr val="2F3690"/>
-                </a:solidFill>
-                <a:latin typeface="Arial" pitchFamily="34" charset="0"/>
-                <a:ea typeface="Arial" pitchFamily="34" charset="-122"/>
-                <a:cs typeface="Arial" pitchFamily="34" charset="-120"/>
-              </a:rPr>
-              <a:t>4</a:t>
-            </a:r>
-            <a:endParaRPr lang="en-US" sz="1300" dirty="0"/>
-          </a:p>
-        </p:txBody>
-      </p:sp>
-      <p:sp>
-        <p:nvSpPr>
-          <p:cNvPr id="29" name="Text 23"/>
-          <p:cNvSpPr txBox="1"/>
-          <p:nvPr/>
-        </p:nvSpPr>
-        <p:spPr>
-          <a:xfrm>
-            <a:off x="548640" y="3063240"/>
-            <a:ext cx="2491740" cy="548640"/>
-          </a:xfrm>
-          <a:prstGeom prst="rect">
-            <a:avLst/>
-          </a:prstGeom>
-          <a:noFill/>
-          <a:ln/>
-        </p:spPr>
-        <p:txBody>
-          <a:bodyPr wrap="square" lIns="0" tIns="0" rIns="0" bIns="0" rtlCol="0" anchor="ctr"/>
-          <a:lstStyle/>
-          <a:p>
-            <a:pPr rtl="1" algn="ctr" indent="0" marL="0">
-              <a:buNone/>
-            </a:pPr>
-            <a:r>
-              <a:rPr lang="en-US" sz="1300" b="1" dirty="0">
-                <a:solidFill>
-                  <a:srgbClr val="1B1B2F"/>
-                </a:solidFill>
-                <a:latin typeface="Calibri" pitchFamily="34" charset="0"/>
-                <a:ea typeface="Calibri" pitchFamily="34" charset="-122"/>
-                <a:cs typeface="Calibri" pitchFamily="34" charset="-120"/>
-              </a:rPr>
-              <a:t>اجرای خودکار</a:t>
-            </a:r>
-            <a:endParaRPr lang="en-US" sz="1300" dirty="0"/>
-          </a:p>
-        </p:txBody>
-      </p:sp>
-      <p:sp>
-        <p:nvSpPr>
-          <p:cNvPr id="30" name="Text 24"/>
-          <p:cNvSpPr txBox="1"/>
-          <p:nvPr/>
-        </p:nvSpPr>
-        <p:spPr>
-          <a:xfrm>
-            <a:off x="548640" y="3611880"/>
-            <a:ext cx="2491740" cy="2011680"/>
-          </a:xfrm>
-          <a:prstGeom prst="rect">
-            <a:avLst/>
-          </a:prstGeom>
-          <a:noFill/>
-          <a:ln/>
-        </p:spPr>
-        <p:txBody>
-          <a:bodyPr wrap="square" lIns="0" tIns="0" rIns="0" bIns="0" rtlCol="0" anchor="t"/>
-          <a:lstStyle/>
-          <a:p>
-            <a:pPr rtl="1" algn="ctr" indent="0" marL="0">
-              <a:buNone/>
-            </a:pPr>
-            <a:r>
-              <a:rPr lang="en-US" sz="1100" dirty="0">
-                <a:solidFill>
-                  <a:srgbClr val="444B66"/>
-                </a:solidFill>
-                <a:latin typeface="Calibri" pitchFamily="34" charset="0"/>
-                <a:ea typeface="Calibri" pitchFamily="34" charset="-122"/>
-                <a:cs typeface="Calibri" pitchFamily="34" charset="-120"/>
-              </a:rPr>
-              <a:t>در همان تراکنش رأی نهایی، انتقال سورن با .call انجام می‌شود</a:t>
-            </a:r>
-            <a:endParaRPr lang="en-US" sz="1100" dirty="0"/>
-          </a:p>
-        </p:txBody>
-      </p:sp>
-      <p:sp>
-        <p:nvSpPr>
-          <p:cNvPr id="31" name="Shape 25"/>
-          <p:cNvSpPr/>
-          <p:nvPr/>
-        </p:nvSpPr>
-        <p:spPr>
-          <a:xfrm>
-            <a:off x="429768" y="6446520"/>
-            <a:ext cx="310896" cy="310896"/>
-          </a:xfrm>
-          <a:prstGeom prst="ellipse">
-            <a:avLst/>
-          </a:prstGeom>
-          <a:solidFill>
-            <a:srgbClr val="FFFFFF"/>
-          </a:solidFill>
-          <a:ln/>
-        </p:spPr>
-      </p:sp>
-      <p:pic>
-        <p:nvPicPr>
-          <p:cNvPr id="32" name="Image 4" descr="/home/claude/deck1/assets/logo.png">    </p:cNvPr>
-          <p:cNvPicPr>
-            <a:picLocks noChangeAspect="1"/>
-          </p:cNvPicPr>
-          <p:nvPr/>
-        </p:nvPicPr>
-        <p:blipFill>
-          <a:blip r:embed="rId5"/>
-          <a:stretch>
-            <a:fillRect/>
-          </a:stretch>
-        </p:blipFill>
-        <p:spPr>
-          <a:xfrm>
-            <a:off x="457200" y="6473952"/>
-            <a:ext cx="256032" cy="256032"/>
-          </a:xfrm>
-          <a:prstGeom prst="rect">
-            <a:avLst/>
-          </a:prstGeom>
-        </p:spPr>
-      </p:pic>
-      <p:sp>
-        <p:nvSpPr>
-          <p:cNvPr id="33" name="Text 26"/>
-          <p:cNvSpPr txBox="1"/>
-          <p:nvPr/>
-        </p:nvSpPr>
-        <p:spPr>
-          <a:xfrm>
-            <a:off x="804672" y="6537960"/>
-            <a:ext cx="6949440" cy="274320"/>
-          </a:xfrm>
-          <a:prstGeom prst="rect">
-            <a:avLst/>
-          </a:prstGeom>
-          <a:noFill/>
-          <a:ln/>
-        </p:spPr>
-        <p:txBody>
-          <a:bodyPr wrap="square" lIns="0" tIns="0" rIns="0" bIns="0" rtlCol="0" anchor="ctr"/>
-          <a:lstStyle/>
-          <a:p>
-            <a:pPr rtl="1" algn="r" indent="0" marL="0">
-              <a:buNone/>
-            </a:pPr>
-            <a:r>
-              <a:rPr lang="en-US" sz="1000" dirty="0">
-                <a:solidFill>
-                  <a:srgbClr val="8B93B0"/>
-                </a:solidFill>
-                <a:latin typeface="Calibri" pitchFamily="34" charset="0"/>
-                <a:ea typeface="Calibri" pitchFamily="34" charset="-122"/>
-                <a:cs typeface="Calibri" pitchFamily="34" charset="-120"/>
-              </a:rPr>
               <a:t>بلاک‌چین سور — ارائه به هیأت‌مدیره‌ی بنیاد</a:t>
             </a:r>
             <a:endParaRPr lang="en-US" sz="1000" dirty="0"/>
@@ -12926,7 +13015,7 @@
       </p:sp>
       <p:sp>
         <p:nvSpPr>
-          <p:cNvPr id="34" name="Text 27"/>
+          <p:cNvPr id="8" name="Text 5"/>
           <p:cNvSpPr txBox="1"/>
           <p:nvPr/>
         </p:nvSpPr>
@@ -12974,6 +13063,1031 @@
 <file path=ppt/slides/slide24.xml><?xml version="1.0" encoding="utf-8"?>
 <p:sld xmlns:a="http://schemas.openxmlformats.org/drawingml/2006/main" xmlns:r="http://schemas.openxmlformats.org/officeDocument/2006/relationships" xmlns:p="http://schemas.openxmlformats.org/presentationml/2006/main">
   <p:cSld name="Slide 24">
+    <p:bg>
+      <p:bgPr>
+        <a:solidFill>
+          <a:srgbClr val="FFFFFF"/>
+        </a:solidFill>
+      </p:bgPr>
+    </p:bg>
+    <p:spTree>
+      <p:nvGrpSpPr>
+        <p:cNvPr id="1" name=""/>
+        <p:cNvGrpSpPr/>
+        <p:nvPr/>
+      </p:nvGrpSpPr>
+      <p:grpSpPr>
+        <a:xfrm>
+          <a:off x="0" y="0"/>
+          <a:ext cx="0" cy="0"/>
+          <a:chOff x="0" y="0"/>
+          <a:chExt cx="0" cy="0"/>
+        </a:xfrm>
+      </p:grpSpPr>
+      <p:sp>
+        <p:nvSpPr>
+          <p:cNvPr id="2" name="Text 0"/>
+          <p:cNvSpPr txBox="1"/>
+          <p:nvPr/>
+        </p:nvSpPr>
+        <p:spPr>
+          <a:xfrm>
+            <a:off x="548640" y="292608"/>
+            <a:ext cx="11064240" cy="320040"/>
+          </a:xfrm>
+          <a:prstGeom prst="rect">
+            <a:avLst/>
+          </a:prstGeom>
+          <a:noFill/>
+          <a:ln/>
+        </p:spPr>
+        <p:txBody>
+          <a:bodyPr wrap="square" lIns="0" tIns="0" rIns="0" bIns="0" rtlCol="0" anchor="ctr"/>
+          <a:lstStyle/>
+          <a:p>
+            <a:pPr rtl="1" algn="r" indent="0" marL="0">
+              <a:buNone/>
+            </a:pPr>
+            <a:r>
+              <a:rPr lang="en-US" sz="1250" b="1" spc="150" kern="0" dirty="0">
+                <a:solidFill>
+                  <a:srgbClr val="2F3690"/>
+                </a:solidFill>
+                <a:latin typeface="Calibri" pitchFamily="34" charset="0"/>
+                <a:ea typeface="Calibri" pitchFamily="34" charset="-122"/>
+                <a:cs typeface="Calibri" pitchFamily="34" charset="-120"/>
+              </a:rPr>
+              <a:t>مثال عملی</a:t>
+            </a:r>
+            <a:endParaRPr lang="en-US" sz="1250" dirty="0"/>
+          </a:p>
+        </p:txBody>
+      </p:sp>
+      <p:sp>
+        <p:nvSpPr>
+          <p:cNvPr id="3" name="Text 1"/>
+          <p:cNvSpPr txBox="1"/>
+          <p:nvPr/>
+        </p:nvSpPr>
+        <p:spPr>
+          <a:xfrm>
+            <a:off x="548640" y="576072"/>
+            <a:ext cx="11064240" cy="685800"/>
+          </a:xfrm>
+          <a:prstGeom prst="rect">
+            <a:avLst/>
+          </a:prstGeom>
+          <a:noFill/>
+          <a:ln/>
+        </p:spPr>
+        <p:txBody>
+          <a:bodyPr wrap="square" lIns="0" tIns="0" rIns="0" bIns="0" rtlCol="0" anchor="ctr"/>
+          <a:lstStyle/>
+          <a:p>
+            <a:pPr rtl="1" algn="r" indent="0" marL="0">
+              <a:buNone/>
+            </a:pPr>
+            <a:r>
+              <a:rPr lang="en-US" sz="2500" b="1" dirty="0">
+                <a:solidFill>
+                  <a:srgbClr val="1B1B2F"/>
+                </a:solidFill>
+                <a:latin typeface="Cambria" pitchFamily="34" charset="0"/>
+                <a:ea typeface="Cambria" pitchFamily="34" charset="-122"/>
+                <a:cs typeface="Cambria" pitchFamily="34" charset="-120"/>
+              </a:rPr>
+              <a:t>نحوه‌ی خرج از کیف‌پول بنیاد</a:t>
+            </a:r>
+            <a:endParaRPr lang="en-US" sz="2500" dirty="0"/>
+          </a:p>
+        </p:txBody>
+      </p:sp>
+      <p:sp>
+        <p:nvSpPr>
+          <p:cNvPr id="4" name="Shape 2"/>
+          <p:cNvSpPr/>
+          <p:nvPr/>
+        </p:nvSpPr>
+        <p:spPr>
+          <a:xfrm>
+            <a:off x="9589770" y="2103120"/>
+            <a:ext cx="731520" cy="731520"/>
+          </a:xfrm>
+          <a:prstGeom prst="ellipse">
+            <a:avLst/>
+          </a:prstGeom>
+          <a:solidFill>
+            <a:srgbClr val="2F3690"/>
+          </a:solidFill>
+          <a:ln/>
+        </p:spPr>
+      </p:sp>
+      <p:pic>
+        <p:nvPicPr>
+          <p:cNvPr id="5" name="Image 0" descr="/home/claude/deck1/icons/handshake.png">    </p:cNvPr>
+          <p:cNvPicPr>
+            <a:picLocks noChangeAspect="1"/>
+          </p:cNvPicPr>
+          <p:nvPr/>
+        </p:nvPicPr>
+        <p:blipFill>
+          <a:blip r:embed="rId1"/>
+          <a:stretch>
+            <a:fillRect/>
+          </a:stretch>
+        </p:blipFill>
+        <p:spPr>
+          <a:xfrm>
+            <a:off x="9779965" y="2293315"/>
+            <a:ext cx="351130" cy="351130"/>
+          </a:xfrm>
+          <a:prstGeom prst="rect">
+            <a:avLst/>
+          </a:prstGeom>
+        </p:spPr>
+      </p:pic>
+      <p:sp>
+        <p:nvSpPr>
+          <p:cNvPr id="6" name="Shape 3"/>
+          <p:cNvSpPr/>
+          <p:nvPr/>
+        </p:nvSpPr>
+        <p:spPr>
+          <a:xfrm>
+            <a:off x="9571482" y="1965960"/>
+            <a:ext cx="329184" cy="329184"/>
+          </a:xfrm>
+          <a:prstGeom prst="ellipse">
+            <a:avLst/>
+          </a:prstGeom>
+          <a:solidFill>
+            <a:srgbClr val="D4AF37"/>
+          </a:solidFill>
+          <a:ln/>
+        </p:spPr>
+      </p:sp>
+      <p:sp>
+        <p:nvSpPr>
+          <p:cNvPr id="7" name="Text 4"/>
+          <p:cNvSpPr txBox="1"/>
+          <p:nvPr/>
+        </p:nvSpPr>
+        <p:spPr>
+          <a:xfrm>
+            <a:off x="9571482" y="1956816"/>
+            <a:ext cx="329184" cy="329184"/>
+          </a:xfrm>
+          <a:prstGeom prst="rect">
+            <a:avLst/>
+          </a:prstGeom>
+          <a:noFill/>
+          <a:ln/>
+        </p:spPr>
+        <p:txBody>
+          <a:bodyPr wrap="square" lIns="0" tIns="0" rIns="0" bIns="0" rtlCol="0" anchor="ctr"/>
+          <a:lstStyle/>
+          <a:p>
+            <a:pPr algn="ctr" indent="0" marL="0">
+              <a:buNone/>
+            </a:pPr>
+            <a:r>
+              <a:rPr lang="en-US" sz="1300" b="1" dirty="0">
+                <a:solidFill>
+                  <a:srgbClr val="2F3690"/>
+                </a:solidFill>
+                <a:latin typeface="Arial" pitchFamily="34" charset="0"/>
+                <a:ea typeface="Arial" pitchFamily="34" charset="-122"/>
+                <a:cs typeface="Arial" pitchFamily="34" charset="-120"/>
+              </a:rPr>
+              <a:t>1</a:t>
+            </a:r>
+            <a:endParaRPr lang="en-US" sz="1300" dirty="0"/>
+          </a:p>
+        </p:txBody>
+      </p:sp>
+      <p:sp>
+        <p:nvSpPr>
+          <p:cNvPr id="8" name="Text 5"/>
+          <p:cNvSpPr txBox="1"/>
+          <p:nvPr/>
+        </p:nvSpPr>
+        <p:spPr>
+          <a:xfrm>
+            <a:off x="8709660" y="3063240"/>
+            <a:ext cx="2491740" cy="548640"/>
+          </a:xfrm>
+          <a:prstGeom prst="rect">
+            <a:avLst/>
+          </a:prstGeom>
+          <a:noFill/>
+          <a:ln/>
+        </p:spPr>
+        <p:txBody>
+          <a:bodyPr wrap="square" lIns="0" tIns="0" rIns="0" bIns="0" rtlCol="0" anchor="ctr"/>
+          <a:lstStyle/>
+          <a:p>
+            <a:pPr rtl="1" algn="ctr" indent="0" marL="0">
+              <a:buNone/>
+            </a:pPr>
+            <a:r>
+              <a:rPr lang="en-US" sz="1300" b="1" dirty="0">
+                <a:solidFill>
+                  <a:srgbClr val="1B1B2F"/>
+                </a:solidFill>
+                <a:latin typeface="Calibri" pitchFamily="34" charset="0"/>
+                <a:ea typeface="Calibri" pitchFamily="34" charset="-122"/>
+                <a:cs typeface="Calibri" pitchFamily="34" charset="-120"/>
+              </a:rPr>
+              <a:t>پیشنهاد</a:t>
+            </a:r>
+            <a:endParaRPr lang="en-US" sz="1300" dirty="0"/>
+          </a:p>
+        </p:txBody>
+      </p:sp>
+      <p:sp>
+        <p:nvSpPr>
+          <p:cNvPr id="9" name="Text 6"/>
+          <p:cNvSpPr txBox="1"/>
+          <p:nvPr/>
+        </p:nvSpPr>
+        <p:spPr>
+          <a:xfrm>
+            <a:off x="8709660" y="3611880"/>
+            <a:ext cx="2491740" cy="2011680"/>
+          </a:xfrm>
+          <a:prstGeom prst="rect">
+            <a:avLst/>
+          </a:prstGeom>
+          <a:noFill/>
+          <a:ln/>
+        </p:spPr>
+        <p:txBody>
+          <a:bodyPr wrap="square" lIns="0" tIns="0" rIns="0" bIns="0" rtlCol="0" anchor="t"/>
+          <a:lstStyle/>
+          <a:p>
+            <a:pPr rtl="1" algn="ctr" indent="0" marL="0">
+              <a:buNone/>
+            </a:pPr>
+            <a:r>
+              <a:rPr lang="en-US" sz="1100" dirty="0">
+                <a:solidFill>
+                  <a:srgbClr val="444B66"/>
+                </a:solidFill>
+                <a:latin typeface="Calibri" pitchFamily="34" charset="0"/>
+                <a:ea typeface="Calibri" pitchFamily="34" charset="-122"/>
+                <a:cs typeface="Calibri" pitchFamily="34" charset="-120"/>
+              </a:rPr>
+              <a:t>یک عضو proposeSendETH را با توضیح، مقصد، و مبلغ فراخوانی می‌کند</a:t>
+            </a:r>
+            <a:endParaRPr lang="en-US" sz="1100" dirty="0"/>
+          </a:p>
+        </p:txBody>
+      </p:sp>
+      <p:sp>
+        <p:nvSpPr>
+          <p:cNvPr id="10" name="Shape 7"/>
+          <p:cNvSpPr/>
+          <p:nvPr/>
+        </p:nvSpPr>
+        <p:spPr>
+          <a:xfrm>
+            <a:off x="8481060" y="2468880"/>
+            <a:ext cx="228600" cy="0"/>
+          </a:xfrm>
+          <a:prstGeom prst="line">
+            <a:avLst/>
+          </a:prstGeom>
+          <a:noFill/>
+          <a:ln w="19050">
+            <a:solidFill>
+              <a:srgbClr val="C9CEE0"/>
+            </a:solidFill>
+            <a:prstDash val="solid"/>
+          </a:ln>
+        </p:spPr>
+      </p:sp>
+      <p:sp>
+        <p:nvSpPr>
+          <p:cNvPr id="11" name="Shape 8"/>
+          <p:cNvSpPr/>
+          <p:nvPr/>
+        </p:nvSpPr>
+        <p:spPr>
+          <a:xfrm>
+            <a:off x="6869430" y="2103120"/>
+            <a:ext cx="731520" cy="731520"/>
+          </a:xfrm>
+          <a:prstGeom prst="ellipse">
+            <a:avLst/>
+          </a:prstGeom>
+          <a:solidFill>
+            <a:srgbClr val="2F3690"/>
+          </a:solidFill>
+          <a:ln/>
+        </p:spPr>
+      </p:sp>
+      <p:pic>
+        <p:nvPicPr>
+          <p:cNvPr id="12" name="Image 1" descr="/home/claude/deck1/icons/users.png">    </p:cNvPr>
+          <p:cNvPicPr>
+            <a:picLocks noChangeAspect="1"/>
+          </p:cNvPicPr>
+          <p:nvPr/>
+        </p:nvPicPr>
+        <p:blipFill>
+          <a:blip r:embed="rId2"/>
+          <a:stretch>
+            <a:fillRect/>
+          </a:stretch>
+        </p:blipFill>
+        <p:spPr>
+          <a:xfrm>
+            <a:off x="7059625" y="2293315"/>
+            <a:ext cx="351130" cy="351130"/>
+          </a:xfrm>
+          <a:prstGeom prst="rect">
+            <a:avLst/>
+          </a:prstGeom>
+        </p:spPr>
+      </p:pic>
+      <p:sp>
+        <p:nvSpPr>
+          <p:cNvPr id="13" name="Shape 9"/>
+          <p:cNvSpPr/>
+          <p:nvPr/>
+        </p:nvSpPr>
+        <p:spPr>
+          <a:xfrm>
+            <a:off x="6851142" y="1965960"/>
+            <a:ext cx="329184" cy="329184"/>
+          </a:xfrm>
+          <a:prstGeom prst="ellipse">
+            <a:avLst/>
+          </a:prstGeom>
+          <a:solidFill>
+            <a:srgbClr val="D4AF37"/>
+          </a:solidFill>
+          <a:ln/>
+        </p:spPr>
+      </p:sp>
+      <p:sp>
+        <p:nvSpPr>
+          <p:cNvPr id="14" name="Text 10"/>
+          <p:cNvSpPr txBox="1"/>
+          <p:nvPr/>
+        </p:nvSpPr>
+        <p:spPr>
+          <a:xfrm>
+            <a:off x="6851142" y="1956816"/>
+            <a:ext cx="329184" cy="329184"/>
+          </a:xfrm>
+          <a:prstGeom prst="rect">
+            <a:avLst/>
+          </a:prstGeom>
+          <a:noFill/>
+          <a:ln/>
+        </p:spPr>
+        <p:txBody>
+          <a:bodyPr wrap="square" lIns="0" tIns="0" rIns="0" bIns="0" rtlCol="0" anchor="ctr"/>
+          <a:lstStyle/>
+          <a:p>
+            <a:pPr algn="ctr" indent="0" marL="0">
+              <a:buNone/>
+            </a:pPr>
+            <a:r>
+              <a:rPr lang="en-US" sz="1300" b="1" dirty="0">
+                <a:solidFill>
+                  <a:srgbClr val="2F3690"/>
+                </a:solidFill>
+                <a:latin typeface="Arial" pitchFamily="34" charset="0"/>
+                <a:ea typeface="Arial" pitchFamily="34" charset="-122"/>
+                <a:cs typeface="Arial" pitchFamily="34" charset="-120"/>
+              </a:rPr>
+              <a:t>2</a:t>
+            </a:r>
+            <a:endParaRPr lang="en-US" sz="1300" dirty="0"/>
+          </a:p>
+        </p:txBody>
+      </p:sp>
+      <p:sp>
+        <p:nvSpPr>
+          <p:cNvPr id="15" name="Text 11"/>
+          <p:cNvSpPr txBox="1"/>
+          <p:nvPr/>
+        </p:nvSpPr>
+        <p:spPr>
+          <a:xfrm>
+            <a:off x="5989320" y="3063240"/>
+            <a:ext cx="2491740" cy="548640"/>
+          </a:xfrm>
+          <a:prstGeom prst="rect">
+            <a:avLst/>
+          </a:prstGeom>
+          <a:noFill/>
+          <a:ln/>
+        </p:spPr>
+        <p:txBody>
+          <a:bodyPr wrap="square" lIns="0" tIns="0" rIns="0" bIns="0" rtlCol="0" anchor="ctr"/>
+          <a:lstStyle/>
+          <a:p>
+            <a:pPr rtl="1" algn="ctr" indent="0" marL="0">
+              <a:buNone/>
+            </a:pPr>
+            <a:r>
+              <a:rPr lang="en-US" sz="1300" b="1" dirty="0">
+                <a:solidFill>
+                  <a:srgbClr val="1B1B2F"/>
+                </a:solidFill>
+                <a:latin typeface="Calibri" pitchFamily="34" charset="0"/>
+                <a:ea typeface="Calibri" pitchFamily="34" charset="-122"/>
+                <a:cs typeface="Calibri" pitchFamily="34" charset="-120"/>
+              </a:rPr>
+              <a:t>رأی‌گیری</a:t>
+            </a:r>
+            <a:endParaRPr lang="en-US" sz="1300" dirty="0"/>
+          </a:p>
+        </p:txBody>
+      </p:sp>
+      <p:sp>
+        <p:nvSpPr>
+          <p:cNvPr id="16" name="Text 12"/>
+          <p:cNvSpPr txBox="1"/>
+          <p:nvPr/>
+        </p:nvSpPr>
+        <p:spPr>
+          <a:xfrm>
+            <a:off x="5989320" y="3611880"/>
+            <a:ext cx="2491740" cy="2011680"/>
+          </a:xfrm>
+          <a:prstGeom prst="rect">
+            <a:avLst/>
+          </a:prstGeom>
+          <a:noFill/>
+          <a:ln/>
+        </p:spPr>
+        <p:txBody>
+          <a:bodyPr wrap="square" lIns="0" tIns="0" rIns="0" bIns="0" rtlCol="0" anchor="t"/>
+          <a:lstStyle/>
+          <a:p>
+            <a:pPr rtl="1" algn="ctr" indent="0" marL="0">
+              <a:buNone/>
+            </a:pPr>
+            <a:r>
+              <a:rPr lang="en-US" sz="1100" dirty="0">
+                <a:solidFill>
+                  <a:srgbClr val="444B66"/>
+                </a:solidFill>
+                <a:latin typeface="Calibri" pitchFamily="34" charset="0"/>
+                <a:ea typeface="Calibri" pitchFamily="34" charset="-122"/>
+                <a:cs typeface="Calibri" pitchFamily="34" charset="-120"/>
+              </a:rPr>
+              <a:t>سایر اعضا با vote(proposalId) موافقت خود را ثبت می‌کنند</a:t>
+            </a:r>
+            <a:endParaRPr lang="en-US" sz="1100" dirty="0"/>
+          </a:p>
+        </p:txBody>
+      </p:sp>
+      <p:sp>
+        <p:nvSpPr>
+          <p:cNvPr id="17" name="Shape 13"/>
+          <p:cNvSpPr/>
+          <p:nvPr/>
+        </p:nvSpPr>
+        <p:spPr>
+          <a:xfrm>
+            <a:off x="5760720" y="2468880"/>
+            <a:ext cx="228600" cy="0"/>
+          </a:xfrm>
+          <a:prstGeom prst="line">
+            <a:avLst/>
+          </a:prstGeom>
+          <a:noFill/>
+          <a:ln w="19050">
+            <a:solidFill>
+              <a:srgbClr val="C9CEE0"/>
+            </a:solidFill>
+            <a:prstDash val="solid"/>
+          </a:ln>
+        </p:spPr>
+      </p:sp>
+      <p:sp>
+        <p:nvSpPr>
+          <p:cNvPr id="18" name="Shape 14"/>
+          <p:cNvSpPr/>
+          <p:nvPr/>
+        </p:nvSpPr>
+        <p:spPr>
+          <a:xfrm>
+            <a:off x="4149090" y="2103120"/>
+            <a:ext cx="731520" cy="731520"/>
+          </a:xfrm>
+          <a:prstGeom prst="ellipse">
+            <a:avLst/>
+          </a:prstGeom>
+          <a:solidFill>
+            <a:srgbClr val="2F3690"/>
+          </a:solidFill>
+          <a:ln/>
+        </p:spPr>
+      </p:sp>
+      <p:pic>
+        <p:nvPicPr>
+          <p:cNvPr id="19" name="Image 2" descr="/home/claude/deck1/icons/clipboard.png">    </p:cNvPr>
+          <p:cNvPicPr>
+            <a:picLocks noChangeAspect="1"/>
+          </p:cNvPicPr>
+          <p:nvPr/>
+        </p:nvPicPr>
+        <p:blipFill>
+          <a:blip r:embed="rId3"/>
+          <a:stretch>
+            <a:fillRect/>
+          </a:stretch>
+        </p:blipFill>
+        <p:spPr>
+          <a:xfrm>
+            <a:off x="4339285" y="2293315"/>
+            <a:ext cx="351130" cy="351130"/>
+          </a:xfrm>
+          <a:prstGeom prst="rect">
+            <a:avLst/>
+          </a:prstGeom>
+        </p:spPr>
+      </p:pic>
+      <p:sp>
+        <p:nvSpPr>
+          <p:cNvPr id="20" name="Shape 15"/>
+          <p:cNvSpPr/>
+          <p:nvPr/>
+        </p:nvSpPr>
+        <p:spPr>
+          <a:xfrm>
+            <a:off x="4130802" y="1965960"/>
+            <a:ext cx="329184" cy="329184"/>
+          </a:xfrm>
+          <a:prstGeom prst="ellipse">
+            <a:avLst/>
+          </a:prstGeom>
+          <a:solidFill>
+            <a:srgbClr val="D4AF37"/>
+          </a:solidFill>
+          <a:ln/>
+        </p:spPr>
+      </p:sp>
+      <p:sp>
+        <p:nvSpPr>
+          <p:cNvPr id="21" name="Text 16"/>
+          <p:cNvSpPr txBox="1"/>
+          <p:nvPr/>
+        </p:nvSpPr>
+        <p:spPr>
+          <a:xfrm>
+            <a:off x="4130802" y="1956816"/>
+            <a:ext cx="329184" cy="329184"/>
+          </a:xfrm>
+          <a:prstGeom prst="rect">
+            <a:avLst/>
+          </a:prstGeom>
+          <a:noFill/>
+          <a:ln/>
+        </p:spPr>
+        <p:txBody>
+          <a:bodyPr wrap="square" lIns="0" tIns="0" rIns="0" bIns="0" rtlCol="0" anchor="ctr"/>
+          <a:lstStyle/>
+          <a:p>
+            <a:pPr algn="ctr" indent="0" marL="0">
+              <a:buNone/>
+            </a:pPr>
+            <a:r>
+              <a:rPr lang="en-US" sz="1300" b="1" dirty="0">
+                <a:solidFill>
+                  <a:srgbClr val="2F3690"/>
+                </a:solidFill>
+                <a:latin typeface="Arial" pitchFamily="34" charset="0"/>
+                <a:ea typeface="Arial" pitchFamily="34" charset="-122"/>
+                <a:cs typeface="Arial" pitchFamily="34" charset="-120"/>
+              </a:rPr>
+              <a:t>3</a:t>
+            </a:r>
+            <a:endParaRPr lang="en-US" sz="1300" dirty="0"/>
+          </a:p>
+        </p:txBody>
+      </p:sp>
+      <p:sp>
+        <p:nvSpPr>
+          <p:cNvPr id="22" name="Text 17"/>
+          <p:cNvSpPr txBox="1"/>
+          <p:nvPr/>
+        </p:nvSpPr>
+        <p:spPr>
+          <a:xfrm>
+            <a:off x="3268980" y="3063240"/>
+            <a:ext cx="2491740" cy="548640"/>
+          </a:xfrm>
+          <a:prstGeom prst="rect">
+            <a:avLst/>
+          </a:prstGeom>
+          <a:noFill/>
+          <a:ln/>
+        </p:spPr>
+        <p:txBody>
+          <a:bodyPr wrap="square" lIns="0" tIns="0" rIns="0" bIns="0" rtlCol="0" anchor="ctr"/>
+          <a:lstStyle/>
+          <a:p>
+            <a:pPr rtl="1" algn="ctr" indent="0" marL="0">
+              <a:buNone/>
+            </a:pPr>
+            <a:r>
+              <a:rPr lang="en-US" sz="1300" b="1" dirty="0">
+                <a:solidFill>
+                  <a:srgbClr val="1B1B2F"/>
+                </a:solidFill>
+                <a:latin typeface="Calibri" pitchFamily="34" charset="0"/>
+                <a:ea typeface="Calibri" pitchFamily="34" charset="-122"/>
+                <a:cs typeface="Calibri" pitchFamily="34" charset="-120"/>
+              </a:rPr>
+              <a:t>رسیدن به نصاب</a:t>
+            </a:r>
+            <a:endParaRPr lang="en-US" sz="1300" dirty="0"/>
+          </a:p>
+        </p:txBody>
+      </p:sp>
+      <p:sp>
+        <p:nvSpPr>
+          <p:cNvPr id="23" name="Text 18"/>
+          <p:cNvSpPr txBox="1"/>
+          <p:nvPr/>
+        </p:nvSpPr>
+        <p:spPr>
+          <a:xfrm>
+            <a:off x="3268980" y="3611880"/>
+            <a:ext cx="2491740" cy="2011680"/>
+          </a:xfrm>
+          <a:prstGeom prst="rect">
+            <a:avLst/>
+          </a:prstGeom>
+          <a:noFill/>
+          <a:ln/>
+        </p:spPr>
+        <p:txBody>
+          <a:bodyPr wrap="square" lIns="0" tIns="0" rIns="0" bIns="0" rtlCol="0" anchor="t"/>
+          <a:lstStyle/>
+          <a:p>
+            <a:pPr rtl="1" algn="ctr" indent="0" marL="0">
+              <a:buNone/>
+            </a:pPr>
+            <a:r>
+              <a:rPr lang="en-US" sz="1100" dirty="0">
+                <a:solidFill>
+                  <a:srgbClr val="444B66"/>
+                </a:solidFill>
+                <a:latin typeface="Calibri" pitchFamily="34" charset="0"/>
+                <a:ea typeface="Calibri" pitchFamily="34" charset="-122"/>
+                <a:cs typeface="Calibri" pitchFamily="34" charset="-120"/>
+              </a:rPr>
+              <a:t>برای SendETH، حداقل ۱۰ رأی از ۱۵ عضو لازم است</a:t>
+            </a:r>
+            <a:endParaRPr lang="en-US" sz="1100" dirty="0"/>
+          </a:p>
+        </p:txBody>
+      </p:sp>
+      <p:sp>
+        <p:nvSpPr>
+          <p:cNvPr id="24" name="Shape 19"/>
+          <p:cNvSpPr/>
+          <p:nvPr/>
+        </p:nvSpPr>
+        <p:spPr>
+          <a:xfrm>
+            <a:off x="3040380" y="2468880"/>
+            <a:ext cx="228600" cy="0"/>
+          </a:xfrm>
+          <a:prstGeom prst="line">
+            <a:avLst/>
+          </a:prstGeom>
+          <a:noFill/>
+          <a:ln w="19050">
+            <a:solidFill>
+              <a:srgbClr val="C9CEE0"/>
+            </a:solidFill>
+            <a:prstDash val="solid"/>
+          </a:ln>
+        </p:spPr>
+      </p:sp>
+      <p:sp>
+        <p:nvSpPr>
+          <p:cNvPr id="25" name="Shape 20"/>
+          <p:cNvSpPr/>
+          <p:nvPr/>
+        </p:nvSpPr>
+        <p:spPr>
+          <a:xfrm>
+            <a:off x="1428750" y="2103120"/>
+            <a:ext cx="731520" cy="731520"/>
+          </a:xfrm>
+          <a:prstGeom prst="ellipse">
+            <a:avLst/>
+          </a:prstGeom>
+          <a:solidFill>
+            <a:srgbClr val="2F3690"/>
+          </a:solidFill>
+          <a:ln/>
+        </p:spPr>
+      </p:sp>
+      <p:pic>
+        <p:nvPicPr>
+          <p:cNvPr id="26" name="Image 3" descr="/home/claude/deck1/icons/coins.png">    </p:cNvPr>
+          <p:cNvPicPr>
+            <a:picLocks noChangeAspect="1"/>
+          </p:cNvPicPr>
+          <p:nvPr/>
+        </p:nvPicPr>
+        <p:blipFill>
+          <a:blip r:embed="rId4"/>
+          <a:stretch>
+            <a:fillRect/>
+          </a:stretch>
+        </p:blipFill>
+        <p:spPr>
+          <a:xfrm>
+            <a:off x="1618945" y="2293315"/>
+            <a:ext cx="351130" cy="351130"/>
+          </a:xfrm>
+          <a:prstGeom prst="rect">
+            <a:avLst/>
+          </a:prstGeom>
+        </p:spPr>
+      </p:pic>
+      <p:sp>
+        <p:nvSpPr>
+          <p:cNvPr id="27" name="Shape 21"/>
+          <p:cNvSpPr/>
+          <p:nvPr/>
+        </p:nvSpPr>
+        <p:spPr>
+          <a:xfrm>
+            <a:off x="1410462" y="1965960"/>
+            <a:ext cx="329184" cy="329184"/>
+          </a:xfrm>
+          <a:prstGeom prst="ellipse">
+            <a:avLst/>
+          </a:prstGeom>
+          <a:solidFill>
+            <a:srgbClr val="D4AF37"/>
+          </a:solidFill>
+          <a:ln/>
+        </p:spPr>
+      </p:sp>
+      <p:sp>
+        <p:nvSpPr>
+          <p:cNvPr id="28" name="Text 22"/>
+          <p:cNvSpPr txBox="1"/>
+          <p:nvPr/>
+        </p:nvSpPr>
+        <p:spPr>
+          <a:xfrm>
+            <a:off x="1410462" y="1956816"/>
+            <a:ext cx="329184" cy="329184"/>
+          </a:xfrm>
+          <a:prstGeom prst="rect">
+            <a:avLst/>
+          </a:prstGeom>
+          <a:noFill/>
+          <a:ln/>
+        </p:spPr>
+        <p:txBody>
+          <a:bodyPr wrap="square" lIns="0" tIns="0" rIns="0" bIns="0" rtlCol="0" anchor="ctr"/>
+          <a:lstStyle/>
+          <a:p>
+            <a:pPr algn="ctr" indent="0" marL="0">
+              <a:buNone/>
+            </a:pPr>
+            <a:r>
+              <a:rPr lang="en-US" sz="1300" b="1" dirty="0">
+                <a:solidFill>
+                  <a:srgbClr val="2F3690"/>
+                </a:solidFill>
+                <a:latin typeface="Arial" pitchFamily="34" charset="0"/>
+                <a:ea typeface="Arial" pitchFamily="34" charset="-122"/>
+                <a:cs typeface="Arial" pitchFamily="34" charset="-120"/>
+              </a:rPr>
+              <a:t>4</a:t>
+            </a:r>
+            <a:endParaRPr lang="en-US" sz="1300" dirty="0"/>
+          </a:p>
+        </p:txBody>
+      </p:sp>
+      <p:sp>
+        <p:nvSpPr>
+          <p:cNvPr id="29" name="Text 23"/>
+          <p:cNvSpPr txBox="1"/>
+          <p:nvPr/>
+        </p:nvSpPr>
+        <p:spPr>
+          <a:xfrm>
+            <a:off x="548640" y="3063240"/>
+            <a:ext cx="2491740" cy="548640"/>
+          </a:xfrm>
+          <a:prstGeom prst="rect">
+            <a:avLst/>
+          </a:prstGeom>
+          <a:noFill/>
+          <a:ln/>
+        </p:spPr>
+        <p:txBody>
+          <a:bodyPr wrap="square" lIns="0" tIns="0" rIns="0" bIns="0" rtlCol="0" anchor="ctr"/>
+          <a:lstStyle/>
+          <a:p>
+            <a:pPr rtl="1" algn="ctr" indent="0" marL="0">
+              <a:buNone/>
+            </a:pPr>
+            <a:r>
+              <a:rPr lang="en-US" sz="1300" b="1" dirty="0">
+                <a:solidFill>
+                  <a:srgbClr val="1B1B2F"/>
+                </a:solidFill>
+                <a:latin typeface="Calibri" pitchFamily="34" charset="0"/>
+                <a:ea typeface="Calibri" pitchFamily="34" charset="-122"/>
+                <a:cs typeface="Calibri" pitchFamily="34" charset="-120"/>
+              </a:rPr>
+              <a:t>اجرای خودکار</a:t>
+            </a:r>
+            <a:endParaRPr lang="en-US" sz="1300" dirty="0"/>
+          </a:p>
+        </p:txBody>
+      </p:sp>
+      <p:sp>
+        <p:nvSpPr>
+          <p:cNvPr id="30" name="Text 24"/>
+          <p:cNvSpPr txBox="1"/>
+          <p:nvPr/>
+        </p:nvSpPr>
+        <p:spPr>
+          <a:xfrm>
+            <a:off x="548640" y="3611880"/>
+            <a:ext cx="2491740" cy="2011680"/>
+          </a:xfrm>
+          <a:prstGeom prst="rect">
+            <a:avLst/>
+          </a:prstGeom>
+          <a:noFill/>
+          <a:ln/>
+        </p:spPr>
+        <p:txBody>
+          <a:bodyPr wrap="square" lIns="0" tIns="0" rIns="0" bIns="0" rtlCol="0" anchor="t"/>
+          <a:lstStyle/>
+          <a:p>
+            <a:pPr rtl="1" algn="ctr" indent="0" marL="0">
+              <a:buNone/>
+            </a:pPr>
+            <a:r>
+              <a:rPr lang="en-US" sz="1100" dirty="0">
+                <a:solidFill>
+                  <a:srgbClr val="444B66"/>
+                </a:solidFill>
+                <a:latin typeface="Calibri" pitchFamily="34" charset="0"/>
+                <a:ea typeface="Calibri" pitchFamily="34" charset="-122"/>
+                <a:cs typeface="Calibri" pitchFamily="34" charset="-120"/>
+              </a:rPr>
+              <a:t>در همان تراکنش رأی نهایی، انتقال سورن با .call انجام می‌شود</a:t>
+            </a:r>
+            <a:endParaRPr lang="en-US" sz="1100" dirty="0"/>
+          </a:p>
+        </p:txBody>
+      </p:sp>
+      <p:sp>
+        <p:nvSpPr>
+          <p:cNvPr id="31" name="Shape 25"/>
+          <p:cNvSpPr/>
+          <p:nvPr/>
+        </p:nvSpPr>
+        <p:spPr>
+          <a:xfrm>
+            <a:off x="429768" y="6446520"/>
+            <a:ext cx="310896" cy="310896"/>
+          </a:xfrm>
+          <a:prstGeom prst="ellipse">
+            <a:avLst/>
+          </a:prstGeom>
+          <a:solidFill>
+            <a:srgbClr val="FFFFFF"/>
+          </a:solidFill>
+          <a:ln/>
+        </p:spPr>
+      </p:sp>
+      <p:pic>
+        <p:nvPicPr>
+          <p:cNvPr id="32" name="Image 4" descr="/home/claude/deck1/assets/logo.png">    </p:cNvPr>
+          <p:cNvPicPr>
+            <a:picLocks noChangeAspect="1"/>
+          </p:cNvPicPr>
+          <p:nvPr/>
+        </p:nvPicPr>
+        <p:blipFill>
+          <a:blip r:embed="rId5"/>
+          <a:stretch>
+            <a:fillRect/>
+          </a:stretch>
+        </p:blipFill>
+        <p:spPr>
+          <a:xfrm>
+            <a:off x="457200" y="6473952"/>
+            <a:ext cx="256032" cy="256032"/>
+          </a:xfrm>
+          <a:prstGeom prst="rect">
+            <a:avLst/>
+          </a:prstGeom>
+        </p:spPr>
+      </p:pic>
+      <p:sp>
+        <p:nvSpPr>
+          <p:cNvPr id="33" name="Text 26"/>
+          <p:cNvSpPr txBox="1"/>
+          <p:nvPr/>
+        </p:nvSpPr>
+        <p:spPr>
+          <a:xfrm>
+            <a:off x="804672" y="6537960"/>
+            <a:ext cx="6949440" cy="274320"/>
+          </a:xfrm>
+          <a:prstGeom prst="rect">
+            <a:avLst/>
+          </a:prstGeom>
+          <a:noFill/>
+          <a:ln/>
+        </p:spPr>
+        <p:txBody>
+          <a:bodyPr wrap="square" lIns="0" tIns="0" rIns="0" bIns="0" rtlCol="0" anchor="ctr"/>
+          <a:lstStyle/>
+          <a:p>
+            <a:pPr rtl="1" algn="r" indent="0" marL="0">
+              <a:buNone/>
+            </a:pPr>
+            <a:r>
+              <a:rPr lang="en-US" sz="1000" dirty="0">
+                <a:solidFill>
+                  <a:srgbClr val="8B93B0"/>
+                </a:solidFill>
+                <a:latin typeface="Calibri" pitchFamily="34" charset="0"/>
+                <a:ea typeface="Calibri" pitchFamily="34" charset="-122"/>
+                <a:cs typeface="Calibri" pitchFamily="34" charset="-120"/>
+              </a:rPr>
+              <a:t>بلاک‌چین سور — ارائه به هیأت‌مدیره‌ی بنیاد</a:t>
+            </a:r>
+            <a:endParaRPr lang="en-US" sz="1000" dirty="0"/>
+          </a:p>
+        </p:txBody>
+      </p:sp>
+      <p:sp>
+        <p:nvSpPr>
+          <p:cNvPr id="34" name="Text 27"/>
+          <p:cNvSpPr txBox="1"/>
+          <p:nvPr/>
+        </p:nvSpPr>
+        <p:spPr>
+          <a:xfrm>
+            <a:off x="11430000" y="6537960"/>
+            <a:ext cx="365760" cy="274320"/>
+          </a:xfrm>
+          <a:prstGeom prst="rect">
+            <a:avLst/>
+          </a:prstGeom>
+          <a:noFill/>
+          <a:ln/>
+        </p:spPr>
+        <p:txBody>
+          <a:bodyPr wrap="square" lIns="0" tIns="0" rIns="0" bIns="0" rtlCol="0" anchor="ctr"/>
+          <a:lstStyle/>
+          <a:p>
+            <a:pPr rtl="1" algn="r" indent="0" marL="0">
+              <a:buNone/>
+            </a:pPr>
+            <a:r>
+              <a:rPr lang="en-US" sz="1000" dirty="0">
+                <a:solidFill>
+                  <a:srgbClr val="8B93B0"/>
+                </a:solidFill>
+                <a:latin typeface="Calibri" pitchFamily="34" charset="0"/>
+                <a:ea typeface="Calibri" pitchFamily="34" charset="-122"/>
+                <a:cs typeface="Calibri" pitchFamily="34" charset="-120"/>
+              </a:rPr>
+              <a:t>23</a:t>
+            </a:r>
+            <a:endParaRPr lang="en-US" sz="1000" dirty="0"/>
+          </a:p>
+        </p:txBody>
+      </p:sp>
+    </p:spTree>
+  </p:cSld>
+  <p:clrMapOvr>
+    <a:masterClrMapping/>
+  </p:clrMapOvr>
+</p:sld>
+</file>
+
+<file path=ppt/slides/slide25.xml><?xml version="1.0" encoding="utf-8"?>
+<p:sld xmlns:a="http://schemas.openxmlformats.org/drawingml/2006/main" xmlns:r="http://schemas.openxmlformats.org/officeDocument/2006/relationships" xmlns:p="http://schemas.openxmlformats.org/presentationml/2006/main">
+  <p:cSld name="Slide 25">
     <p:bg>
       <p:bgPr>
         <a:solidFill>
@@ -13159,650 +14273,6 @@
       <p:sp>
         <p:nvSpPr>
           <p:cNvPr id="7" name="Text 4"/>
-          <p:cNvSpPr txBox="1"/>
-          <p:nvPr/>
-        </p:nvSpPr>
-        <p:spPr>
-          <a:xfrm>
-            <a:off x="11430000" y="6537960"/>
-            <a:ext cx="365760" cy="274320"/>
-          </a:xfrm>
-          <a:prstGeom prst="rect">
-            <a:avLst/>
-          </a:prstGeom>
-          <a:noFill/>
-          <a:ln/>
-        </p:spPr>
-        <p:txBody>
-          <a:bodyPr wrap="square" lIns="0" tIns="0" rIns="0" bIns="0" rtlCol="0" anchor="ctr"/>
-          <a:lstStyle/>
-          <a:p>
-            <a:pPr rtl="1" algn="r" indent="0" marL="0">
-              <a:buNone/>
-            </a:pPr>
-            <a:r>
-              <a:rPr lang="en-US" sz="1000" dirty="0">
-                <a:solidFill>
-                  <a:srgbClr val="8B93B0"/>
-                </a:solidFill>
-                <a:latin typeface="Calibri" pitchFamily="34" charset="0"/>
-                <a:ea typeface="Calibri" pitchFamily="34" charset="-122"/>
-                <a:cs typeface="Calibri" pitchFamily="34" charset="-120"/>
-              </a:rPr>
-              <a:t>23</a:t>
-            </a:r>
-            <a:endParaRPr lang="en-US" sz="1000" dirty="0"/>
-          </a:p>
-        </p:txBody>
-      </p:sp>
-    </p:spTree>
-  </p:cSld>
-  <p:clrMapOvr>
-    <a:masterClrMapping/>
-  </p:clrMapOvr>
-</p:sld>
-</file>
-
-<file path=ppt/slides/slide25.xml><?xml version="1.0" encoding="utf-8"?>
-<p:sld xmlns:a="http://schemas.openxmlformats.org/drawingml/2006/main" xmlns:r="http://schemas.openxmlformats.org/officeDocument/2006/relationships" xmlns:p="http://schemas.openxmlformats.org/presentationml/2006/main">
-  <p:cSld name="Slide 25">
-    <p:bg>
-      <p:bgPr>
-        <a:solidFill>
-          <a:srgbClr val="FFFFFF"/>
-        </a:solidFill>
-      </p:bgPr>
-    </p:bg>
-    <p:spTree>
-      <p:nvGrpSpPr>
-        <p:cNvPr id="1" name=""/>
-        <p:cNvGrpSpPr/>
-        <p:nvPr/>
-      </p:nvGrpSpPr>
-      <p:grpSpPr>
-        <a:xfrm>
-          <a:off x="0" y="0"/>
-          <a:ext cx="0" cy="0"/>
-          <a:chOff x="0" y="0"/>
-          <a:chExt cx="0" cy="0"/>
-        </a:xfrm>
-      </p:grpSpPr>
-      <p:sp>
-        <p:nvSpPr>
-          <p:cNvPr id="2" name="Text 0"/>
-          <p:cNvSpPr txBox="1"/>
-          <p:nvPr/>
-        </p:nvSpPr>
-        <p:spPr>
-          <a:xfrm>
-            <a:off x="548640" y="292608"/>
-            <a:ext cx="11064240" cy="320040"/>
-          </a:xfrm>
-          <a:prstGeom prst="rect">
-            <a:avLst/>
-          </a:prstGeom>
-          <a:noFill/>
-          <a:ln/>
-        </p:spPr>
-        <p:txBody>
-          <a:bodyPr wrap="square" lIns="0" tIns="0" rIns="0" bIns="0" rtlCol="0" anchor="ctr"/>
-          <a:lstStyle/>
-          <a:p>
-            <a:pPr rtl="1" algn="r" indent="0" marL="0">
-              <a:buNone/>
-            </a:pPr>
-            <a:r>
-              <a:rPr lang="en-US" sz="1250" b="1" spc="150" kern="0" dirty="0">
-                <a:solidFill>
-                  <a:srgbClr val="2F3690"/>
-                </a:solidFill>
-                <a:latin typeface="Calibri" pitchFamily="34" charset="0"/>
-                <a:ea typeface="Calibri" pitchFamily="34" charset="-122"/>
-                <a:cs typeface="Calibri" pitchFamily="34" charset="-120"/>
-              </a:rPr>
-              <a:t>پیشنهادهای زیرساختی</a:t>
-            </a:r>
-            <a:endParaRPr lang="en-US" sz="1250" dirty="0"/>
-          </a:p>
-        </p:txBody>
-      </p:sp>
-      <p:sp>
-        <p:nvSpPr>
-          <p:cNvPr id="3" name="Text 1"/>
-          <p:cNvSpPr txBox="1"/>
-          <p:nvPr/>
-        </p:nvSpPr>
-        <p:spPr>
-          <a:xfrm>
-            <a:off x="548640" y="576072"/>
-            <a:ext cx="11064240" cy="685800"/>
-          </a:xfrm>
-          <a:prstGeom prst="rect">
-            <a:avLst/>
-          </a:prstGeom>
-          <a:noFill/>
-          <a:ln/>
-        </p:spPr>
-        <p:txBody>
-          <a:bodyPr wrap="square" lIns="0" tIns="0" rIns="0" bIns="0" rtlCol="0" anchor="ctr"/>
-          <a:lstStyle/>
-          <a:p>
-            <a:pPr rtl="1" algn="r" indent="0" marL="0">
-              <a:buNone/>
-            </a:pPr>
-            <a:r>
-              <a:rPr lang="en-US" sz="2500" b="1" dirty="0">
-                <a:solidFill>
-                  <a:srgbClr val="1B1B2F"/>
-                </a:solidFill>
-                <a:latin typeface="Cambria" pitchFamily="34" charset="0"/>
-                <a:ea typeface="Cambria" pitchFamily="34" charset="-122"/>
-                <a:cs typeface="Cambria" pitchFamily="34" charset="-120"/>
-              </a:rPr>
-              <a:t>مزیت‌های رقابتی پیشنهادی برای دپ‌ها</a:t>
-            </a:r>
-            <a:endParaRPr lang="en-US" sz="2500" dirty="0"/>
-          </a:p>
-        </p:txBody>
-      </p:sp>
-      <p:sp>
-        <p:nvSpPr>
-          <p:cNvPr id="4" name="Shape 2"/>
-          <p:cNvSpPr/>
-          <p:nvPr/>
-        </p:nvSpPr>
-        <p:spPr>
-          <a:xfrm>
-            <a:off x="9966960" y="2005584"/>
-            <a:ext cx="621792" cy="621792"/>
-          </a:xfrm>
-          <a:prstGeom prst="ellipse">
-            <a:avLst/>
-          </a:prstGeom>
-          <a:solidFill>
-            <a:srgbClr val="2F3690"/>
-          </a:solidFill>
-          <a:ln/>
-        </p:spPr>
-      </p:sp>
-      <p:pic>
-        <p:nvPicPr>
-          <p:cNvPr id="5" name="Image 0" descr="/home/claude/deck1/icons/fingerprint.png">    </p:cNvPr>
-          <p:cNvPicPr>
-            <a:picLocks noChangeAspect="1"/>
-          </p:cNvPicPr>
-          <p:nvPr/>
-        </p:nvPicPr>
-        <p:blipFill>
-          <a:blip r:embed="rId1"/>
-          <a:stretch>
-            <a:fillRect/>
-          </a:stretch>
-        </p:blipFill>
-        <p:spPr>
-          <a:xfrm>
-            <a:off x="10128626" y="2167250"/>
-            <a:ext cx="298460" cy="298460"/>
-          </a:xfrm>
-          <a:prstGeom prst="rect">
-            <a:avLst/>
-          </a:prstGeom>
-        </p:spPr>
-      </p:pic>
-      <p:sp>
-        <p:nvSpPr>
-          <p:cNvPr id="6" name="Text 3"/>
-          <p:cNvSpPr txBox="1"/>
-          <p:nvPr/>
-        </p:nvSpPr>
-        <p:spPr>
-          <a:xfrm>
-            <a:off x="548640" y="1508760"/>
-            <a:ext cx="9144000" cy="365760"/>
-          </a:xfrm>
-          <a:prstGeom prst="rect">
-            <a:avLst/>
-          </a:prstGeom>
-          <a:noFill/>
-          <a:ln/>
-        </p:spPr>
-        <p:txBody>
-          <a:bodyPr wrap="square" lIns="0" tIns="0" rIns="0" bIns="0" rtlCol="0" anchor="ctr"/>
-          <a:lstStyle/>
-          <a:p>
-            <a:pPr rtl="1" algn="r" indent="0" marL="0">
-              <a:buNone/>
-            </a:pPr>
-            <a:r>
-              <a:rPr lang="en-US" sz="1550" b="1" dirty="0">
-                <a:solidFill>
-                  <a:srgbClr val="1B1B2F"/>
-                </a:solidFill>
-                <a:latin typeface="Calibri" pitchFamily="34" charset="0"/>
-                <a:ea typeface="Calibri" pitchFamily="34" charset="-122"/>
-                <a:cs typeface="Calibri" pitchFamily="34" charset="-120"/>
-              </a:rPr>
-              <a:t>رجیستری هویت مشترک + رجیستری رسمی کسب‌وکار</a:t>
-            </a:r>
-            <a:endParaRPr lang="en-US" sz="1550" dirty="0"/>
-          </a:p>
-        </p:txBody>
-      </p:sp>
-      <p:sp>
-        <p:nvSpPr>
-          <p:cNvPr id="7" name="Text 4"/>
-          <p:cNvSpPr txBox="1"/>
-          <p:nvPr/>
-        </p:nvSpPr>
-        <p:spPr>
-          <a:xfrm>
-            <a:off x="548640" y="1856232"/>
-            <a:ext cx="9144000" cy="1231392"/>
-          </a:xfrm>
-          <a:prstGeom prst="rect">
-            <a:avLst/>
-          </a:prstGeom>
-          <a:noFill/>
-          <a:ln/>
-        </p:spPr>
-        <p:txBody>
-          <a:bodyPr wrap="square" lIns="0" tIns="0" rIns="0" bIns="0" rtlCol="0" anchor="t"/>
-          <a:lstStyle/>
-          <a:p>
-            <a:pPr rtl="1" algn="r" indent="0" marL="0">
-              <a:buNone/>
-            </a:pPr>
-            <a:r>
-              <a:rPr lang="en-US" sz="1200" dirty="0">
-                <a:solidFill>
-                  <a:srgbClr val="444B66"/>
-                </a:solidFill>
-                <a:latin typeface="Calibri" pitchFamily="34" charset="0"/>
-                <a:ea typeface="Calibri" pitchFamily="34" charset="-122"/>
-                <a:cs typeface="Calibri" pitchFamily="34" charset="-120"/>
-              </a:rPr>
-              <a:t>دپ‌ها به‌جای ساخت KYC مستقل، از زیرساخت مشترک استفاده می‌کنند.</a:t>
-            </a:r>
-            <a:endParaRPr lang="en-US" sz="1200" dirty="0"/>
-          </a:p>
-        </p:txBody>
-      </p:sp>
-      <p:sp>
-        <p:nvSpPr>
-          <p:cNvPr id="8" name="Shape 5"/>
-          <p:cNvSpPr/>
-          <p:nvPr/>
-        </p:nvSpPr>
-        <p:spPr>
-          <a:xfrm>
-            <a:off x="548640" y="3069336"/>
-            <a:ext cx="10881360" cy="0"/>
-          </a:xfrm>
-          <a:prstGeom prst="line">
-            <a:avLst/>
-          </a:prstGeom>
-          <a:noFill/>
-          <a:ln w="12700">
-            <a:solidFill>
-              <a:srgbClr val="E5E8F0"/>
-            </a:solidFill>
-            <a:prstDash val="solid"/>
-          </a:ln>
-        </p:spPr>
-      </p:sp>
-      <p:sp>
-        <p:nvSpPr>
-          <p:cNvPr id="9" name="Shape 6"/>
-          <p:cNvSpPr/>
-          <p:nvPr/>
-        </p:nvSpPr>
-        <p:spPr>
-          <a:xfrm>
-            <a:off x="9966960" y="3621024"/>
-            <a:ext cx="621792" cy="621792"/>
-          </a:xfrm>
-          <a:prstGeom prst="ellipse">
-            <a:avLst/>
-          </a:prstGeom>
-          <a:solidFill>
-            <a:srgbClr val="2F3690"/>
-          </a:solidFill>
-          <a:ln/>
-        </p:spPr>
-      </p:sp>
-      <p:pic>
-        <p:nvPicPr>
-          <p:cNvPr id="10" name="Image 1" descr="/home/claude/deck1/icons/gavel.png">    </p:cNvPr>
-          <p:cNvPicPr>
-            <a:picLocks noChangeAspect="1"/>
-          </p:cNvPicPr>
-          <p:nvPr/>
-        </p:nvPicPr>
-        <p:blipFill>
-          <a:blip r:embed="rId2"/>
-          <a:stretch>
-            <a:fillRect/>
-          </a:stretch>
-        </p:blipFill>
-        <p:spPr>
-          <a:xfrm>
-            <a:off x="10128626" y="3782690"/>
-            <a:ext cx="298460" cy="298460"/>
-          </a:xfrm>
-          <a:prstGeom prst="rect">
-            <a:avLst/>
-          </a:prstGeom>
-        </p:spPr>
-      </p:pic>
-      <p:sp>
-        <p:nvSpPr>
-          <p:cNvPr id="11" name="Text 7"/>
-          <p:cNvSpPr txBox="1"/>
-          <p:nvPr/>
-        </p:nvSpPr>
-        <p:spPr>
-          <a:xfrm>
-            <a:off x="548640" y="3124200"/>
-            <a:ext cx="9144000" cy="365760"/>
-          </a:xfrm>
-          <a:prstGeom prst="rect">
-            <a:avLst/>
-          </a:prstGeom>
-          <a:noFill/>
-          <a:ln/>
-        </p:spPr>
-        <p:txBody>
-          <a:bodyPr wrap="square" lIns="0" tIns="0" rIns="0" bIns="0" rtlCol="0" anchor="ctr"/>
-          <a:lstStyle/>
-          <a:p>
-            <a:pPr rtl="1" algn="r" indent="0" marL="0">
-              <a:buNone/>
-            </a:pPr>
-            <a:r>
-              <a:rPr lang="en-US" sz="1550" b="1" dirty="0">
-                <a:solidFill>
-                  <a:srgbClr val="1B1B2F"/>
-                </a:solidFill>
-                <a:latin typeface="Calibri" pitchFamily="34" charset="0"/>
-                <a:ea typeface="Calibri" pitchFamily="34" charset="-122"/>
-                <a:cs typeface="Calibri" pitchFamily="34" charset="-120"/>
-              </a:rPr>
-              <a:t>داوری/حل اختلاف عمومی + سرویس ثبت‌زمان اسناد</a:t>
-            </a:r>
-            <a:endParaRPr lang="en-US" sz="1550" dirty="0"/>
-          </a:p>
-        </p:txBody>
-      </p:sp>
-      <p:sp>
-        <p:nvSpPr>
-          <p:cNvPr id="12" name="Text 8"/>
-          <p:cNvSpPr txBox="1"/>
-          <p:nvPr/>
-        </p:nvSpPr>
-        <p:spPr>
-          <a:xfrm>
-            <a:off x="548640" y="3471672"/>
-            <a:ext cx="9144000" cy="1231392"/>
-          </a:xfrm>
-          <a:prstGeom prst="rect">
-            <a:avLst/>
-          </a:prstGeom>
-          <a:noFill/>
-          <a:ln/>
-        </p:spPr>
-        <p:txBody>
-          <a:bodyPr wrap="square" lIns="0" tIns="0" rIns="0" bIns="0" rtlCol="0" anchor="t"/>
-          <a:lstStyle/>
-          <a:p>
-            <a:pPr rtl="1" algn="r" indent="0" marL="0">
-              <a:buNone/>
-            </a:pPr>
-            <a:r>
-              <a:rPr lang="en-US" sz="1200" dirty="0">
-                <a:solidFill>
-                  <a:srgbClr val="444B66"/>
-                </a:solidFill>
-                <a:latin typeface="Calibri" pitchFamily="34" charset="0"/>
-                <a:ea typeface="Calibri" pitchFamily="34" charset="-122"/>
-                <a:cs typeface="Calibri" pitchFamily="34" charset="-120"/>
-              </a:rPr>
-              <a:t>زیرساخت‌های پرکاربرد برای دپ‌های تجاری، آماده برای استفاده‌ی مشترک.</a:t>
-            </a:r>
-            <a:endParaRPr lang="en-US" sz="1200" dirty="0"/>
-          </a:p>
-        </p:txBody>
-      </p:sp>
-      <p:sp>
-        <p:nvSpPr>
-          <p:cNvPr id="13" name="Shape 9"/>
-          <p:cNvSpPr/>
-          <p:nvPr/>
-        </p:nvSpPr>
-        <p:spPr>
-          <a:xfrm>
-            <a:off x="548640" y="4684776"/>
-            <a:ext cx="10881360" cy="0"/>
-          </a:xfrm>
-          <a:prstGeom prst="line">
-            <a:avLst/>
-          </a:prstGeom>
-          <a:noFill/>
-          <a:ln w="12700">
-            <a:solidFill>
-              <a:srgbClr val="E5E8F0"/>
-            </a:solidFill>
-            <a:prstDash val="solid"/>
-          </a:ln>
-        </p:spPr>
-      </p:sp>
-      <p:sp>
-        <p:nvSpPr>
-          <p:cNvPr id="14" name="Shape 10"/>
-          <p:cNvSpPr/>
-          <p:nvPr/>
-        </p:nvSpPr>
-        <p:spPr>
-          <a:xfrm>
-            <a:off x="9966960" y="5236464"/>
-            <a:ext cx="621792" cy="621792"/>
-          </a:xfrm>
-          <a:prstGeom prst="ellipse">
-            <a:avLst/>
-          </a:prstGeom>
-          <a:solidFill>
-            <a:srgbClr val="2F3690"/>
-          </a:solidFill>
-          <a:ln/>
-        </p:spPr>
-      </p:sp>
-      <p:pic>
-        <p:nvPicPr>
-          <p:cNvPr id="15" name="Image 2" descr="/home/claude/deck1/icons/search.png">    </p:cNvPr>
-          <p:cNvPicPr>
-            <a:picLocks noChangeAspect="1"/>
-          </p:cNvPicPr>
-          <p:nvPr/>
-        </p:nvPicPr>
-        <p:blipFill>
-          <a:blip r:embed="rId3"/>
-          <a:stretch>
-            <a:fillRect/>
-          </a:stretch>
-        </p:blipFill>
-        <p:spPr>
-          <a:xfrm>
-            <a:off x="10128626" y="5398130"/>
-            <a:ext cx="298460" cy="298460"/>
-          </a:xfrm>
-          <a:prstGeom prst="rect">
-            <a:avLst/>
-          </a:prstGeom>
-        </p:spPr>
-      </p:pic>
-      <p:sp>
-        <p:nvSpPr>
-          <p:cNvPr id="16" name="Text 11"/>
-          <p:cNvSpPr txBox="1"/>
-          <p:nvPr/>
-        </p:nvSpPr>
-        <p:spPr>
-          <a:xfrm>
-            <a:off x="548640" y="4739640"/>
-            <a:ext cx="9144000" cy="365760"/>
-          </a:xfrm>
-          <a:prstGeom prst="rect">
-            <a:avLst/>
-          </a:prstGeom>
-          <a:noFill/>
-          <a:ln/>
-        </p:spPr>
-        <p:txBody>
-          <a:bodyPr wrap="square" lIns="0" tIns="0" rIns="0" bIns="0" rtlCol="0" anchor="ctr"/>
-          <a:lstStyle/>
-          <a:p>
-            <a:pPr rtl="1" algn="r" indent="0" marL="0">
-              <a:buNone/>
-            </a:pPr>
-            <a:r>
-              <a:rPr lang="en-US" sz="1550" b="1" dirty="0">
-                <a:solidFill>
-                  <a:srgbClr val="1B1B2F"/>
-                </a:solidFill>
-                <a:latin typeface="Calibri" pitchFamily="34" charset="0"/>
-                <a:ea typeface="Calibri" pitchFamily="34" charset="-122"/>
-                <a:cs typeface="Calibri" pitchFamily="34" charset="-120"/>
-              </a:rPr>
-              <a:t>Oracle بومی قیمت + سرویس نام‌گذاری</a:t>
-            </a:r>
-            <a:endParaRPr lang="en-US" sz="1550" dirty="0"/>
-          </a:p>
-        </p:txBody>
-      </p:sp>
-      <p:sp>
-        <p:nvSpPr>
-          <p:cNvPr id="17" name="Text 12"/>
-          <p:cNvSpPr txBox="1"/>
-          <p:nvPr/>
-        </p:nvSpPr>
-        <p:spPr>
-          <a:xfrm>
-            <a:off x="548640" y="5087112"/>
-            <a:ext cx="9144000" cy="1231392"/>
-          </a:xfrm>
-          <a:prstGeom prst="rect">
-            <a:avLst/>
-          </a:prstGeom>
-          <a:noFill/>
-          <a:ln/>
-        </p:spPr>
-        <p:txBody>
-          <a:bodyPr wrap="square" lIns="0" tIns="0" rIns="0" bIns="0" rtlCol="0" anchor="t"/>
-          <a:lstStyle/>
-          <a:p>
-            <a:pPr rtl="1" algn="r" indent="0" marL="0">
-              <a:buNone/>
-            </a:pPr>
-            <a:r>
-              <a:rPr lang="en-US" sz="1200" dirty="0">
-                <a:solidFill>
-                  <a:srgbClr val="444B66"/>
-                </a:solidFill>
-                <a:latin typeface="Calibri" pitchFamily="34" charset="0"/>
-                <a:ea typeface="Calibri" pitchFamily="34" charset="-122"/>
-                <a:cs typeface="Calibri" pitchFamily="34" charset="-120"/>
-              </a:rPr>
-              <a:t>نیازهای رایج دپ‌های مالی، بدون وابستگی به زیرساخت خارجی.</a:t>
-            </a:r>
-            <a:endParaRPr lang="en-US" sz="1200" dirty="0"/>
-          </a:p>
-        </p:txBody>
-      </p:sp>
-      <p:sp>
-        <p:nvSpPr>
-          <p:cNvPr id="18" name="Shape 13"/>
-          <p:cNvSpPr/>
-          <p:nvPr/>
-        </p:nvSpPr>
-        <p:spPr>
-          <a:xfrm>
-            <a:off x="429768" y="6446520"/>
-            <a:ext cx="310896" cy="310896"/>
-          </a:xfrm>
-          <a:prstGeom prst="ellipse">
-            <a:avLst/>
-          </a:prstGeom>
-          <a:solidFill>
-            <a:srgbClr val="FFFFFF"/>
-          </a:solidFill>
-          <a:ln/>
-        </p:spPr>
-      </p:sp>
-      <p:pic>
-        <p:nvPicPr>
-          <p:cNvPr id="19" name="Image 3" descr="/home/claude/deck1/assets/logo.png">    </p:cNvPr>
-          <p:cNvPicPr>
-            <a:picLocks noChangeAspect="1"/>
-          </p:cNvPicPr>
-          <p:nvPr/>
-        </p:nvPicPr>
-        <p:blipFill>
-          <a:blip r:embed="rId4"/>
-          <a:stretch>
-            <a:fillRect/>
-          </a:stretch>
-        </p:blipFill>
-        <p:spPr>
-          <a:xfrm>
-            <a:off x="457200" y="6473952"/>
-            <a:ext cx="256032" cy="256032"/>
-          </a:xfrm>
-          <a:prstGeom prst="rect">
-            <a:avLst/>
-          </a:prstGeom>
-        </p:spPr>
-      </p:pic>
-      <p:sp>
-        <p:nvSpPr>
-          <p:cNvPr id="20" name="Text 14"/>
-          <p:cNvSpPr txBox="1"/>
-          <p:nvPr/>
-        </p:nvSpPr>
-        <p:spPr>
-          <a:xfrm>
-            <a:off x="804672" y="6537960"/>
-            <a:ext cx="6949440" cy="274320"/>
-          </a:xfrm>
-          <a:prstGeom prst="rect">
-            <a:avLst/>
-          </a:prstGeom>
-          <a:noFill/>
-          <a:ln/>
-        </p:spPr>
-        <p:txBody>
-          <a:bodyPr wrap="square" lIns="0" tIns="0" rIns="0" bIns="0" rtlCol="0" anchor="ctr"/>
-          <a:lstStyle/>
-          <a:p>
-            <a:pPr rtl="1" algn="r" indent="0" marL="0">
-              <a:buNone/>
-            </a:pPr>
-            <a:r>
-              <a:rPr lang="en-US" sz="1000" dirty="0">
-                <a:solidFill>
-                  <a:srgbClr val="8B93B0"/>
-                </a:solidFill>
-                <a:latin typeface="Calibri" pitchFamily="34" charset="0"/>
-                <a:ea typeface="Calibri" pitchFamily="34" charset="-122"/>
-                <a:cs typeface="Calibri" pitchFamily="34" charset="-120"/>
-              </a:rPr>
-              <a:t>بلاک‌چین سور — ارائه به هیأت‌مدیره‌ی بنیاد</a:t>
-            </a:r>
-            <a:endParaRPr lang="en-US" sz="1000" dirty="0"/>
-          </a:p>
-        </p:txBody>
-      </p:sp>
-      <p:sp>
-        <p:nvSpPr>
-          <p:cNvPr id="21" name="Text 15"/>
           <p:cNvSpPr txBox="1"/>
           <p:nvPr/>
         </p:nvSpPr>
@@ -13904,7 +14374,7 @@
                 <a:ea typeface="Calibri" pitchFamily="34" charset="-122"/>
                 <a:cs typeface="Calibri" pitchFamily="34" charset="-120"/>
               </a:rPr>
-              <a:t>بودجه‌ی بازاریابی</a:t>
+              <a:t>پیشنهادهای زیرساختی</a:t>
             </a:r>
             <a:endParaRPr lang="en-US" sz="1250" dirty="0"/>
           </a:p>
@@ -13943,7 +14413,7 @@
                 <a:ea typeface="Cambria" pitchFamily="34" charset="-122"/>
                 <a:cs typeface="Cambria" pitchFamily="34" charset="-120"/>
               </a:rPr>
-              <a:t>برآورد کمبود بودجه — یک واقعیت روز اول</a:t>
+              <a:t>مزیت‌های رقابتی پیشنهادی برای دپ‌ها</a:t>
             </a:r>
             <a:endParaRPr lang="en-US" sz="2500" dirty="0"/>
           </a:p>
@@ -13957,375 +14427,21 @@
         </p:nvSpPr>
         <p:spPr>
           <a:xfrm>
-            <a:off x="548640" y="1783080"/>
-            <a:ext cx="3444240" cy="2103120"/>
-          </a:xfrm>
-          <a:prstGeom prst="roundRect">
-            <a:avLst>
-              <a:gd name="adj" fmla="val 4348"/>
-            </a:avLst>
+            <a:off x="9966960" y="2005584"/>
+            <a:ext cx="621792" cy="621792"/>
+          </a:xfrm>
+          <a:prstGeom prst="ellipse">
+            <a:avLst/>
           </a:prstGeom>
           <a:solidFill>
-            <a:srgbClr val="F7F9FC"/>
-          </a:solidFill>
-          <a:ln w="12700">
-            <a:solidFill>
-              <a:srgbClr val="E5E8F0"/>
-            </a:solidFill>
-            <a:prstDash val="solid"/>
-          </a:ln>
-        </p:spPr>
-      </p:sp>
-      <p:sp>
-        <p:nvSpPr>
-          <p:cNvPr id="5" name="Text 3"/>
-          <p:cNvSpPr txBox="1"/>
-          <p:nvPr/>
-        </p:nvSpPr>
-        <p:spPr>
-          <a:xfrm>
-            <a:off x="548640" y="1965960"/>
-            <a:ext cx="3444240" cy="914400"/>
-          </a:xfrm>
-          <a:prstGeom prst="rect">
-            <a:avLst/>
-          </a:prstGeom>
-          <a:noFill/>
-          <a:ln/>
-        </p:spPr>
-        <p:txBody>
-          <a:bodyPr wrap="square" lIns="0" tIns="0" rIns="0" bIns="0" rtlCol="0" anchor="ctr"/>
-          <a:lstStyle/>
-          <a:p>
-            <a:pPr rtl="1" algn="ctr" indent="0" marL="0">
-              <a:buNone/>
-            </a:pPr>
-            <a:r>
-              <a:rPr lang="en-US" sz="3200" b="1" dirty="0">
-                <a:solidFill>
-                  <a:srgbClr val="2F3690"/>
-                </a:solidFill>
-                <a:latin typeface="Cambria" pitchFamily="34" charset="0"/>
-                <a:ea typeface="Cambria" pitchFamily="34" charset="-122"/>
-                <a:cs typeface="Cambria" pitchFamily="34" charset="-120"/>
-              </a:rPr>
-              <a:t>۲۰M</a:t>
-            </a:r>
-            <a:endParaRPr lang="en-US" sz="3200" dirty="0"/>
-          </a:p>
-        </p:txBody>
-      </p:sp>
-      <p:sp>
-        <p:nvSpPr>
-          <p:cNvPr id="6" name="Text 4"/>
-          <p:cNvSpPr txBox="1"/>
-          <p:nvPr/>
-        </p:nvSpPr>
-        <p:spPr>
-          <a:xfrm>
-            <a:off x="685800" y="2880360"/>
-            <a:ext cx="3169920" cy="914400"/>
-          </a:xfrm>
-          <a:prstGeom prst="rect">
-            <a:avLst/>
-          </a:prstGeom>
-          <a:noFill/>
-          <a:ln/>
-        </p:spPr>
-        <p:txBody>
-          <a:bodyPr wrap="square" lIns="0" tIns="0" rIns="0" bIns="0" rtlCol="0" anchor="ctr"/>
-          <a:lstStyle/>
-          <a:p>
-            <a:pPr rtl="1" algn="ctr" indent="0" marL="0">
-              <a:buNone/>
-            </a:pPr>
-            <a:r>
-              <a:rPr lang="en-US" sz="1200" dirty="0">
-                <a:solidFill>
-                  <a:srgbClr val="444B66"/>
-                </a:solidFill>
-                <a:latin typeface="Calibri" pitchFamily="34" charset="0"/>
-                <a:ea typeface="Calibri" pitchFamily="34" charset="-122"/>
-                <a:cs typeface="Calibri" pitchFamily="34" charset="-120"/>
-              </a:rPr>
-              <a:t>موجودی genesis برای کل بازاریابی/توسعه</a:t>
-            </a:r>
-            <a:endParaRPr lang="en-US" sz="1200" dirty="0"/>
-          </a:p>
-        </p:txBody>
-      </p:sp>
-      <p:sp>
-        <p:nvSpPr>
-          <p:cNvPr id="7" name="Shape 5"/>
-          <p:cNvSpPr/>
-          <p:nvPr/>
-        </p:nvSpPr>
-        <p:spPr>
-          <a:xfrm>
-            <a:off x="4221480" y="1783080"/>
-            <a:ext cx="3444240" cy="2103120"/>
-          </a:xfrm>
-          <a:prstGeom prst="roundRect">
-            <a:avLst>
-              <a:gd name="adj" fmla="val 4348"/>
-            </a:avLst>
-          </a:prstGeom>
-          <a:solidFill>
-            <a:srgbClr val="F7F9FC"/>
-          </a:solidFill>
-          <a:ln w="12700">
-            <a:solidFill>
-              <a:srgbClr val="E5E8F0"/>
-            </a:solidFill>
-            <a:prstDash val="solid"/>
-          </a:ln>
-        </p:spPr>
-      </p:sp>
-      <p:sp>
-        <p:nvSpPr>
-          <p:cNvPr id="8" name="Text 6"/>
-          <p:cNvSpPr txBox="1"/>
-          <p:nvPr/>
-        </p:nvSpPr>
-        <p:spPr>
-          <a:xfrm>
-            <a:off x="4221480" y="1965960"/>
-            <a:ext cx="3444240" cy="914400"/>
-          </a:xfrm>
-          <a:prstGeom prst="rect">
-            <a:avLst/>
-          </a:prstGeom>
-          <a:noFill/>
-          <a:ln/>
-        </p:spPr>
-        <p:txBody>
-          <a:bodyPr wrap="square" lIns="0" tIns="0" rIns="0" bIns="0" rtlCol="0" anchor="ctr"/>
-          <a:lstStyle/>
-          <a:p>
-            <a:pPr rtl="1" algn="ctr" indent="0" marL="0">
-              <a:buNone/>
-            </a:pPr>
-            <a:r>
-              <a:rPr lang="en-US" sz="3200" b="1" dirty="0">
-                <a:solidFill>
-                  <a:srgbClr val="2F3690"/>
-                </a:solidFill>
-                <a:latin typeface="Cambria" pitchFamily="34" charset="0"/>
-                <a:ea typeface="Cambria" pitchFamily="34" charset="-122"/>
-                <a:cs typeface="Cambria" pitchFamily="34" charset="-120"/>
-              </a:rPr>
-              <a:t>۳۹-۶۵M</a:t>
-            </a:r>
-            <a:endParaRPr lang="en-US" sz="3200" dirty="0"/>
-          </a:p>
-        </p:txBody>
-      </p:sp>
-      <p:sp>
-        <p:nvSpPr>
-          <p:cNvPr id="9" name="Text 7"/>
-          <p:cNvSpPr txBox="1"/>
-          <p:nvPr/>
-        </p:nvSpPr>
-        <p:spPr>
-          <a:xfrm>
-            <a:off x="4358640" y="2880360"/>
-            <a:ext cx="3169920" cy="914400"/>
-          </a:xfrm>
-          <a:prstGeom prst="rect">
-            <a:avLst/>
-          </a:prstGeom>
-          <a:noFill/>
-          <a:ln/>
-        </p:spPr>
-        <p:txBody>
-          <a:bodyPr wrap="square" lIns="0" tIns="0" rIns="0" bIns="0" rtlCol="0" anchor="ctr"/>
-          <a:lstStyle/>
-          <a:p>
-            <a:pPr rtl="1" algn="ctr" indent="0" marL="0">
-              <a:buNone/>
-            </a:pPr>
-            <a:r>
-              <a:rPr lang="en-US" sz="1200" dirty="0">
-                <a:solidFill>
-                  <a:srgbClr val="444B66"/>
-                </a:solidFill>
-                <a:latin typeface="Calibri" pitchFamily="34" charset="0"/>
-                <a:ea typeface="Calibri" pitchFamily="34" charset="-122"/>
-                <a:cs typeface="Calibri" pitchFamily="34" charset="-120"/>
-              </a:rPr>
-              <a:t>نیاز واقعی برای اجرای کامل رودمپ (۳-۵ سال)</a:t>
-            </a:r>
-            <a:endParaRPr lang="en-US" sz="1200" dirty="0"/>
-          </a:p>
-        </p:txBody>
-      </p:sp>
-      <p:sp>
-        <p:nvSpPr>
-          <p:cNvPr id="10" name="Shape 8"/>
-          <p:cNvSpPr/>
-          <p:nvPr/>
-        </p:nvSpPr>
-        <p:spPr>
-          <a:xfrm>
-            <a:off x="7894320" y="1783080"/>
-            <a:ext cx="3444240" cy="2103120"/>
-          </a:xfrm>
-          <a:prstGeom prst="roundRect">
-            <a:avLst>
-              <a:gd name="adj" fmla="val 4348"/>
-            </a:avLst>
-          </a:prstGeom>
-          <a:solidFill>
-            <a:srgbClr val="F7F9FC"/>
-          </a:solidFill>
-          <a:ln w="12700">
-            <a:solidFill>
-              <a:srgbClr val="E5E8F0"/>
-            </a:solidFill>
-            <a:prstDash val="solid"/>
-          </a:ln>
-        </p:spPr>
-      </p:sp>
-      <p:sp>
-        <p:nvSpPr>
-          <p:cNvPr id="11" name="Text 9"/>
-          <p:cNvSpPr txBox="1"/>
-          <p:nvPr/>
-        </p:nvSpPr>
-        <p:spPr>
-          <a:xfrm>
-            <a:off x="7894320" y="1965960"/>
-            <a:ext cx="3444240" cy="914400"/>
-          </a:xfrm>
-          <a:prstGeom prst="rect">
-            <a:avLst/>
-          </a:prstGeom>
-          <a:noFill/>
-          <a:ln/>
-        </p:spPr>
-        <p:txBody>
-          <a:bodyPr wrap="square" lIns="0" tIns="0" rIns="0" bIns="0" rtlCol="0" anchor="ctr"/>
-          <a:lstStyle/>
-          <a:p>
-            <a:pPr rtl="1" algn="ctr" indent="0" marL="0">
-              <a:buNone/>
-            </a:pPr>
-            <a:r>
-              <a:rPr lang="en-US" sz="3200" b="1" dirty="0">
-                <a:solidFill>
-                  <a:srgbClr val="2F3690"/>
-                </a:solidFill>
-                <a:latin typeface="Cambria" pitchFamily="34" charset="0"/>
-                <a:ea typeface="Cambria" pitchFamily="34" charset="-122"/>
-                <a:cs typeface="Cambria" pitchFamily="34" charset="-120"/>
-              </a:rPr>
-              <a:t>~۲-۳x</a:t>
-            </a:r>
-            <a:endParaRPr lang="en-US" sz="3200" dirty="0"/>
-          </a:p>
-        </p:txBody>
-      </p:sp>
-      <p:sp>
-        <p:nvSpPr>
-          <p:cNvPr id="12" name="Text 10"/>
-          <p:cNvSpPr txBox="1"/>
-          <p:nvPr/>
-        </p:nvSpPr>
-        <p:spPr>
-          <a:xfrm>
-            <a:off x="8031480" y="2880360"/>
-            <a:ext cx="3169920" cy="914400"/>
-          </a:xfrm>
-          <a:prstGeom prst="rect">
-            <a:avLst/>
-          </a:prstGeom>
-          <a:noFill/>
-          <a:ln/>
-        </p:spPr>
-        <p:txBody>
-          <a:bodyPr wrap="square" lIns="0" tIns="0" rIns="0" bIns="0" rtlCol="0" anchor="ctr"/>
-          <a:lstStyle/>
-          <a:p>
-            <a:pPr rtl="1" algn="ctr" indent="0" marL="0">
-              <a:buNone/>
-            </a:pPr>
-            <a:r>
-              <a:rPr lang="en-US" sz="1200" dirty="0">
-                <a:solidFill>
-                  <a:srgbClr val="444B66"/>
-                </a:solidFill>
-                <a:latin typeface="Calibri" pitchFamily="34" charset="0"/>
-                <a:ea typeface="Calibri" pitchFamily="34" charset="-122"/>
-                <a:cs typeface="Calibri" pitchFamily="34" charset="-120"/>
-              </a:rPr>
-              <a:t>نسبت کمبود نسبت به موجودی فعلی</a:t>
-            </a:r>
-            <a:endParaRPr lang="en-US" sz="1200" dirty="0"/>
-          </a:p>
-        </p:txBody>
-      </p:sp>
-      <p:sp>
-        <p:nvSpPr>
-          <p:cNvPr id="13" name="Text 11"/>
-          <p:cNvSpPr txBox="1"/>
-          <p:nvPr/>
-        </p:nvSpPr>
-        <p:spPr>
-          <a:xfrm>
-            <a:off x="548640" y="4206240"/>
-            <a:ext cx="10881360" cy="2011680"/>
-          </a:xfrm>
-          <a:prstGeom prst="rect">
-            <a:avLst/>
-          </a:prstGeom>
-          <a:noFill/>
-          <a:ln/>
-        </p:spPr>
-        <p:txBody>
-          <a:bodyPr wrap="square" lIns="0" tIns="0" rIns="0" bIns="0" rtlCol="0" anchor="t"/>
-          <a:lstStyle/>
-          <a:p>
-            <a:pPr rtl="1" algn="r" indent="0" marL="0">
-              <a:buNone/>
-            </a:pPr>
-            <a:r>
-              <a:rPr lang="en-US" sz="1350" dirty="0">
-                <a:solidFill>
-                  <a:srgbClr val="444B66"/>
-                </a:solidFill>
-                <a:latin typeface="Calibri" pitchFamily="34" charset="0"/>
-                <a:ea typeface="Calibri" pitchFamily="34" charset="-122"/>
-                <a:cs typeface="Calibri" pitchFamily="34" charset="-120"/>
-              </a:rPr>
-              <a:t>راه‌حل پیشنهادی: ۲۰ میلیون به‌عنوان حداقل (نه سقف) در نظر گرفته شود؛ کمبود از طریق کانال درخواست تکمیلی (هیأت‌مدیره‌ی ولیدیتورها) تأمین شود.</a:t>
-            </a:r>
-            <a:endParaRPr lang="en-US" sz="1350" dirty="0"/>
-          </a:p>
-        </p:txBody>
-      </p:sp>
-      <p:sp>
-        <p:nvSpPr>
-          <p:cNvPr id="14" name="Shape 12"/>
-          <p:cNvSpPr/>
-          <p:nvPr/>
-        </p:nvSpPr>
-        <p:spPr>
-          <a:xfrm>
-            <a:off x="429768" y="6446520"/>
-            <a:ext cx="310896" cy="310896"/>
-          </a:xfrm>
-          <a:prstGeom prst="ellipse">
-            <a:avLst/>
-          </a:prstGeom>
-          <a:solidFill>
-            <a:srgbClr val="FFFFFF"/>
+            <a:srgbClr val="2F3690"/>
           </a:solidFill>
           <a:ln/>
         </p:spPr>
       </p:sp>
       <p:pic>
         <p:nvPicPr>
-          <p:cNvPr id="15" name="Image 0" descr="/home/claude/deck1/assets/logo.png">    </p:cNvPr>
+          <p:cNvPr id="5" name="Image 0" descr="/home/claude/deck1/icons/fingerprint.png">    </p:cNvPr>
           <p:cNvPicPr>
             <a:picLocks noChangeAspect="1"/>
           </p:cNvPicPr>
@@ -14339,8 +14455,8 @@
         </p:blipFill>
         <p:spPr>
           <a:xfrm>
-            <a:off x="457200" y="6473952"/>
-            <a:ext cx="256032" cy="256032"/>
+            <a:off x="10128626" y="2167250"/>
+            <a:ext cx="298460" cy="298460"/>
           </a:xfrm>
           <a:prstGeom prst="rect">
             <a:avLst/>
@@ -14349,14 +14465,14 @@
       </p:pic>
       <p:sp>
         <p:nvSpPr>
-          <p:cNvPr id="16" name="Text 13"/>
-          <p:cNvSpPr txBox="1"/>
-          <p:nvPr/>
-        </p:nvSpPr>
-        <p:spPr>
-          <a:xfrm>
-            <a:off x="804672" y="6537960"/>
-            <a:ext cx="6949440" cy="274320"/>
+          <p:cNvPr id="6" name="Text 3"/>
+          <p:cNvSpPr txBox="1"/>
+          <p:nvPr/>
+        </p:nvSpPr>
+        <p:spPr>
+          <a:xfrm>
+            <a:off x="548640" y="1508760"/>
+            <a:ext cx="9144000" cy="365760"/>
           </a:xfrm>
           <a:prstGeom prst="rect">
             <a:avLst/>
@@ -14372,14 +14488,426 @@
               <a:buNone/>
             </a:pPr>
             <a:r>
-              <a:rPr lang="en-US" sz="1000" dirty="0">
-                <a:solidFill>
-                  <a:srgbClr val="8B93B0"/>
+              <a:rPr lang="en-US" sz="1550" b="1" dirty="0">
+                <a:solidFill>
+                  <a:srgbClr val="1B1B2F"/>
                 </a:solidFill>
                 <a:latin typeface="Calibri" pitchFamily="34" charset="0"/>
                 <a:ea typeface="Calibri" pitchFamily="34" charset="-122"/>
                 <a:cs typeface="Calibri" pitchFamily="34" charset="-120"/>
               </a:rPr>
+              <a:t>رجیستری هویت مشترک + رجیستری رسمی کسب‌وکار</a:t>
+            </a:r>
+            <a:endParaRPr lang="en-US" sz="1550" dirty="0"/>
+          </a:p>
+        </p:txBody>
+      </p:sp>
+      <p:sp>
+        <p:nvSpPr>
+          <p:cNvPr id="7" name="Text 4"/>
+          <p:cNvSpPr txBox="1"/>
+          <p:nvPr/>
+        </p:nvSpPr>
+        <p:spPr>
+          <a:xfrm>
+            <a:off x="548640" y="1856232"/>
+            <a:ext cx="9144000" cy="1231392"/>
+          </a:xfrm>
+          <a:prstGeom prst="rect">
+            <a:avLst/>
+          </a:prstGeom>
+          <a:noFill/>
+          <a:ln/>
+        </p:spPr>
+        <p:txBody>
+          <a:bodyPr wrap="square" lIns="0" tIns="0" rIns="0" bIns="0" rtlCol="0" anchor="t"/>
+          <a:lstStyle/>
+          <a:p>
+            <a:pPr rtl="1" algn="r" indent="0" marL="0">
+              <a:buNone/>
+            </a:pPr>
+            <a:r>
+              <a:rPr lang="en-US" sz="1200" dirty="0">
+                <a:solidFill>
+                  <a:srgbClr val="444B66"/>
+                </a:solidFill>
+                <a:latin typeface="Calibri" pitchFamily="34" charset="0"/>
+                <a:ea typeface="Calibri" pitchFamily="34" charset="-122"/>
+                <a:cs typeface="Calibri" pitchFamily="34" charset="-120"/>
+              </a:rPr>
+              <a:t>دپ‌ها به‌جای ساخت KYC مستقل، از زیرساخت مشترک استفاده می‌کنند.</a:t>
+            </a:r>
+            <a:endParaRPr lang="en-US" sz="1200" dirty="0"/>
+          </a:p>
+        </p:txBody>
+      </p:sp>
+      <p:sp>
+        <p:nvSpPr>
+          <p:cNvPr id="8" name="Shape 5"/>
+          <p:cNvSpPr/>
+          <p:nvPr/>
+        </p:nvSpPr>
+        <p:spPr>
+          <a:xfrm>
+            <a:off x="548640" y="3069336"/>
+            <a:ext cx="10881360" cy="0"/>
+          </a:xfrm>
+          <a:prstGeom prst="line">
+            <a:avLst/>
+          </a:prstGeom>
+          <a:noFill/>
+          <a:ln w="12700">
+            <a:solidFill>
+              <a:srgbClr val="E5E8F0"/>
+            </a:solidFill>
+            <a:prstDash val="solid"/>
+          </a:ln>
+        </p:spPr>
+      </p:sp>
+      <p:sp>
+        <p:nvSpPr>
+          <p:cNvPr id="9" name="Shape 6"/>
+          <p:cNvSpPr/>
+          <p:nvPr/>
+        </p:nvSpPr>
+        <p:spPr>
+          <a:xfrm>
+            <a:off x="9966960" y="3621024"/>
+            <a:ext cx="621792" cy="621792"/>
+          </a:xfrm>
+          <a:prstGeom prst="ellipse">
+            <a:avLst/>
+          </a:prstGeom>
+          <a:solidFill>
+            <a:srgbClr val="2F3690"/>
+          </a:solidFill>
+          <a:ln/>
+        </p:spPr>
+      </p:sp>
+      <p:pic>
+        <p:nvPicPr>
+          <p:cNvPr id="10" name="Image 1" descr="/home/claude/deck1/icons/gavel.png">    </p:cNvPr>
+          <p:cNvPicPr>
+            <a:picLocks noChangeAspect="1"/>
+          </p:cNvPicPr>
+          <p:nvPr/>
+        </p:nvPicPr>
+        <p:blipFill>
+          <a:blip r:embed="rId2"/>
+          <a:stretch>
+            <a:fillRect/>
+          </a:stretch>
+        </p:blipFill>
+        <p:spPr>
+          <a:xfrm>
+            <a:off x="10128626" y="3782690"/>
+            <a:ext cx="298460" cy="298460"/>
+          </a:xfrm>
+          <a:prstGeom prst="rect">
+            <a:avLst/>
+          </a:prstGeom>
+        </p:spPr>
+      </p:pic>
+      <p:sp>
+        <p:nvSpPr>
+          <p:cNvPr id="11" name="Text 7"/>
+          <p:cNvSpPr txBox="1"/>
+          <p:nvPr/>
+        </p:nvSpPr>
+        <p:spPr>
+          <a:xfrm>
+            <a:off x="548640" y="3124200"/>
+            <a:ext cx="9144000" cy="365760"/>
+          </a:xfrm>
+          <a:prstGeom prst="rect">
+            <a:avLst/>
+          </a:prstGeom>
+          <a:noFill/>
+          <a:ln/>
+        </p:spPr>
+        <p:txBody>
+          <a:bodyPr wrap="square" lIns="0" tIns="0" rIns="0" bIns="0" rtlCol="0" anchor="ctr"/>
+          <a:lstStyle/>
+          <a:p>
+            <a:pPr rtl="1" algn="r" indent="0" marL="0">
+              <a:buNone/>
+            </a:pPr>
+            <a:r>
+              <a:rPr lang="en-US" sz="1550" b="1" dirty="0">
+                <a:solidFill>
+                  <a:srgbClr val="1B1B2F"/>
+                </a:solidFill>
+                <a:latin typeface="Calibri" pitchFamily="34" charset="0"/>
+                <a:ea typeface="Calibri" pitchFamily="34" charset="-122"/>
+                <a:cs typeface="Calibri" pitchFamily="34" charset="-120"/>
+              </a:rPr>
+              <a:t>داوری/حل اختلاف عمومی + سرویس ثبت‌زمان اسناد</a:t>
+            </a:r>
+            <a:endParaRPr lang="en-US" sz="1550" dirty="0"/>
+          </a:p>
+        </p:txBody>
+      </p:sp>
+      <p:sp>
+        <p:nvSpPr>
+          <p:cNvPr id="12" name="Text 8"/>
+          <p:cNvSpPr txBox="1"/>
+          <p:nvPr/>
+        </p:nvSpPr>
+        <p:spPr>
+          <a:xfrm>
+            <a:off x="548640" y="3471672"/>
+            <a:ext cx="9144000" cy="1231392"/>
+          </a:xfrm>
+          <a:prstGeom prst="rect">
+            <a:avLst/>
+          </a:prstGeom>
+          <a:noFill/>
+          <a:ln/>
+        </p:spPr>
+        <p:txBody>
+          <a:bodyPr wrap="square" lIns="0" tIns="0" rIns="0" bIns="0" rtlCol="0" anchor="t"/>
+          <a:lstStyle/>
+          <a:p>
+            <a:pPr rtl="1" algn="r" indent="0" marL="0">
+              <a:buNone/>
+            </a:pPr>
+            <a:r>
+              <a:rPr lang="en-US" sz="1200" dirty="0">
+                <a:solidFill>
+                  <a:srgbClr val="444B66"/>
+                </a:solidFill>
+                <a:latin typeface="Calibri" pitchFamily="34" charset="0"/>
+                <a:ea typeface="Calibri" pitchFamily="34" charset="-122"/>
+                <a:cs typeface="Calibri" pitchFamily="34" charset="-120"/>
+              </a:rPr>
+              <a:t>زیرساخت‌های پرکاربرد برای دپ‌های تجاری، آماده برای استفاده‌ی مشترک.</a:t>
+            </a:r>
+            <a:endParaRPr lang="en-US" sz="1200" dirty="0"/>
+          </a:p>
+        </p:txBody>
+      </p:sp>
+      <p:sp>
+        <p:nvSpPr>
+          <p:cNvPr id="13" name="Shape 9"/>
+          <p:cNvSpPr/>
+          <p:nvPr/>
+        </p:nvSpPr>
+        <p:spPr>
+          <a:xfrm>
+            <a:off x="548640" y="4684776"/>
+            <a:ext cx="10881360" cy="0"/>
+          </a:xfrm>
+          <a:prstGeom prst="line">
+            <a:avLst/>
+          </a:prstGeom>
+          <a:noFill/>
+          <a:ln w="12700">
+            <a:solidFill>
+              <a:srgbClr val="E5E8F0"/>
+            </a:solidFill>
+            <a:prstDash val="solid"/>
+          </a:ln>
+        </p:spPr>
+      </p:sp>
+      <p:sp>
+        <p:nvSpPr>
+          <p:cNvPr id="14" name="Shape 10"/>
+          <p:cNvSpPr/>
+          <p:nvPr/>
+        </p:nvSpPr>
+        <p:spPr>
+          <a:xfrm>
+            <a:off x="9966960" y="5236464"/>
+            <a:ext cx="621792" cy="621792"/>
+          </a:xfrm>
+          <a:prstGeom prst="ellipse">
+            <a:avLst/>
+          </a:prstGeom>
+          <a:solidFill>
+            <a:srgbClr val="2F3690"/>
+          </a:solidFill>
+          <a:ln/>
+        </p:spPr>
+      </p:sp>
+      <p:pic>
+        <p:nvPicPr>
+          <p:cNvPr id="15" name="Image 2" descr="/home/claude/deck1/icons/search.png">    </p:cNvPr>
+          <p:cNvPicPr>
+            <a:picLocks noChangeAspect="1"/>
+          </p:cNvPicPr>
+          <p:nvPr/>
+        </p:nvPicPr>
+        <p:blipFill>
+          <a:blip r:embed="rId3"/>
+          <a:stretch>
+            <a:fillRect/>
+          </a:stretch>
+        </p:blipFill>
+        <p:spPr>
+          <a:xfrm>
+            <a:off x="10128626" y="5398130"/>
+            <a:ext cx="298460" cy="298460"/>
+          </a:xfrm>
+          <a:prstGeom prst="rect">
+            <a:avLst/>
+          </a:prstGeom>
+        </p:spPr>
+      </p:pic>
+      <p:sp>
+        <p:nvSpPr>
+          <p:cNvPr id="16" name="Text 11"/>
+          <p:cNvSpPr txBox="1"/>
+          <p:nvPr/>
+        </p:nvSpPr>
+        <p:spPr>
+          <a:xfrm>
+            <a:off x="548640" y="4739640"/>
+            <a:ext cx="9144000" cy="365760"/>
+          </a:xfrm>
+          <a:prstGeom prst="rect">
+            <a:avLst/>
+          </a:prstGeom>
+          <a:noFill/>
+          <a:ln/>
+        </p:spPr>
+        <p:txBody>
+          <a:bodyPr wrap="square" lIns="0" tIns="0" rIns="0" bIns="0" rtlCol="0" anchor="ctr"/>
+          <a:lstStyle/>
+          <a:p>
+            <a:pPr rtl="1" algn="r" indent="0" marL="0">
+              <a:buNone/>
+            </a:pPr>
+            <a:r>
+              <a:rPr lang="en-US" sz="1550" b="1" dirty="0">
+                <a:solidFill>
+                  <a:srgbClr val="1B1B2F"/>
+                </a:solidFill>
+                <a:latin typeface="Calibri" pitchFamily="34" charset="0"/>
+                <a:ea typeface="Calibri" pitchFamily="34" charset="-122"/>
+                <a:cs typeface="Calibri" pitchFamily="34" charset="-120"/>
+              </a:rPr>
+              <a:t>Oracle بومی قیمت + سرویس نام‌گذاری</a:t>
+            </a:r>
+            <a:endParaRPr lang="en-US" sz="1550" dirty="0"/>
+          </a:p>
+        </p:txBody>
+      </p:sp>
+      <p:sp>
+        <p:nvSpPr>
+          <p:cNvPr id="17" name="Text 12"/>
+          <p:cNvSpPr txBox="1"/>
+          <p:nvPr/>
+        </p:nvSpPr>
+        <p:spPr>
+          <a:xfrm>
+            <a:off x="548640" y="5087112"/>
+            <a:ext cx="9144000" cy="1231392"/>
+          </a:xfrm>
+          <a:prstGeom prst="rect">
+            <a:avLst/>
+          </a:prstGeom>
+          <a:noFill/>
+          <a:ln/>
+        </p:spPr>
+        <p:txBody>
+          <a:bodyPr wrap="square" lIns="0" tIns="0" rIns="0" bIns="0" rtlCol="0" anchor="t"/>
+          <a:lstStyle/>
+          <a:p>
+            <a:pPr rtl="1" algn="r" indent="0" marL="0">
+              <a:buNone/>
+            </a:pPr>
+            <a:r>
+              <a:rPr lang="en-US" sz="1200" dirty="0">
+                <a:solidFill>
+                  <a:srgbClr val="444B66"/>
+                </a:solidFill>
+                <a:latin typeface="Calibri" pitchFamily="34" charset="0"/>
+                <a:ea typeface="Calibri" pitchFamily="34" charset="-122"/>
+                <a:cs typeface="Calibri" pitchFamily="34" charset="-120"/>
+              </a:rPr>
+              <a:t>نیازهای رایج دپ‌های مالی، بدون وابستگی به زیرساخت خارجی.</a:t>
+            </a:r>
+            <a:endParaRPr lang="en-US" sz="1200" dirty="0"/>
+          </a:p>
+        </p:txBody>
+      </p:sp>
+      <p:sp>
+        <p:nvSpPr>
+          <p:cNvPr id="18" name="Shape 13"/>
+          <p:cNvSpPr/>
+          <p:nvPr/>
+        </p:nvSpPr>
+        <p:spPr>
+          <a:xfrm>
+            <a:off x="429768" y="6446520"/>
+            <a:ext cx="310896" cy="310896"/>
+          </a:xfrm>
+          <a:prstGeom prst="ellipse">
+            <a:avLst/>
+          </a:prstGeom>
+          <a:solidFill>
+            <a:srgbClr val="FFFFFF"/>
+          </a:solidFill>
+          <a:ln/>
+        </p:spPr>
+      </p:sp>
+      <p:pic>
+        <p:nvPicPr>
+          <p:cNvPr id="19" name="Image 3" descr="/home/claude/deck1/assets/logo.png">    </p:cNvPr>
+          <p:cNvPicPr>
+            <a:picLocks noChangeAspect="1"/>
+          </p:cNvPicPr>
+          <p:nvPr/>
+        </p:nvPicPr>
+        <p:blipFill>
+          <a:blip r:embed="rId4"/>
+          <a:stretch>
+            <a:fillRect/>
+          </a:stretch>
+        </p:blipFill>
+        <p:spPr>
+          <a:xfrm>
+            <a:off x="457200" y="6473952"/>
+            <a:ext cx="256032" cy="256032"/>
+          </a:xfrm>
+          <a:prstGeom prst="rect">
+            <a:avLst/>
+          </a:prstGeom>
+        </p:spPr>
+      </p:pic>
+      <p:sp>
+        <p:nvSpPr>
+          <p:cNvPr id="20" name="Text 14"/>
+          <p:cNvSpPr txBox="1"/>
+          <p:nvPr/>
+        </p:nvSpPr>
+        <p:spPr>
+          <a:xfrm>
+            <a:off x="804672" y="6537960"/>
+            <a:ext cx="6949440" cy="274320"/>
+          </a:xfrm>
+          <a:prstGeom prst="rect">
+            <a:avLst/>
+          </a:prstGeom>
+          <a:noFill/>
+          <a:ln/>
+        </p:spPr>
+        <p:txBody>
+          <a:bodyPr wrap="square" lIns="0" tIns="0" rIns="0" bIns="0" rtlCol="0" anchor="ctr"/>
+          <a:lstStyle/>
+          <a:p>
+            <a:pPr rtl="1" algn="r" indent="0" marL="0">
+              <a:buNone/>
+            </a:pPr>
+            <a:r>
+              <a:rPr lang="en-US" sz="1000" dirty="0">
+                <a:solidFill>
+                  <a:srgbClr val="8B93B0"/>
+                </a:solidFill>
+                <a:latin typeface="Calibri" pitchFamily="34" charset="0"/>
+                <a:ea typeface="Calibri" pitchFamily="34" charset="-122"/>
+                <a:cs typeface="Calibri" pitchFamily="34" charset="-120"/>
+              </a:rPr>
               <a:t>بلاک‌چین سور — ارائه به هیأت‌مدیره‌ی بنیاد</a:t>
             </a:r>
             <a:endParaRPr lang="en-US" sz="1000" dirty="0"/>
@@ -14388,7 +14916,7 @@
       </p:sp>
       <p:sp>
         <p:nvSpPr>
-          <p:cNvPr id="17" name="Text 14"/>
+          <p:cNvPr id="21" name="Text 15"/>
           <p:cNvSpPr txBox="1"/>
           <p:nvPr/>
         </p:nvSpPr>
@@ -14436,6 +14964,592 @@
 <file path=ppt/slides/slide27.xml><?xml version="1.0" encoding="utf-8"?>
 <p:sld xmlns:a="http://schemas.openxmlformats.org/drawingml/2006/main" xmlns:r="http://schemas.openxmlformats.org/officeDocument/2006/relationships" xmlns:p="http://schemas.openxmlformats.org/presentationml/2006/main">
   <p:cSld name="Slide 27">
+    <p:bg>
+      <p:bgPr>
+        <a:solidFill>
+          <a:srgbClr val="FFFFFF"/>
+        </a:solidFill>
+      </p:bgPr>
+    </p:bg>
+    <p:spTree>
+      <p:nvGrpSpPr>
+        <p:cNvPr id="1" name=""/>
+        <p:cNvGrpSpPr/>
+        <p:nvPr/>
+      </p:nvGrpSpPr>
+      <p:grpSpPr>
+        <a:xfrm>
+          <a:off x="0" y="0"/>
+          <a:ext cx="0" cy="0"/>
+          <a:chOff x="0" y="0"/>
+          <a:chExt cx="0" cy="0"/>
+        </a:xfrm>
+      </p:grpSpPr>
+      <p:sp>
+        <p:nvSpPr>
+          <p:cNvPr id="2" name="Text 0"/>
+          <p:cNvSpPr txBox="1"/>
+          <p:nvPr/>
+        </p:nvSpPr>
+        <p:spPr>
+          <a:xfrm>
+            <a:off x="548640" y="292608"/>
+            <a:ext cx="11064240" cy="320040"/>
+          </a:xfrm>
+          <a:prstGeom prst="rect">
+            <a:avLst/>
+          </a:prstGeom>
+          <a:noFill/>
+          <a:ln/>
+        </p:spPr>
+        <p:txBody>
+          <a:bodyPr wrap="square" lIns="0" tIns="0" rIns="0" bIns="0" rtlCol="0" anchor="ctr"/>
+          <a:lstStyle/>
+          <a:p>
+            <a:pPr rtl="1" algn="r" indent="0" marL="0">
+              <a:buNone/>
+            </a:pPr>
+            <a:r>
+              <a:rPr lang="en-US" sz="1250" b="1" spc="150" kern="0" dirty="0">
+                <a:solidFill>
+                  <a:srgbClr val="2F3690"/>
+                </a:solidFill>
+                <a:latin typeface="Calibri" pitchFamily="34" charset="0"/>
+                <a:ea typeface="Calibri" pitchFamily="34" charset="-122"/>
+                <a:cs typeface="Calibri" pitchFamily="34" charset="-120"/>
+              </a:rPr>
+              <a:t>بودجه‌ی بازاریابی</a:t>
+            </a:r>
+            <a:endParaRPr lang="en-US" sz="1250" dirty="0"/>
+          </a:p>
+        </p:txBody>
+      </p:sp>
+      <p:sp>
+        <p:nvSpPr>
+          <p:cNvPr id="3" name="Text 1"/>
+          <p:cNvSpPr txBox="1"/>
+          <p:nvPr/>
+        </p:nvSpPr>
+        <p:spPr>
+          <a:xfrm>
+            <a:off x="548640" y="576072"/>
+            <a:ext cx="11064240" cy="685800"/>
+          </a:xfrm>
+          <a:prstGeom prst="rect">
+            <a:avLst/>
+          </a:prstGeom>
+          <a:noFill/>
+          <a:ln/>
+        </p:spPr>
+        <p:txBody>
+          <a:bodyPr wrap="square" lIns="0" tIns="0" rIns="0" bIns="0" rtlCol="0" anchor="ctr"/>
+          <a:lstStyle/>
+          <a:p>
+            <a:pPr rtl="1" algn="r" indent="0" marL="0">
+              <a:buNone/>
+            </a:pPr>
+            <a:r>
+              <a:rPr lang="en-US" sz="2500" b="1" dirty="0">
+                <a:solidFill>
+                  <a:srgbClr val="1B1B2F"/>
+                </a:solidFill>
+                <a:latin typeface="Cambria" pitchFamily="34" charset="0"/>
+                <a:ea typeface="Cambria" pitchFamily="34" charset="-122"/>
+                <a:cs typeface="Cambria" pitchFamily="34" charset="-120"/>
+              </a:rPr>
+              <a:t>برآورد کمبود بودجه — یک واقعیت روز اول</a:t>
+            </a:r>
+            <a:endParaRPr lang="en-US" sz="2500" dirty="0"/>
+          </a:p>
+        </p:txBody>
+      </p:sp>
+      <p:sp>
+        <p:nvSpPr>
+          <p:cNvPr id="4" name="Shape 2"/>
+          <p:cNvSpPr/>
+          <p:nvPr/>
+        </p:nvSpPr>
+        <p:spPr>
+          <a:xfrm>
+            <a:off x="548640" y="1783080"/>
+            <a:ext cx="3444240" cy="2103120"/>
+          </a:xfrm>
+          <a:prstGeom prst="roundRect">
+            <a:avLst>
+              <a:gd name="adj" fmla="val 4348"/>
+            </a:avLst>
+          </a:prstGeom>
+          <a:solidFill>
+            <a:srgbClr val="F7F9FC"/>
+          </a:solidFill>
+          <a:ln w="12700">
+            <a:solidFill>
+              <a:srgbClr val="E5E8F0"/>
+            </a:solidFill>
+            <a:prstDash val="solid"/>
+          </a:ln>
+        </p:spPr>
+      </p:sp>
+      <p:sp>
+        <p:nvSpPr>
+          <p:cNvPr id="5" name="Text 3"/>
+          <p:cNvSpPr txBox="1"/>
+          <p:nvPr/>
+        </p:nvSpPr>
+        <p:spPr>
+          <a:xfrm>
+            <a:off x="548640" y="1965960"/>
+            <a:ext cx="3444240" cy="914400"/>
+          </a:xfrm>
+          <a:prstGeom prst="rect">
+            <a:avLst/>
+          </a:prstGeom>
+          <a:noFill/>
+          <a:ln/>
+        </p:spPr>
+        <p:txBody>
+          <a:bodyPr wrap="square" lIns="0" tIns="0" rIns="0" bIns="0" rtlCol="0" anchor="ctr"/>
+          <a:lstStyle/>
+          <a:p>
+            <a:pPr rtl="1" algn="ctr" indent="0" marL="0">
+              <a:buNone/>
+            </a:pPr>
+            <a:r>
+              <a:rPr lang="en-US" sz="3200" b="1" dirty="0">
+                <a:solidFill>
+                  <a:srgbClr val="2F3690"/>
+                </a:solidFill>
+                <a:latin typeface="Cambria" pitchFamily="34" charset="0"/>
+                <a:ea typeface="Cambria" pitchFamily="34" charset="-122"/>
+                <a:cs typeface="Cambria" pitchFamily="34" charset="-120"/>
+              </a:rPr>
+              <a:t>۲۰M</a:t>
+            </a:r>
+            <a:endParaRPr lang="en-US" sz="3200" dirty="0"/>
+          </a:p>
+        </p:txBody>
+      </p:sp>
+      <p:sp>
+        <p:nvSpPr>
+          <p:cNvPr id="6" name="Text 4"/>
+          <p:cNvSpPr txBox="1"/>
+          <p:nvPr/>
+        </p:nvSpPr>
+        <p:spPr>
+          <a:xfrm>
+            <a:off x="685800" y="2880360"/>
+            <a:ext cx="3169920" cy="914400"/>
+          </a:xfrm>
+          <a:prstGeom prst="rect">
+            <a:avLst/>
+          </a:prstGeom>
+          <a:noFill/>
+          <a:ln/>
+        </p:spPr>
+        <p:txBody>
+          <a:bodyPr wrap="square" lIns="0" tIns="0" rIns="0" bIns="0" rtlCol="0" anchor="ctr"/>
+          <a:lstStyle/>
+          <a:p>
+            <a:pPr rtl="1" algn="ctr" indent="0" marL="0">
+              <a:buNone/>
+            </a:pPr>
+            <a:r>
+              <a:rPr lang="en-US" sz="1200" dirty="0">
+                <a:solidFill>
+                  <a:srgbClr val="444B66"/>
+                </a:solidFill>
+                <a:latin typeface="Calibri" pitchFamily="34" charset="0"/>
+                <a:ea typeface="Calibri" pitchFamily="34" charset="-122"/>
+                <a:cs typeface="Calibri" pitchFamily="34" charset="-120"/>
+              </a:rPr>
+              <a:t>موجودی genesis برای کل بازاریابی/توسعه</a:t>
+            </a:r>
+            <a:endParaRPr lang="en-US" sz="1200" dirty="0"/>
+          </a:p>
+        </p:txBody>
+      </p:sp>
+      <p:sp>
+        <p:nvSpPr>
+          <p:cNvPr id="7" name="Shape 5"/>
+          <p:cNvSpPr/>
+          <p:nvPr/>
+        </p:nvSpPr>
+        <p:spPr>
+          <a:xfrm>
+            <a:off x="4221480" y="1783080"/>
+            <a:ext cx="3444240" cy="2103120"/>
+          </a:xfrm>
+          <a:prstGeom prst="roundRect">
+            <a:avLst>
+              <a:gd name="adj" fmla="val 4348"/>
+            </a:avLst>
+          </a:prstGeom>
+          <a:solidFill>
+            <a:srgbClr val="F7F9FC"/>
+          </a:solidFill>
+          <a:ln w="12700">
+            <a:solidFill>
+              <a:srgbClr val="E5E8F0"/>
+            </a:solidFill>
+            <a:prstDash val="solid"/>
+          </a:ln>
+        </p:spPr>
+      </p:sp>
+      <p:sp>
+        <p:nvSpPr>
+          <p:cNvPr id="8" name="Text 6"/>
+          <p:cNvSpPr txBox="1"/>
+          <p:nvPr/>
+        </p:nvSpPr>
+        <p:spPr>
+          <a:xfrm>
+            <a:off x="4221480" y="1965960"/>
+            <a:ext cx="3444240" cy="914400"/>
+          </a:xfrm>
+          <a:prstGeom prst="rect">
+            <a:avLst/>
+          </a:prstGeom>
+          <a:noFill/>
+          <a:ln/>
+        </p:spPr>
+        <p:txBody>
+          <a:bodyPr wrap="square" lIns="0" tIns="0" rIns="0" bIns="0" rtlCol="0" anchor="ctr"/>
+          <a:lstStyle/>
+          <a:p>
+            <a:pPr rtl="1" algn="ctr" indent="0" marL="0">
+              <a:buNone/>
+            </a:pPr>
+            <a:r>
+              <a:rPr lang="en-US" sz="3200" b="1" dirty="0">
+                <a:solidFill>
+                  <a:srgbClr val="2F3690"/>
+                </a:solidFill>
+                <a:latin typeface="Cambria" pitchFamily="34" charset="0"/>
+                <a:ea typeface="Cambria" pitchFamily="34" charset="-122"/>
+                <a:cs typeface="Cambria" pitchFamily="34" charset="-120"/>
+              </a:rPr>
+              <a:t>۳۹-۶۵M</a:t>
+            </a:r>
+            <a:endParaRPr lang="en-US" sz="3200" dirty="0"/>
+          </a:p>
+        </p:txBody>
+      </p:sp>
+      <p:sp>
+        <p:nvSpPr>
+          <p:cNvPr id="9" name="Text 7"/>
+          <p:cNvSpPr txBox="1"/>
+          <p:nvPr/>
+        </p:nvSpPr>
+        <p:spPr>
+          <a:xfrm>
+            <a:off x="4358640" y="2880360"/>
+            <a:ext cx="3169920" cy="914400"/>
+          </a:xfrm>
+          <a:prstGeom prst="rect">
+            <a:avLst/>
+          </a:prstGeom>
+          <a:noFill/>
+          <a:ln/>
+        </p:spPr>
+        <p:txBody>
+          <a:bodyPr wrap="square" lIns="0" tIns="0" rIns="0" bIns="0" rtlCol="0" anchor="ctr"/>
+          <a:lstStyle/>
+          <a:p>
+            <a:pPr rtl="1" algn="ctr" indent="0" marL="0">
+              <a:buNone/>
+            </a:pPr>
+            <a:r>
+              <a:rPr lang="en-US" sz="1200" dirty="0">
+                <a:solidFill>
+                  <a:srgbClr val="444B66"/>
+                </a:solidFill>
+                <a:latin typeface="Calibri" pitchFamily="34" charset="0"/>
+                <a:ea typeface="Calibri" pitchFamily="34" charset="-122"/>
+                <a:cs typeface="Calibri" pitchFamily="34" charset="-120"/>
+              </a:rPr>
+              <a:t>نیاز واقعی برای اجرای کامل رودمپ (۳-۵ سال)</a:t>
+            </a:r>
+            <a:endParaRPr lang="en-US" sz="1200" dirty="0"/>
+          </a:p>
+        </p:txBody>
+      </p:sp>
+      <p:sp>
+        <p:nvSpPr>
+          <p:cNvPr id="10" name="Shape 8"/>
+          <p:cNvSpPr/>
+          <p:nvPr/>
+        </p:nvSpPr>
+        <p:spPr>
+          <a:xfrm>
+            <a:off x="7894320" y="1783080"/>
+            <a:ext cx="3444240" cy="2103120"/>
+          </a:xfrm>
+          <a:prstGeom prst="roundRect">
+            <a:avLst>
+              <a:gd name="adj" fmla="val 4348"/>
+            </a:avLst>
+          </a:prstGeom>
+          <a:solidFill>
+            <a:srgbClr val="F7F9FC"/>
+          </a:solidFill>
+          <a:ln w="12700">
+            <a:solidFill>
+              <a:srgbClr val="E5E8F0"/>
+            </a:solidFill>
+            <a:prstDash val="solid"/>
+          </a:ln>
+        </p:spPr>
+      </p:sp>
+      <p:sp>
+        <p:nvSpPr>
+          <p:cNvPr id="11" name="Text 9"/>
+          <p:cNvSpPr txBox="1"/>
+          <p:nvPr/>
+        </p:nvSpPr>
+        <p:spPr>
+          <a:xfrm>
+            <a:off x="7894320" y="1965960"/>
+            <a:ext cx="3444240" cy="914400"/>
+          </a:xfrm>
+          <a:prstGeom prst="rect">
+            <a:avLst/>
+          </a:prstGeom>
+          <a:noFill/>
+          <a:ln/>
+        </p:spPr>
+        <p:txBody>
+          <a:bodyPr wrap="square" lIns="0" tIns="0" rIns="0" bIns="0" rtlCol="0" anchor="ctr"/>
+          <a:lstStyle/>
+          <a:p>
+            <a:pPr rtl="1" algn="ctr" indent="0" marL="0">
+              <a:buNone/>
+            </a:pPr>
+            <a:r>
+              <a:rPr lang="en-US" sz="3200" b="1" dirty="0">
+                <a:solidFill>
+                  <a:srgbClr val="2F3690"/>
+                </a:solidFill>
+                <a:latin typeface="Cambria" pitchFamily="34" charset="0"/>
+                <a:ea typeface="Cambria" pitchFamily="34" charset="-122"/>
+                <a:cs typeface="Cambria" pitchFamily="34" charset="-120"/>
+              </a:rPr>
+              <a:t>~۲-۳x</a:t>
+            </a:r>
+            <a:endParaRPr lang="en-US" sz="3200" dirty="0"/>
+          </a:p>
+        </p:txBody>
+      </p:sp>
+      <p:sp>
+        <p:nvSpPr>
+          <p:cNvPr id="12" name="Text 10"/>
+          <p:cNvSpPr txBox="1"/>
+          <p:nvPr/>
+        </p:nvSpPr>
+        <p:spPr>
+          <a:xfrm>
+            <a:off x="8031480" y="2880360"/>
+            <a:ext cx="3169920" cy="914400"/>
+          </a:xfrm>
+          <a:prstGeom prst="rect">
+            <a:avLst/>
+          </a:prstGeom>
+          <a:noFill/>
+          <a:ln/>
+        </p:spPr>
+        <p:txBody>
+          <a:bodyPr wrap="square" lIns="0" tIns="0" rIns="0" bIns="0" rtlCol="0" anchor="ctr"/>
+          <a:lstStyle/>
+          <a:p>
+            <a:pPr rtl="1" algn="ctr" indent="0" marL="0">
+              <a:buNone/>
+            </a:pPr>
+            <a:r>
+              <a:rPr lang="en-US" sz="1200" dirty="0">
+                <a:solidFill>
+                  <a:srgbClr val="444B66"/>
+                </a:solidFill>
+                <a:latin typeface="Calibri" pitchFamily="34" charset="0"/>
+                <a:ea typeface="Calibri" pitchFamily="34" charset="-122"/>
+                <a:cs typeface="Calibri" pitchFamily="34" charset="-120"/>
+              </a:rPr>
+              <a:t>نسبت کمبود نسبت به موجودی فعلی</a:t>
+            </a:r>
+            <a:endParaRPr lang="en-US" sz="1200" dirty="0"/>
+          </a:p>
+        </p:txBody>
+      </p:sp>
+      <p:sp>
+        <p:nvSpPr>
+          <p:cNvPr id="13" name="Text 11"/>
+          <p:cNvSpPr txBox="1"/>
+          <p:nvPr/>
+        </p:nvSpPr>
+        <p:spPr>
+          <a:xfrm>
+            <a:off x="548640" y="4206240"/>
+            <a:ext cx="10881360" cy="2011680"/>
+          </a:xfrm>
+          <a:prstGeom prst="rect">
+            <a:avLst/>
+          </a:prstGeom>
+          <a:noFill/>
+          <a:ln/>
+        </p:spPr>
+        <p:txBody>
+          <a:bodyPr wrap="square" lIns="0" tIns="0" rIns="0" bIns="0" rtlCol="0" anchor="t"/>
+          <a:lstStyle/>
+          <a:p>
+            <a:pPr rtl="1" algn="r" indent="0" marL="0">
+              <a:buNone/>
+            </a:pPr>
+            <a:r>
+              <a:rPr lang="en-US" sz="1350" dirty="0">
+                <a:solidFill>
+                  <a:srgbClr val="444B66"/>
+                </a:solidFill>
+                <a:latin typeface="Calibri" pitchFamily="34" charset="0"/>
+                <a:ea typeface="Calibri" pitchFamily="34" charset="-122"/>
+                <a:cs typeface="Calibri" pitchFamily="34" charset="-120"/>
+              </a:rPr>
+              <a:t>راه‌حل پیشنهادی: ۲۰ میلیون به‌عنوان حداقل (نه سقف) در نظر گرفته شود؛ کمبود از طریق کانال درخواست تکمیلی (هیأت‌مدیره‌ی ولیدیتورها) تأمین شود.</a:t>
+            </a:r>
+            <a:endParaRPr lang="en-US" sz="1350" dirty="0"/>
+          </a:p>
+        </p:txBody>
+      </p:sp>
+      <p:sp>
+        <p:nvSpPr>
+          <p:cNvPr id="14" name="Shape 12"/>
+          <p:cNvSpPr/>
+          <p:nvPr/>
+        </p:nvSpPr>
+        <p:spPr>
+          <a:xfrm>
+            <a:off x="429768" y="6446520"/>
+            <a:ext cx="310896" cy="310896"/>
+          </a:xfrm>
+          <a:prstGeom prst="ellipse">
+            <a:avLst/>
+          </a:prstGeom>
+          <a:solidFill>
+            <a:srgbClr val="FFFFFF"/>
+          </a:solidFill>
+          <a:ln/>
+        </p:spPr>
+      </p:sp>
+      <p:pic>
+        <p:nvPicPr>
+          <p:cNvPr id="15" name="Image 0" descr="/home/claude/deck1/assets/logo.png">    </p:cNvPr>
+          <p:cNvPicPr>
+            <a:picLocks noChangeAspect="1"/>
+          </p:cNvPicPr>
+          <p:nvPr/>
+        </p:nvPicPr>
+        <p:blipFill>
+          <a:blip r:embed="rId1"/>
+          <a:stretch>
+            <a:fillRect/>
+          </a:stretch>
+        </p:blipFill>
+        <p:spPr>
+          <a:xfrm>
+            <a:off x="457200" y="6473952"/>
+            <a:ext cx="256032" cy="256032"/>
+          </a:xfrm>
+          <a:prstGeom prst="rect">
+            <a:avLst/>
+          </a:prstGeom>
+        </p:spPr>
+      </p:pic>
+      <p:sp>
+        <p:nvSpPr>
+          <p:cNvPr id="16" name="Text 13"/>
+          <p:cNvSpPr txBox="1"/>
+          <p:nvPr/>
+        </p:nvSpPr>
+        <p:spPr>
+          <a:xfrm>
+            <a:off x="804672" y="6537960"/>
+            <a:ext cx="6949440" cy="274320"/>
+          </a:xfrm>
+          <a:prstGeom prst="rect">
+            <a:avLst/>
+          </a:prstGeom>
+          <a:noFill/>
+          <a:ln/>
+        </p:spPr>
+        <p:txBody>
+          <a:bodyPr wrap="square" lIns="0" tIns="0" rIns="0" bIns="0" rtlCol="0" anchor="ctr"/>
+          <a:lstStyle/>
+          <a:p>
+            <a:pPr rtl="1" algn="r" indent="0" marL="0">
+              <a:buNone/>
+            </a:pPr>
+            <a:r>
+              <a:rPr lang="en-US" sz="1000" dirty="0">
+                <a:solidFill>
+                  <a:srgbClr val="8B93B0"/>
+                </a:solidFill>
+                <a:latin typeface="Calibri" pitchFamily="34" charset="0"/>
+                <a:ea typeface="Calibri" pitchFamily="34" charset="-122"/>
+                <a:cs typeface="Calibri" pitchFamily="34" charset="-120"/>
+              </a:rPr>
+              <a:t>بلاک‌چین سور — ارائه به هیأت‌مدیره‌ی بنیاد</a:t>
+            </a:r>
+            <a:endParaRPr lang="en-US" sz="1000" dirty="0"/>
+          </a:p>
+        </p:txBody>
+      </p:sp>
+      <p:sp>
+        <p:nvSpPr>
+          <p:cNvPr id="17" name="Text 14"/>
+          <p:cNvSpPr txBox="1"/>
+          <p:nvPr/>
+        </p:nvSpPr>
+        <p:spPr>
+          <a:xfrm>
+            <a:off x="11430000" y="6537960"/>
+            <a:ext cx="365760" cy="274320"/>
+          </a:xfrm>
+          <a:prstGeom prst="rect">
+            <a:avLst/>
+          </a:prstGeom>
+          <a:noFill/>
+          <a:ln/>
+        </p:spPr>
+        <p:txBody>
+          <a:bodyPr wrap="square" lIns="0" tIns="0" rIns="0" bIns="0" rtlCol="0" anchor="ctr"/>
+          <a:lstStyle/>
+          <a:p>
+            <a:pPr rtl="1" algn="r" indent="0" marL="0">
+              <a:buNone/>
+            </a:pPr>
+            <a:r>
+              <a:rPr lang="en-US" sz="1000" dirty="0">
+                <a:solidFill>
+                  <a:srgbClr val="8B93B0"/>
+                </a:solidFill>
+                <a:latin typeface="Calibri" pitchFamily="34" charset="0"/>
+                <a:ea typeface="Calibri" pitchFamily="34" charset="-122"/>
+                <a:cs typeface="Calibri" pitchFamily="34" charset="-120"/>
+              </a:rPr>
+              <a:t>26</a:t>
+            </a:r>
+            <a:endParaRPr lang="en-US" sz="1000" dirty="0"/>
+          </a:p>
+        </p:txBody>
+      </p:sp>
+    </p:spTree>
+  </p:cSld>
+  <p:clrMapOvr>
+    <a:masterClrMapping/>
+  </p:clrMapOvr>
+</p:sld>
+</file>
+
+<file path=ppt/slides/slide28.xml><?xml version="1.0" encoding="utf-8"?>
+<p:sld xmlns:a="http://schemas.openxmlformats.org/drawingml/2006/main" xmlns:r="http://schemas.openxmlformats.org/officeDocument/2006/relationships" xmlns:p="http://schemas.openxmlformats.org/presentationml/2006/main">
+  <p:cSld name="Slide 28">
     <p:bg>
       <p:bgPr>
         <a:solidFill>
@@ -14651,7 +15765,7 @@
                 <a:ea typeface="Calibri" pitchFamily="34" charset="-122"/>
                 <a:cs typeface="Calibri" pitchFamily="34" charset="-120"/>
               </a:rPr>
-              <a:t>26</a:t>
+              <a:t>27</a:t>
             </a:r>
             <a:endParaRPr lang="en-US" sz="1000" dirty="0"/>
           </a:p>
@@ -14665,9 +15779,9 @@
 </p:sld>
 </file>
 
-<file path=ppt/slides/slide28.xml><?xml version="1.0" encoding="utf-8"?>
+<file path=ppt/slides/slide29.xml><?xml version="1.0" encoding="utf-8"?>
 <p:sld xmlns:a="http://schemas.openxmlformats.org/drawingml/2006/main" xmlns:r="http://schemas.openxmlformats.org/officeDocument/2006/relationships" xmlns:p="http://schemas.openxmlformats.org/presentationml/2006/main">
-  <p:cSld name="Slide 28">
+  <p:cSld name="Slide 29">
     <p:bg>
       <p:bgPr>
         <a:solidFill>
@@ -15265,238 +16379,6 @@
       <p:sp>
         <p:nvSpPr>
           <p:cNvPr id="21" name="Text 15"/>
-          <p:cNvSpPr txBox="1"/>
-          <p:nvPr/>
-        </p:nvSpPr>
-        <p:spPr>
-          <a:xfrm>
-            <a:off x="11430000" y="6537960"/>
-            <a:ext cx="365760" cy="274320"/>
-          </a:xfrm>
-          <a:prstGeom prst="rect">
-            <a:avLst/>
-          </a:prstGeom>
-          <a:noFill/>
-          <a:ln/>
-        </p:spPr>
-        <p:txBody>
-          <a:bodyPr wrap="square" lIns="0" tIns="0" rIns="0" bIns="0" rtlCol="0" anchor="ctr"/>
-          <a:lstStyle/>
-          <a:p>
-            <a:pPr rtl="1" algn="r" indent="0" marL="0">
-              <a:buNone/>
-            </a:pPr>
-            <a:r>
-              <a:rPr lang="en-US" sz="1000" dirty="0">
-                <a:solidFill>
-                  <a:srgbClr val="8B93B0"/>
-                </a:solidFill>
-                <a:latin typeface="Calibri" pitchFamily="34" charset="0"/>
-                <a:ea typeface="Calibri" pitchFamily="34" charset="-122"/>
-                <a:cs typeface="Calibri" pitchFamily="34" charset="-120"/>
-              </a:rPr>
-              <a:t>27</a:t>
-            </a:r>
-            <a:endParaRPr lang="en-US" sz="1000" dirty="0"/>
-          </a:p>
-        </p:txBody>
-      </p:sp>
-    </p:spTree>
-  </p:cSld>
-  <p:clrMapOvr>
-    <a:masterClrMapping/>
-  </p:clrMapOvr>
-</p:sld>
-</file>
-
-<file path=ppt/slides/slide29.xml><?xml version="1.0" encoding="utf-8"?>
-<p:sld xmlns:a="http://schemas.openxmlformats.org/drawingml/2006/main" xmlns:r="http://schemas.openxmlformats.org/officeDocument/2006/relationships" xmlns:p="http://schemas.openxmlformats.org/presentationml/2006/main">
-  <p:cSld name="Slide 29">
-    <p:bg>
-      <p:bgPr>
-        <a:solidFill>
-          <a:srgbClr val="2F3690"/>
-        </a:solidFill>
-      </p:bgPr>
-    </p:bg>
-    <p:spTree>
-      <p:nvGrpSpPr>
-        <p:cNvPr id="1" name=""/>
-        <p:cNvGrpSpPr/>
-        <p:nvPr/>
-      </p:nvGrpSpPr>
-      <p:grpSpPr>
-        <a:xfrm>
-          <a:off x="0" y="0"/>
-          <a:ext cx="0" cy="0"/>
-          <a:chOff x="0" y="0"/>
-          <a:chExt cx="0" cy="0"/>
-        </a:xfrm>
-      </p:grpSpPr>
-      <p:sp>
-        <p:nvSpPr>
-          <p:cNvPr id="2" name="Text 0"/>
-          <p:cNvSpPr txBox="1"/>
-          <p:nvPr/>
-        </p:nvSpPr>
-        <p:spPr>
-          <a:xfrm>
-            <a:off x="731520" y="2377440"/>
-            <a:ext cx="2743200" cy="1828800"/>
-          </a:xfrm>
-          <a:prstGeom prst="rect">
-            <a:avLst/>
-          </a:prstGeom>
-          <a:noFill/>
-          <a:ln/>
-        </p:spPr>
-        <p:txBody>
-          <a:bodyPr wrap="square" lIns="0" tIns="0" rIns="0" bIns="0" rtlCol="0" anchor="ctr"/>
-          <a:lstStyle/>
-          <a:p>
-            <a:pPr rtl="1" algn="r" indent="0" marL="0">
-              <a:buNone/>
-            </a:pPr>
-            <a:r>
-              <a:rPr lang="en-US" sz="9600" b="1" dirty="0">
-                <a:solidFill>
-                  <a:srgbClr val="3D4899"/>
-                </a:solidFill>
-                <a:latin typeface="Arial" pitchFamily="34" charset="0"/>
-                <a:ea typeface="Arial" pitchFamily="34" charset="-122"/>
-                <a:cs typeface="Arial" pitchFamily="34" charset="-120"/>
-              </a:rPr>
-              <a:t>8</a:t>
-            </a:r>
-            <a:endParaRPr lang="en-US" sz="9600" dirty="0"/>
-          </a:p>
-        </p:txBody>
-      </p:sp>
-      <p:sp>
-        <p:nvSpPr>
-          <p:cNvPr id="3" name="Text 1"/>
-          <p:cNvSpPr txBox="1"/>
-          <p:nvPr/>
-        </p:nvSpPr>
-        <p:spPr>
-          <a:xfrm>
-            <a:off x="3657600" y="2834640"/>
-            <a:ext cx="7772400" cy="1188720"/>
-          </a:xfrm>
-          <a:prstGeom prst="rect">
-            <a:avLst/>
-          </a:prstGeom>
-          <a:noFill/>
-          <a:ln/>
-        </p:spPr>
-        <p:txBody>
-          <a:bodyPr wrap="square" lIns="0" tIns="0" rIns="0" bIns="0" rtlCol="0" anchor="ctr"/>
-          <a:lstStyle/>
-          <a:p>
-            <a:pPr rtl="1" algn="r" indent="0" marL="0">
-              <a:buNone/>
-            </a:pPr>
-            <a:r>
-              <a:rPr lang="en-US" sz="3200" b="1" dirty="0">
-                <a:solidFill>
-                  <a:srgbClr val="FFFFFF"/>
-                </a:solidFill>
-                <a:latin typeface="Cambria" pitchFamily="34" charset="0"/>
-                <a:ea typeface="Cambria" pitchFamily="34" charset="-122"/>
-                <a:cs typeface="Cambria" pitchFamily="34" charset="-120"/>
-              </a:rPr>
-              <a:t>تصمیمات باز نیازمند تأیید شما</a:t>
-            </a:r>
-            <a:endParaRPr lang="en-US" sz="3200" dirty="0"/>
-          </a:p>
-        </p:txBody>
-      </p:sp>
-      <p:sp>
-        <p:nvSpPr>
-          <p:cNvPr id="4" name="Shape 2"/>
-          <p:cNvSpPr/>
-          <p:nvPr/>
-        </p:nvSpPr>
-        <p:spPr>
-          <a:xfrm>
-            <a:off x="429768" y="6446520"/>
-            <a:ext cx="310896" cy="310896"/>
-          </a:xfrm>
-          <a:prstGeom prst="ellipse">
-            <a:avLst/>
-          </a:prstGeom>
-          <a:solidFill>
-            <a:srgbClr val="FFFFFF"/>
-          </a:solidFill>
-          <a:ln/>
-        </p:spPr>
-      </p:sp>
-      <p:pic>
-        <p:nvPicPr>
-          <p:cNvPr id="5" name="Image 0" descr="/home/claude/deck1/assets/logo.png">    </p:cNvPr>
-          <p:cNvPicPr>
-            <a:picLocks noChangeAspect="1"/>
-          </p:cNvPicPr>
-          <p:nvPr/>
-        </p:nvPicPr>
-        <p:blipFill>
-          <a:blip r:embed="rId1"/>
-          <a:stretch>
-            <a:fillRect/>
-          </a:stretch>
-        </p:blipFill>
-        <p:spPr>
-          <a:xfrm>
-            <a:off x="457200" y="6473952"/>
-            <a:ext cx="256032" cy="256032"/>
-          </a:xfrm>
-          <a:prstGeom prst="rect">
-            <a:avLst/>
-          </a:prstGeom>
-        </p:spPr>
-      </p:pic>
-      <p:sp>
-        <p:nvSpPr>
-          <p:cNvPr id="6" name="Text 3"/>
-          <p:cNvSpPr txBox="1"/>
-          <p:nvPr/>
-        </p:nvSpPr>
-        <p:spPr>
-          <a:xfrm>
-            <a:off x="804672" y="6537960"/>
-            <a:ext cx="6949440" cy="274320"/>
-          </a:xfrm>
-          <a:prstGeom prst="rect">
-            <a:avLst/>
-          </a:prstGeom>
-          <a:noFill/>
-          <a:ln/>
-        </p:spPr>
-        <p:txBody>
-          <a:bodyPr wrap="square" lIns="0" tIns="0" rIns="0" bIns="0" rtlCol="0" anchor="ctr"/>
-          <a:lstStyle/>
-          <a:p>
-            <a:pPr rtl="1" algn="r" indent="0" marL="0">
-              <a:buNone/>
-            </a:pPr>
-            <a:r>
-              <a:rPr lang="en-US" sz="1000" dirty="0">
-                <a:solidFill>
-                  <a:srgbClr val="8B93B0"/>
-                </a:solidFill>
-                <a:latin typeface="Calibri" pitchFamily="34" charset="0"/>
-                <a:ea typeface="Calibri" pitchFamily="34" charset="-122"/>
-                <a:cs typeface="Calibri" pitchFamily="34" charset="-120"/>
-              </a:rPr>
-              <a:t>بلاک‌چین سور — ارائه به هیأت‌مدیره‌ی بنیاد</a:t>
-            </a:r>
-            <a:endParaRPr lang="en-US" sz="1000" dirty="0"/>
-          </a:p>
-        </p:txBody>
-      </p:sp>
-      <p:sp>
-        <p:nvSpPr>
-          <p:cNvPr id="7" name="Text 4"/>
           <p:cNvSpPr txBox="1"/>
           <p:nvPr/>
         </p:nvSpPr>
@@ -15779,6 +16661,238 @@
     <p:bg>
       <p:bgPr>
         <a:solidFill>
+          <a:srgbClr val="2F3690"/>
+        </a:solidFill>
+      </p:bgPr>
+    </p:bg>
+    <p:spTree>
+      <p:nvGrpSpPr>
+        <p:cNvPr id="1" name=""/>
+        <p:cNvGrpSpPr/>
+        <p:nvPr/>
+      </p:nvGrpSpPr>
+      <p:grpSpPr>
+        <a:xfrm>
+          <a:off x="0" y="0"/>
+          <a:ext cx="0" cy="0"/>
+          <a:chOff x="0" y="0"/>
+          <a:chExt cx="0" cy="0"/>
+        </a:xfrm>
+      </p:grpSpPr>
+      <p:sp>
+        <p:nvSpPr>
+          <p:cNvPr id="2" name="Text 0"/>
+          <p:cNvSpPr txBox="1"/>
+          <p:nvPr/>
+        </p:nvSpPr>
+        <p:spPr>
+          <a:xfrm>
+            <a:off x="731520" y="2377440"/>
+            <a:ext cx="2743200" cy="1828800"/>
+          </a:xfrm>
+          <a:prstGeom prst="rect">
+            <a:avLst/>
+          </a:prstGeom>
+          <a:noFill/>
+          <a:ln/>
+        </p:spPr>
+        <p:txBody>
+          <a:bodyPr wrap="square" lIns="0" tIns="0" rIns="0" bIns="0" rtlCol="0" anchor="ctr"/>
+          <a:lstStyle/>
+          <a:p>
+            <a:pPr rtl="1" algn="r" indent="0" marL="0">
+              <a:buNone/>
+            </a:pPr>
+            <a:r>
+              <a:rPr lang="en-US" sz="9600" b="1" dirty="0">
+                <a:solidFill>
+                  <a:srgbClr val="3D4899"/>
+                </a:solidFill>
+                <a:latin typeface="Arial" pitchFamily="34" charset="0"/>
+                <a:ea typeface="Arial" pitchFamily="34" charset="-122"/>
+                <a:cs typeface="Arial" pitchFamily="34" charset="-120"/>
+              </a:rPr>
+              <a:t>8</a:t>
+            </a:r>
+            <a:endParaRPr lang="en-US" sz="9600" dirty="0"/>
+          </a:p>
+        </p:txBody>
+      </p:sp>
+      <p:sp>
+        <p:nvSpPr>
+          <p:cNvPr id="3" name="Text 1"/>
+          <p:cNvSpPr txBox="1"/>
+          <p:nvPr/>
+        </p:nvSpPr>
+        <p:spPr>
+          <a:xfrm>
+            <a:off x="3657600" y="2834640"/>
+            <a:ext cx="7772400" cy="1188720"/>
+          </a:xfrm>
+          <a:prstGeom prst="rect">
+            <a:avLst/>
+          </a:prstGeom>
+          <a:noFill/>
+          <a:ln/>
+        </p:spPr>
+        <p:txBody>
+          <a:bodyPr wrap="square" lIns="0" tIns="0" rIns="0" bIns="0" rtlCol="0" anchor="ctr"/>
+          <a:lstStyle/>
+          <a:p>
+            <a:pPr rtl="1" algn="r" indent="0" marL="0">
+              <a:buNone/>
+            </a:pPr>
+            <a:r>
+              <a:rPr lang="en-US" sz="3200" b="1" dirty="0">
+                <a:solidFill>
+                  <a:srgbClr val="FFFFFF"/>
+                </a:solidFill>
+                <a:latin typeface="Cambria" pitchFamily="34" charset="0"/>
+                <a:ea typeface="Cambria" pitchFamily="34" charset="-122"/>
+                <a:cs typeface="Cambria" pitchFamily="34" charset="-120"/>
+              </a:rPr>
+              <a:t>تصمیمات باز نیازمند تأیید شما</a:t>
+            </a:r>
+            <a:endParaRPr lang="en-US" sz="3200" dirty="0"/>
+          </a:p>
+        </p:txBody>
+      </p:sp>
+      <p:sp>
+        <p:nvSpPr>
+          <p:cNvPr id="4" name="Shape 2"/>
+          <p:cNvSpPr/>
+          <p:nvPr/>
+        </p:nvSpPr>
+        <p:spPr>
+          <a:xfrm>
+            <a:off x="429768" y="6446520"/>
+            <a:ext cx="310896" cy="310896"/>
+          </a:xfrm>
+          <a:prstGeom prst="ellipse">
+            <a:avLst/>
+          </a:prstGeom>
+          <a:solidFill>
+            <a:srgbClr val="FFFFFF"/>
+          </a:solidFill>
+          <a:ln/>
+        </p:spPr>
+      </p:sp>
+      <p:pic>
+        <p:nvPicPr>
+          <p:cNvPr id="5" name="Image 0" descr="/home/claude/deck1/assets/logo.png">    </p:cNvPr>
+          <p:cNvPicPr>
+            <a:picLocks noChangeAspect="1"/>
+          </p:cNvPicPr>
+          <p:nvPr/>
+        </p:nvPicPr>
+        <p:blipFill>
+          <a:blip r:embed="rId1"/>
+          <a:stretch>
+            <a:fillRect/>
+          </a:stretch>
+        </p:blipFill>
+        <p:spPr>
+          <a:xfrm>
+            <a:off x="457200" y="6473952"/>
+            <a:ext cx="256032" cy="256032"/>
+          </a:xfrm>
+          <a:prstGeom prst="rect">
+            <a:avLst/>
+          </a:prstGeom>
+        </p:spPr>
+      </p:pic>
+      <p:sp>
+        <p:nvSpPr>
+          <p:cNvPr id="6" name="Text 3"/>
+          <p:cNvSpPr txBox="1"/>
+          <p:nvPr/>
+        </p:nvSpPr>
+        <p:spPr>
+          <a:xfrm>
+            <a:off x="804672" y="6537960"/>
+            <a:ext cx="6949440" cy="274320"/>
+          </a:xfrm>
+          <a:prstGeom prst="rect">
+            <a:avLst/>
+          </a:prstGeom>
+          <a:noFill/>
+          <a:ln/>
+        </p:spPr>
+        <p:txBody>
+          <a:bodyPr wrap="square" lIns="0" tIns="0" rIns="0" bIns="0" rtlCol="0" anchor="ctr"/>
+          <a:lstStyle/>
+          <a:p>
+            <a:pPr rtl="1" algn="r" indent="0" marL="0">
+              <a:buNone/>
+            </a:pPr>
+            <a:r>
+              <a:rPr lang="en-US" sz="1000" dirty="0">
+                <a:solidFill>
+                  <a:srgbClr val="8B93B0"/>
+                </a:solidFill>
+                <a:latin typeface="Calibri" pitchFamily="34" charset="0"/>
+                <a:ea typeface="Calibri" pitchFamily="34" charset="-122"/>
+                <a:cs typeface="Calibri" pitchFamily="34" charset="-120"/>
+              </a:rPr>
+              <a:t>بلاک‌چین سور — ارائه به هیأت‌مدیره‌ی بنیاد</a:t>
+            </a:r>
+            <a:endParaRPr lang="en-US" sz="1000" dirty="0"/>
+          </a:p>
+        </p:txBody>
+      </p:sp>
+      <p:sp>
+        <p:nvSpPr>
+          <p:cNvPr id="7" name="Text 4"/>
+          <p:cNvSpPr txBox="1"/>
+          <p:nvPr/>
+        </p:nvSpPr>
+        <p:spPr>
+          <a:xfrm>
+            <a:off x="11430000" y="6537960"/>
+            <a:ext cx="365760" cy="274320"/>
+          </a:xfrm>
+          <a:prstGeom prst="rect">
+            <a:avLst/>
+          </a:prstGeom>
+          <a:noFill/>
+          <a:ln/>
+        </p:spPr>
+        <p:txBody>
+          <a:bodyPr wrap="square" lIns="0" tIns="0" rIns="0" bIns="0" rtlCol="0" anchor="ctr"/>
+          <a:lstStyle/>
+          <a:p>
+            <a:pPr rtl="1" algn="r" indent="0" marL="0">
+              <a:buNone/>
+            </a:pPr>
+            <a:r>
+              <a:rPr lang="en-US" sz="1000" dirty="0">
+                <a:solidFill>
+                  <a:srgbClr val="8B93B0"/>
+                </a:solidFill>
+                <a:latin typeface="Calibri" pitchFamily="34" charset="0"/>
+                <a:ea typeface="Calibri" pitchFamily="34" charset="-122"/>
+                <a:cs typeface="Calibri" pitchFamily="34" charset="-120"/>
+              </a:rPr>
+              <a:t>29</a:t>
+            </a:r>
+            <a:endParaRPr lang="en-US" sz="1000" dirty="0"/>
+          </a:p>
+        </p:txBody>
+      </p:sp>
+    </p:spTree>
+  </p:cSld>
+  <p:clrMapOvr>
+    <a:masterClrMapping/>
+  </p:clrMapOvr>
+</p:sld>
+</file>
+
+<file path=ppt/slides/slide31.xml><?xml version="1.0" encoding="utf-8"?>
+<p:sld xmlns:a="http://schemas.openxmlformats.org/drawingml/2006/main" xmlns:r="http://schemas.openxmlformats.org/officeDocument/2006/relationships" xmlns:p="http://schemas.openxmlformats.org/presentationml/2006/main">
+  <p:cSld name="Slide 31">
+    <p:bg>
+      <p:bgPr>
+        <a:solidFill>
           <a:srgbClr val="FFFFFF"/>
         </a:solidFill>
       </p:bgPr>
@@ -15877,7 +16991,7 @@
       </p:sp>
       <p:graphicFrame>
         <p:nvGraphicFramePr>
-          <p:cNvPr id="31" name="Table 0"/>
+          <p:cNvPr id="32" name="Table 0"/>
           <p:cNvGraphicFramePr>
             <a:graphicFrameLocks noGrp="1"/>
           </p:cNvGraphicFramePr>
@@ -16849,7 +17963,7 @@
                 <a:ea typeface="Calibri" pitchFamily="34" charset="-122"/>
                 <a:cs typeface="Calibri" pitchFamily="34" charset="-120"/>
               </a:rPr>
-              <a:t>29</a:t>
+              <a:t>30</a:t>
             </a:r>
             <a:endParaRPr lang="en-US" sz="1000" dirty="0"/>
           </a:p>
@@ -16863,9 +17977,9 @@
 </p:sld>
 </file>
 
-<file path=ppt/slides/slide31.xml><?xml version="1.0" encoding="utf-8"?>
+<file path=ppt/slides/slide32.xml><?xml version="1.0" encoding="utf-8"?>
 <p:sld xmlns:a="http://schemas.openxmlformats.org/drawingml/2006/main" xmlns:r="http://schemas.openxmlformats.org/officeDocument/2006/relationships" xmlns:p="http://schemas.openxmlformats.org/presentationml/2006/main">
-  <p:cSld name="Slide 31">
+  <p:cSld name="Slide 32">
     <p:bg>
       <p:bgPr>
         <a:solidFill>

--- a/presentations/Sur - Board Presentation.pptx
+++ b/presentations/Sur - Board Presentation.pptx
@@ -37,9 +37,10 @@
     <p:sldId id="285" r:id="rId31"/>
     <p:sldId id="286" r:id="rId32"/>
     <p:sldId id="287" r:id="rId33"/>
+    <p:sldId id="288" r:id="rId34"/>
   </p:sldIdLst>
   <p:notesMasterIdLst>
-    <p:notesMasterId r:id="rId34"/>
+    <p:notesMasterId r:id="rId35"/>
   </p:notesMasterIdLst>
   <p:sldSz cx="12192000" cy="6858000"/>
   <p:notesSz cx="6858000" cy="12192000"/>
@@ -2757,6 +2758,94 @@
             <a:fld id="{F7021451-1387-4CA6-816F-3879F97B5CBC}" type="slidenum">
               <a:rPr lang="en-US"/>
               <a:t>32</a:t>
+            </a:fld>
+            <a:endParaRPr lang="en-US"/>
+          </a:p>
+        </p:txBody>
+      </p:sp>
+    </p:spTree>
+    <p:extLst>
+      <p:ext uri="{BB962C8B-B14F-4D97-AF65-F5344CB8AC3E}">
+        <p14:creationId xmlns:p14="http://schemas.microsoft.com/office/powerpoint/2010/main" val="1024086991"/>
+      </p:ext>
+    </p:extLst>
+  </p:cSld>
+  <p:clrMapOvr>
+    <a:masterClrMapping/>
+  </p:clrMapOvr>
+</p:notes>
+</file>
+
+<file path=ppt/notesSlides/notesSlide33.xml><?xml version="1.0" encoding="utf-8"?>
+<p:notes xmlns:a="http://schemas.openxmlformats.org/drawingml/2006/main" xmlns:r="http://schemas.openxmlformats.org/officeDocument/2006/relationships" xmlns:p="http://schemas.openxmlformats.org/presentationml/2006/main">
+  <p:cSld>
+    <p:spTree>
+      <p:nvGrpSpPr>
+        <p:cNvPr id="1" name=""/>
+        <p:cNvGrpSpPr/>
+        <p:nvPr/>
+      </p:nvGrpSpPr>
+      <p:grpSpPr>
+        <a:xfrm>
+          <a:off x="0" y="0"/>
+          <a:ext cx="0" cy="0"/>
+          <a:chOff x="0" y="0"/>
+          <a:chExt cx="0" cy="0"/>
+        </a:xfrm>
+      </p:grpSpPr>
+      <p:sp>
+        <p:nvSpPr>
+          <p:cNvPr id="2" name="Slide Image Placeholder 1"/>
+          <p:cNvSpPr>
+            <a:spLocks noGrp="1" noRot="1" noChangeAspect="1"/>
+          </p:cNvSpPr>
+          <p:nvPr>
+            <p:ph type="sldImg"/>
+          </p:nvPr>
+        </p:nvSpPr>
+        <p:spPr/>
+      </p:sp>
+      <p:sp>
+        <p:nvSpPr>
+          <p:cNvPr id="3" name="Notes Placeholder 2"/>
+          <p:cNvSpPr>
+            <a:spLocks noGrp="1"/>
+          </p:cNvSpPr>
+          <p:nvPr>
+            <p:ph type="body" idx="1"/>
+          </p:nvPr>
+        </p:nvSpPr>
+        <p:spPr/>
+        <p:txBody>
+          <a:bodyPr/>
+          <a:lstStyle/>
+          <a:p>
+            <a:r>
+              <a:rPr lang="en-US" dirty="0"/>
+              <a:t/>
+            </a:r>
+            <a:endParaRPr lang="en-US" dirty="0"/>
+          </a:p>
+        </p:txBody>
+      </p:sp>
+      <p:sp>
+        <p:nvSpPr>
+          <p:cNvPr id="4" name="Slide Number Placeholder 3"/>
+          <p:cNvSpPr>
+            <a:spLocks noGrp="1"/>
+          </p:cNvSpPr>
+          <p:nvPr>
+            <p:ph type="sldNum" sz="quarter" idx="10"/>
+          </p:nvPr>
+        </p:nvSpPr>
+        <p:spPr/>
+        <p:txBody>
+          <a:bodyPr/>
+          <a:lstStyle/>
+          <a:p>
+            <a:fld id="{F7021451-1387-4CA6-816F-3879F97B5CBC}" type="slidenum">
+              <a:rPr lang="en-US"/>
+              <a:t>33</a:t>
             </a:fld>
             <a:endParaRPr lang="en-US"/>
           </a:p>
@@ -15553,6 +15642,505 @@
     <p:bg>
       <p:bgPr>
         <a:solidFill>
+          <a:srgbClr val="FFFFFF"/>
+        </a:solidFill>
+      </p:bgPr>
+    </p:bg>
+    <p:spTree>
+      <p:nvGrpSpPr>
+        <p:cNvPr id="1" name=""/>
+        <p:cNvGrpSpPr/>
+        <p:nvPr/>
+      </p:nvGrpSpPr>
+      <p:grpSpPr>
+        <a:xfrm>
+          <a:off x="0" y="0"/>
+          <a:ext cx="0" cy="0"/>
+          <a:chOff x="0" y="0"/>
+          <a:chExt cx="0" cy="0"/>
+        </a:xfrm>
+      </p:grpSpPr>
+      <p:sp>
+        <p:nvSpPr>
+          <p:cNvPr id="2" name="Text 0"/>
+          <p:cNvSpPr txBox="1"/>
+          <p:nvPr/>
+        </p:nvSpPr>
+        <p:spPr>
+          <a:xfrm>
+            <a:off x="548640" y="292608"/>
+            <a:ext cx="11064240" cy="320040"/>
+          </a:xfrm>
+          <a:prstGeom prst="rect">
+            <a:avLst/>
+          </a:prstGeom>
+          <a:noFill/>
+          <a:ln/>
+        </p:spPr>
+        <p:txBody>
+          <a:bodyPr wrap="square" lIns="0" tIns="0" rIns="0" bIns="0" rtlCol="0" anchor="ctr"/>
+          <a:lstStyle/>
+          <a:p>
+            <a:pPr rtl="1" algn="r" indent="0" marL="0">
+              <a:buNone/>
+            </a:pPr>
+            <a:r>
+              <a:rPr lang="en-US" sz="1250" b="1" spc="150" kern="0" dirty="0">
+                <a:solidFill>
+                  <a:srgbClr val="2F3690"/>
+                </a:solidFill>
+                <a:latin typeface="Calibri" pitchFamily="34" charset="0"/>
+                <a:ea typeface="Calibri" pitchFamily="34" charset="-122"/>
+                <a:cs typeface="Calibri" pitchFamily="34" charset="-120"/>
+              </a:rPr>
+              <a:t>راه‌حل واقعی</a:t>
+            </a:r>
+            <a:endParaRPr lang="en-US" sz="1250" dirty="0"/>
+          </a:p>
+        </p:txBody>
+      </p:sp>
+      <p:sp>
+        <p:nvSpPr>
+          <p:cNvPr id="3" name="Text 1"/>
+          <p:cNvSpPr txBox="1"/>
+          <p:nvPr/>
+        </p:nvSpPr>
+        <p:spPr>
+          <a:xfrm>
+            <a:off x="548640" y="576072"/>
+            <a:ext cx="11064240" cy="685800"/>
+          </a:xfrm>
+          <a:prstGeom prst="rect">
+            <a:avLst/>
+          </a:prstGeom>
+          <a:noFill/>
+          <a:ln/>
+        </p:spPr>
+        <p:txBody>
+          <a:bodyPr wrap="square" lIns="0" tIns="0" rIns="0" bIns="0" rtlCol="0" anchor="ctr"/>
+          <a:lstStyle/>
+          <a:p>
+            <a:pPr rtl="1" algn="r" indent="0" marL="0">
+              <a:buNone/>
+            </a:pPr>
+            <a:r>
+              <a:rPr lang="en-US" sz="2500" b="1" dirty="0">
+                <a:solidFill>
+                  <a:srgbClr val="1B1B2F"/>
+                </a:solidFill>
+                <a:latin typeface="Cambria" pitchFamily="34" charset="0"/>
+                <a:ea typeface="Cambria" pitchFamily="34" charset="-122"/>
+                <a:cs typeface="Cambria" pitchFamily="34" charset="-120"/>
+              </a:rPr>
+              <a:t>خزانه‌ی ولیدیتورها — یک منبع تکمیلی، نه فقط یک ایده روی کاغذ</a:t>
+            </a:r>
+            <a:endParaRPr lang="en-US" sz="2500" dirty="0"/>
+          </a:p>
+        </p:txBody>
+      </p:sp>
+      <p:sp>
+        <p:nvSpPr>
+          <p:cNvPr id="4" name="Shape 2"/>
+          <p:cNvSpPr/>
+          <p:nvPr/>
+        </p:nvSpPr>
+        <p:spPr>
+          <a:xfrm>
+            <a:off x="9966960" y="2409444"/>
+            <a:ext cx="621792" cy="621792"/>
+          </a:xfrm>
+          <a:prstGeom prst="ellipse">
+            <a:avLst/>
+          </a:prstGeom>
+          <a:solidFill>
+            <a:srgbClr val="2F3690"/>
+          </a:solidFill>
+          <a:ln/>
+        </p:spPr>
+      </p:sp>
+      <p:pic>
+        <p:nvPicPr>
+          <p:cNvPr id="5" name="Image 0" descr="/home/claude/deck1/icons/handshake.png">    </p:cNvPr>
+          <p:cNvPicPr>
+            <a:picLocks noChangeAspect="1"/>
+          </p:cNvPicPr>
+          <p:nvPr/>
+        </p:nvPicPr>
+        <p:blipFill>
+          <a:blip r:embed="rId1"/>
+          <a:stretch>
+            <a:fillRect/>
+          </a:stretch>
+        </p:blipFill>
+        <p:spPr>
+          <a:xfrm>
+            <a:off x="10128626" y="2571110"/>
+            <a:ext cx="298460" cy="298460"/>
+          </a:xfrm>
+          <a:prstGeom prst="rect">
+            <a:avLst/>
+          </a:prstGeom>
+        </p:spPr>
+      </p:pic>
+      <p:sp>
+        <p:nvSpPr>
+          <p:cNvPr id="6" name="Text 3"/>
+          <p:cNvSpPr txBox="1"/>
+          <p:nvPr/>
+        </p:nvSpPr>
+        <p:spPr>
+          <a:xfrm>
+            <a:off x="548640" y="1508760"/>
+            <a:ext cx="9144000" cy="365760"/>
+          </a:xfrm>
+          <a:prstGeom prst="rect">
+            <a:avLst/>
+          </a:prstGeom>
+          <a:noFill/>
+          <a:ln/>
+        </p:spPr>
+        <p:txBody>
+          <a:bodyPr wrap="square" lIns="0" tIns="0" rIns="0" bIns="0" rtlCol="0" anchor="ctr"/>
+          <a:lstStyle/>
+          <a:p>
+            <a:pPr rtl="1" algn="r" indent="0" marL="0">
+              <a:buNone/>
+            </a:pPr>
+            <a:r>
+              <a:rPr lang="en-US" sz="1550" b="1" dirty="0">
+                <a:solidFill>
+                  <a:srgbClr val="1B1B2F"/>
+                </a:solidFill>
+                <a:latin typeface="Calibri" pitchFamily="34" charset="0"/>
+                <a:ea typeface="Calibri" pitchFamily="34" charset="-122"/>
+                <a:cs typeface="Calibri" pitchFamily="34" charset="-120"/>
+              </a:rPr>
+              <a:t>کارکرد خزانه: بودجه‌ی ترویج خودگردانِ ولیدیتورها، نه پورسانت شخصی</a:t>
+            </a:r>
+            <a:endParaRPr lang="en-US" sz="1550" dirty="0"/>
+          </a:p>
+        </p:txBody>
+      </p:sp>
+      <p:sp>
+        <p:nvSpPr>
+          <p:cNvPr id="7" name="Text 4"/>
+          <p:cNvSpPr txBox="1"/>
+          <p:nvPr/>
+        </p:nvSpPr>
+        <p:spPr>
+          <a:xfrm>
+            <a:off x="548640" y="1856232"/>
+            <a:ext cx="9144000" cy="2039112"/>
+          </a:xfrm>
+          <a:prstGeom prst="rect">
+            <a:avLst/>
+          </a:prstGeom>
+          <a:noFill/>
+          <a:ln/>
+        </p:spPr>
+        <p:txBody>
+          <a:bodyPr wrap="square" lIns="0" tIns="0" rIns="0" bIns="0" rtlCol="0" anchor="t"/>
+          <a:lstStyle/>
+          <a:p>
+            <a:pPr rtl="1" algn="r" indent="0" marL="0">
+              <a:buNone/>
+            </a:pPr>
+            <a:r>
+              <a:rPr lang="en-US" sz="1200" dirty="0">
+                <a:solidFill>
+                  <a:srgbClr val="444B66"/>
+                </a:solidFill>
+                <a:latin typeface="Calibri" pitchFamily="34" charset="0"/>
+                <a:ea typeface="Calibri" pitchFamily="34" charset="-122"/>
+                <a:cs typeface="Calibri" pitchFamily="34" charset="-120"/>
+              </a:rPr>
+              <a:t>ولیدیتور هزینه‌ی جداگانه‌ای ندارد؛ رشد شبکه مستقیماً به نفع خودشان است (فی بیشتر، سورن باارزش‌تر) — همین انگیزه‌ی اقتصادی واقعی برای موافقت با کمک به بودجه‌ی بنیاد است.</a:t>
+            </a:r>
+            <a:endParaRPr lang="en-US" sz="1200" dirty="0"/>
+          </a:p>
+        </p:txBody>
+      </p:sp>
+      <p:sp>
+        <p:nvSpPr>
+          <p:cNvPr id="8" name="Shape 5"/>
+          <p:cNvSpPr/>
+          <p:nvPr/>
+        </p:nvSpPr>
+        <p:spPr>
+          <a:xfrm>
+            <a:off x="548640" y="3877056"/>
+            <a:ext cx="10881360" cy="0"/>
+          </a:xfrm>
+          <a:prstGeom prst="line">
+            <a:avLst/>
+          </a:prstGeom>
+          <a:noFill/>
+          <a:ln w="12700">
+            <a:solidFill>
+              <a:srgbClr val="E5E8F0"/>
+            </a:solidFill>
+            <a:prstDash val="solid"/>
+          </a:ln>
+        </p:spPr>
+      </p:sp>
+      <p:sp>
+        <p:nvSpPr>
+          <p:cNvPr id="9" name="Shape 6"/>
+          <p:cNvSpPr/>
+          <p:nvPr/>
+        </p:nvSpPr>
+        <p:spPr>
+          <a:xfrm>
+            <a:off x="9966960" y="4832604"/>
+            <a:ext cx="621792" cy="621792"/>
+          </a:xfrm>
+          <a:prstGeom prst="ellipse">
+            <a:avLst/>
+          </a:prstGeom>
+          <a:solidFill>
+            <a:srgbClr val="1B5E20"/>
+          </a:solidFill>
+          <a:ln/>
+        </p:spPr>
+      </p:sp>
+      <p:pic>
+        <p:nvPicPr>
+          <p:cNvPr id="10" name="Image 1" descr="/home/claude/deck1/icons/money.png">    </p:cNvPr>
+          <p:cNvPicPr>
+            <a:picLocks noChangeAspect="1"/>
+          </p:cNvPicPr>
+          <p:nvPr/>
+        </p:nvPicPr>
+        <p:blipFill>
+          <a:blip r:embed="rId2"/>
+          <a:stretch>
+            <a:fillRect/>
+          </a:stretch>
+        </p:blipFill>
+        <p:spPr>
+          <a:xfrm>
+            <a:off x="10128626" y="4994270"/>
+            <a:ext cx="298460" cy="298460"/>
+          </a:xfrm>
+          <a:prstGeom prst="rect">
+            <a:avLst/>
+          </a:prstGeom>
+        </p:spPr>
+      </p:pic>
+      <p:sp>
+        <p:nvSpPr>
+          <p:cNvPr id="11" name="Text 7"/>
+          <p:cNvSpPr txBox="1"/>
+          <p:nvPr/>
+        </p:nvSpPr>
+        <p:spPr>
+          <a:xfrm>
+            <a:off x="548640" y="3931920"/>
+            <a:ext cx="9144000" cy="365760"/>
+          </a:xfrm>
+          <a:prstGeom prst="rect">
+            <a:avLst/>
+          </a:prstGeom>
+          <a:noFill/>
+          <a:ln/>
+        </p:spPr>
+        <p:txBody>
+          <a:bodyPr wrap="square" lIns="0" tIns="0" rIns="0" bIns="0" rtlCol="0" anchor="ctr"/>
+          <a:lstStyle/>
+          <a:p>
+            <a:pPr rtl="1" algn="r" indent="0" marL="0">
+              <a:buNone/>
+            </a:pPr>
+            <a:r>
+              <a:rPr lang="en-US" sz="1550" b="1" dirty="0">
+                <a:solidFill>
+                  <a:srgbClr val="1B1B2F"/>
+                </a:solidFill>
+                <a:latin typeface="Calibri" pitchFamily="34" charset="0"/>
+                <a:ea typeface="Calibri" pitchFamily="34" charset="-122"/>
+                <a:cs typeface="Calibri" pitchFamily="34" charset="-120"/>
+              </a:rPr>
+              <a:t>توان مالی واقعی: ~۵۲.۵۶ میلیون سورن تجمعی تا سال پنجم</a:t>
+            </a:r>
+            <a:endParaRPr lang="en-US" sz="1550" dirty="0"/>
+          </a:p>
+        </p:txBody>
+      </p:sp>
+      <p:sp>
+        <p:nvSpPr>
+          <p:cNvPr id="12" name="Text 8"/>
+          <p:cNvSpPr txBox="1"/>
+          <p:nvPr/>
+        </p:nvSpPr>
+        <p:spPr>
+          <a:xfrm>
+            <a:off x="548640" y="4279392"/>
+            <a:ext cx="9144000" cy="2039112"/>
+          </a:xfrm>
+          <a:prstGeom prst="rect">
+            <a:avLst/>
+          </a:prstGeom>
+          <a:noFill/>
+          <a:ln/>
+        </p:spPr>
+        <p:txBody>
+          <a:bodyPr wrap="square" lIns="0" tIns="0" rIns="0" bIns="0" rtlCol="0" anchor="t"/>
+          <a:lstStyle/>
+          <a:p>
+            <a:pPr rtl="1" algn="r" indent="0" marL="0">
+              <a:buNone/>
+            </a:pPr>
+            <a:r>
+              <a:rPr lang="en-US" sz="1200" dirty="0">
+                <a:solidFill>
+                  <a:srgbClr val="444B66"/>
+                </a:solidFill>
+                <a:latin typeface="Calibri" pitchFamily="34" charset="0"/>
+                <a:ea typeface="Calibri" pitchFamily="34" charset="-122"/>
+                <a:cs typeface="Calibri" pitchFamily="34" charset="-120"/>
+              </a:rPr>
+              <a:t>فقط از سهم ۵۰٪ ریوارد (~۱۰.۵ میلیون سورن در سال)، بدون احتساب کارمزد عضویت/اسلش — کافی برای پوشش کل کمبود چندساله‌ی بنیاد.</a:t>
+            </a:r>
+            <a:endParaRPr lang="en-US" sz="1200" dirty="0"/>
+          </a:p>
+        </p:txBody>
+      </p:sp>
+      <p:sp>
+        <p:nvSpPr>
+          <p:cNvPr id="13" name="Shape 9"/>
+          <p:cNvSpPr/>
+          <p:nvPr/>
+        </p:nvSpPr>
+        <p:spPr>
+          <a:xfrm>
+            <a:off x="429768" y="6446520"/>
+            <a:ext cx="310896" cy="310896"/>
+          </a:xfrm>
+          <a:prstGeom prst="ellipse">
+            <a:avLst/>
+          </a:prstGeom>
+          <a:solidFill>
+            <a:srgbClr val="FFFFFF"/>
+          </a:solidFill>
+          <a:ln/>
+        </p:spPr>
+      </p:sp>
+      <p:pic>
+        <p:nvPicPr>
+          <p:cNvPr id="14" name="Image 2" descr="/home/claude/deck1/assets/logo.png">    </p:cNvPr>
+          <p:cNvPicPr>
+            <a:picLocks noChangeAspect="1"/>
+          </p:cNvPicPr>
+          <p:nvPr/>
+        </p:nvPicPr>
+        <p:blipFill>
+          <a:blip r:embed="rId3"/>
+          <a:stretch>
+            <a:fillRect/>
+          </a:stretch>
+        </p:blipFill>
+        <p:spPr>
+          <a:xfrm>
+            <a:off x="457200" y="6473952"/>
+            <a:ext cx="256032" cy="256032"/>
+          </a:xfrm>
+          <a:prstGeom prst="rect">
+            <a:avLst/>
+          </a:prstGeom>
+        </p:spPr>
+      </p:pic>
+      <p:sp>
+        <p:nvSpPr>
+          <p:cNvPr id="15" name="Text 10"/>
+          <p:cNvSpPr txBox="1"/>
+          <p:nvPr/>
+        </p:nvSpPr>
+        <p:spPr>
+          <a:xfrm>
+            <a:off x="804672" y="6537960"/>
+            <a:ext cx="6949440" cy="274320"/>
+          </a:xfrm>
+          <a:prstGeom prst="rect">
+            <a:avLst/>
+          </a:prstGeom>
+          <a:noFill/>
+          <a:ln/>
+        </p:spPr>
+        <p:txBody>
+          <a:bodyPr wrap="square" lIns="0" tIns="0" rIns="0" bIns="0" rtlCol="0" anchor="ctr"/>
+          <a:lstStyle/>
+          <a:p>
+            <a:pPr rtl="1" algn="r" indent="0" marL="0">
+              <a:buNone/>
+            </a:pPr>
+            <a:r>
+              <a:rPr lang="en-US" sz="1000" dirty="0">
+                <a:solidFill>
+                  <a:srgbClr val="8B93B0"/>
+                </a:solidFill>
+                <a:latin typeface="Calibri" pitchFamily="34" charset="0"/>
+                <a:ea typeface="Calibri" pitchFamily="34" charset="-122"/>
+                <a:cs typeface="Calibri" pitchFamily="34" charset="-120"/>
+              </a:rPr>
+              <a:t>بلاک‌چین سور — ارائه به هیأت‌مدیره‌ی بنیاد</a:t>
+            </a:r>
+            <a:endParaRPr lang="en-US" sz="1000" dirty="0"/>
+          </a:p>
+        </p:txBody>
+      </p:sp>
+      <p:sp>
+        <p:nvSpPr>
+          <p:cNvPr id="16" name="Text 11"/>
+          <p:cNvSpPr txBox="1"/>
+          <p:nvPr/>
+        </p:nvSpPr>
+        <p:spPr>
+          <a:xfrm>
+            <a:off x="11430000" y="6537960"/>
+            <a:ext cx="365760" cy="274320"/>
+          </a:xfrm>
+          <a:prstGeom prst="rect">
+            <a:avLst/>
+          </a:prstGeom>
+          <a:noFill/>
+          <a:ln/>
+        </p:spPr>
+        <p:txBody>
+          <a:bodyPr wrap="square" lIns="0" tIns="0" rIns="0" bIns="0" rtlCol="0" anchor="ctr"/>
+          <a:lstStyle/>
+          <a:p>
+            <a:pPr rtl="1" algn="r" indent="0" marL="0">
+              <a:buNone/>
+            </a:pPr>
+            <a:r>
+              <a:rPr lang="en-US" sz="1000" dirty="0">
+                <a:solidFill>
+                  <a:srgbClr val="8B93B0"/>
+                </a:solidFill>
+                <a:latin typeface="Calibri" pitchFamily="34" charset="0"/>
+                <a:ea typeface="Calibri" pitchFamily="34" charset="-122"/>
+                <a:cs typeface="Calibri" pitchFamily="34" charset="-120"/>
+              </a:rPr>
+              <a:t>27</a:t>
+            </a:r>
+            <a:endParaRPr lang="en-US" sz="1000" dirty="0"/>
+          </a:p>
+        </p:txBody>
+      </p:sp>
+    </p:spTree>
+  </p:cSld>
+  <p:clrMapOvr>
+    <a:masterClrMapping/>
+  </p:clrMapOvr>
+</p:sld>
+</file>
+
+<file path=ppt/slides/slide29.xml><?xml version="1.0" encoding="utf-8"?>
+<p:sld xmlns:a="http://schemas.openxmlformats.org/drawingml/2006/main" xmlns:r="http://schemas.openxmlformats.org/officeDocument/2006/relationships" xmlns:p="http://schemas.openxmlformats.org/presentationml/2006/main">
+  <p:cSld name="Slide 29">
+    <p:bg>
+      <p:bgPr>
+        <a:solidFill>
           <a:srgbClr val="2F3690"/>
         </a:solidFill>
       </p:bgPr>
@@ -15735,650 +16323,6 @@
       <p:sp>
         <p:nvSpPr>
           <p:cNvPr id="7" name="Text 4"/>
-          <p:cNvSpPr txBox="1"/>
-          <p:nvPr/>
-        </p:nvSpPr>
-        <p:spPr>
-          <a:xfrm>
-            <a:off x="11430000" y="6537960"/>
-            <a:ext cx="365760" cy="274320"/>
-          </a:xfrm>
-          <a:prstGeom prst="rect">
-            <a:avLst/>
-          </a:prstGeom>
-          <a:noFill/>
-          <a:ln/>
-        </p:spPr>
-        <p:txBody>
-          <a:bodyPr wrap="square" lIns="0" tIns="0" rIns="0" bIns="0" rtlCol="0" anchor="ctr"/>
-          <a:lstStyle/>
-          <a:p>
-            <a:pPr rtl="1" algn="r" indent="0" marL="0">
-              <a:buNone/>
-            </a:pPr>
-            <a:r>
-              <a:rPr lang="en-US" sz="1000" dirty="0">
-                <a:solidFill>
-                  <a:srgbClr val="8B93B0"/>
-                </a:solidFill>
-                <a:latin typeface="Calibri" pitchFamily="34" charset="0"/>
-                <a:ea typeface="Calibri" pitchFamily="34" charset="-122"/>
-                <a:cs typeface="Calibri" pitchFamily="34" charset="-120"/>
-              </a:rPr>
-              <a:t>27</a:t>
-            </a:r>
-            <a:endParaRPr lang="en-US" sz="1000" dirty="0"/>
-          </a:p>
-        </p:txBody>
-      </p:sp>
-    </p:spTree>
-  </p:cSld>
-  <p:clrMapOvr>
-    <a:masterClrMapping/>
-  </p:clrMapOvr>
-</p:sld>
-</file>
-
-<file path=ppt/slides/slide29.xml><?xml version="1.0" encoding="utf-8"?>
-<p:sld xmlns:a="http://schemas.openxmlformats.org/drawingml/2006/main" xmlns:r="http://schemas.openxmlformats.org/officeDocument/2006/relationships" xmlns:p="http://schemas.openxmlformats.org/presentationml/2006/main">
-  <p:cSld name="Slide 29">
-    <p:bg>
-      <p:bgPr>
-        <a:solidFill>
-          <a:srgbClr val="FFFFFF"/>
-        </a:solidFill>
-      </p:bgPr>
-    </p:bg>
-    <p:spTree>
-      <p:nvGrpSpPr>
-        <p:cNvPr id="1" name=""/>
-        <p:cNvGrpSpPr/>
-        <p:nvPr/>
-      </p:nvGrpSpPr>
-      <p:grpSpPr>
-        <a:xfrm>
-          <a:off x="0" y="0"/>
-          <a:ext cx="0" cy="0"/>
-          <a:chOff x="0" y="0"/>
-          <a:chExt cx="0" cy="0"/>
-        </a:xfrm>
-      </p:grpSpPr>
-      <p:sp>
-        <p:nvSpPr>
-          <p:cNvPr id="2" name="Text 0"/>
-          <p:cNvSpPr txBox="1"/>
-          <p:nvPr/>
-        </p:nvSpPr>
-        <p:spPr>
-          <a:xfrm>
-            <a:off x="548640" y="292608"/>
-            <a:ext cx="11064240" cy="320040"/>
-          </a:xfrm>
-          <a:prstGeom prst="rect">
-            <a:avLst/>
-          </a:prstGeom>
-          <a:noFill/>
-          <a:ln/>
-        </p:spPr>
-        <p:txBody>
-          <a:bodyPr wrap="square" lIns="0" tIns="0" rIns="0" bIns="0" rtlCol="0" anchor="ctr"/>
-          <a:lstStyle/>
-          <a:p>
-            <a:pPr rtl="1" algn="r" indent="0" marL="0">
-              <a:buNone/>
-            </a:pPr>
-            <a:r>
-              <a:rPr lang="en-US" sz="1250" b="1" spc="150" kern="0" dirty="0">
-                <a:solidFill>
-                  <a:srgbClr val="2F3690"/>
-                </a:solidFill>
-                <a:latin typeface="Calibri" pitchFamily="34" charset="0"/>
-                <a:ea typeface="Calibri" pitchFamily="34" charset="-122"/>
-                <a:cs typeface="Calibri" pitchFamily="34" charset="-120"/>
-              </a:rPr>
-              <a:t>بانک مرکزی</a:t>
-            </a:r>
-            <a:endParaRPr lang="en-US" sz="1250" dirty="0"/>
-          </a:p>
-        </p:txBody>
-      </p:sp>
-      <p:sp>
-        <p:nvSpPr>
-          <p:cNvPr id="3" name="Text 1"/>
-          <p:cNvSpPr txBox="1"/>
-          <p:nvPr/>
-        </p:nvSpPr>
-        <p:spPr>
-          <a:xfrm>
-            <a:off x="548640" y="576072"/>
-            <a:ext cx="11064240" cy="685800"/>
-          </a:xfrm>
-          <a:prstGeom prst="rect">
-            <a:avLst/>
-          </a:prstGeom>
-          <a:noFill/>
-          <a:ln/>
-        </p:spPr>
-        <p:txBody>
-          <a:bodyPr wrap="square" lIns="0" tIns="0" rIns="0" bIns="0" rtlCol="0" anchor="ctr"/>
-          <a:lstStyle/>
-          <a:p>
-            <a:pPr rtl="1" algn="r" indent="0" marL="0">
-              <a:buNone/>
-            </a:pPr>
-            <a:r>
-              <a:rPr lang="en-US" sz="2500" b="1" dirty="0">
-                <a:solidFill>
-                  <a:srgbClr val="1B1B2F"/>
-                </a:solidFill>
-                <a:latin typeface="Cambria" pitchFamily="34" charset="0"/>
-                <a:ea typeface="Cambria" pitchFamily="34" charset="-122"/>
-                <a:cs typeface="Cambria" pitchFamily="34" charset="-120"/>
-              </a:rPr>
-              <a:t>تفکیک صریح: توکن‌سازی در مقابل ابزار پرداخت</a:t>
-            </a:r>
-            <a:endParaRPr lang="en-US" sz="2500" dirty="0"/>
-          </a:p>
-        </p:txBody>
-      </p:sp>
-      <p:sp>
-        <p:nvSpPr>
-          <p:cNvPr id="4" name="Shape 2"/>
-          <p:cNvSpPr/>
-          <p:nvPr/>
-        </p:nvSpPr>
-        <p:spPr>
-          <a:xfrm>
-            <a:off x="9966960" y="2005584"/>
-            <a:ext cx="621792" cy="621792"/>
-          </a:xfrm>
-          <a:prstGeom prst="ellipse">
-            <a:avLst/>
-          </a:prstGeom>
-          <a:solidFill>
-            <a:srgbClr val="8B0000"/>
-          </a:solidFill>
-          <a:ln/>
-        </p:spPr>
-      </p:sp>
-      <p:pic>
-        <p:nvPicPr>
-          <p:cNvPr id="5" name="Image 0" descr="/home/claude/deck1/icons/balance.png">    </p:cNvPr>
-          <p:cNvPicPr>
-            <a:picLocks noChangeAspect="1"/>
-          </p:cNvPicPr>
-          <p:nvPr/>
-        </p:nvPicPr>
-        <p:blipFill>
-          <a:blip r:embed="rId1"/>
-          <a:stretch>
-            <a:fillRect/>
-          </a:stretch>
-        </p:blipFill>
-        <p:spPr>
-          <a:xfrm>
-            <a:off x="10128626" y="2167250"/>
-            <a:ext cx="298460" cy="298460"/>
-          </a:xfrm>
-          <a:prstGeom prst="rect">
-            <a:avLst/>
-          </a:prstGeom>
-        </p:spPr>
-      </p:pic>
-      <p:sp>
-        <p:nvSpPr>
-          <p:cNvPr id="6" name="Text 3"/>
-          <p:cNvSpPr txBox="1"/>
-          <p:nvPr/>
-        </p:nvSpPr>
-        <p:spPr>
-          <a:xfrm>
-            <a:off x="548640" y="1508760"/>
-            <a:ext cx="9144000" cy="365760"/>
-          </a:xfrm>
-          <a:prstGeom prst="rect">
-            <a:avLst/>
-          </a:prstGeom>
-          <a:noFill/>
-          <a:ln/>
-        </p:spPr>
-        <p:txBody>
-          <a:bodyPr wrap="square" lIns="0" tIns="0" rIns="0" bIns="0" rtlCol="0" anchor="ctr"/>
-          <a:lstStyle/>
-          <a:p>
-            <a:pPr rtl="1" algn="r" indent="0" marL="0">
-              <a:buNone/>
-            </a:pPr>
-            <a:r>
-              <a:rPr lang="en-US" sz="1550" b="1" dirty="0">
-                <a:solidFill>
-                  <a:srgbClr val="1B1B2F"/>
-                </a:solidFill>
-                <a:latin typeface="Calibri" pitchFamily="34" charset="0"/>
-                <a:ea typeface="Calibri" pitchFamily="34" charset="-122"/>
-                <a:cs typeface="Calibri" pitchFamily="34" charset="-120"/>
-              </a:rPr>
-              <a:t>ممنوعیت استفاده از رمزارز به‌عنوان ابزار پرداخت هنوز پابرجاست</a:t>
-            </a:r>
-            <a:endParaRPr lang="en-US" sz="1550" dirty="0"/>
-          </a:p>
-        </p:txBody>
-      </p:sp>
-      <p:sp>
-        <p:nvSpPr>
-          <p:cNvPr id="7" name="Text 4"/>
-          <p:cNvSpPr txBox="1"/>
-          <p:nvPr/>
-        </p:nvSpPr>
-        <p:spPr>
-          <a:xfrm>
-            <a:off x="548640" y="1856232"/>
-            <a:ext cx="9144000" cy="1231392"/>
-          </a:xfrm>
-          <a:prstGeom prst="rect">
-            <a:avLst/>
-          </a:prstGeom>
-          <a:noFill/>
-          <a:ln/>
-        </p:spPr>
-        <p:txBody>
-          <a:bodyPr wrap="square" lIns="0" tIns="0" rIns="0" bIns="0" rtlCol="0" anchor="t"/>
-          <a:lstStyle/>
-          <a:p>
-            <a:pPr rtl="1" algn="r" indent="0" marL="0">
-              <a:buNone/>
-            </a:pPr>
-            <a:r>
-              <a:rPr lang="en-US" sz="1200" dirty="0">
-                <a:solidFill>
-                  <a:srgbClr val="444B66"/>
-                </a:solidFill>
-                <a:latin typeface="Calibri" pitchFamily="34" charset="0"/>
-                <a:ea typeface="Calibri" pitchFamily="34" charset="-122"/>
-                <a:cs typeface="Calibri" pitchFamily="34" charset="-120"/>
-              </a:rPr>
-              <a:t>به‌تازگی (آذر ۱۴۰۴) توسط معاون بانک مرکزی صریحاً تکرار شد.</a:t>
-            </a:r>
-            <a:endParaRPr lang="en-US" sz="1200" dirty="0"/>
-          </a:p>
-        </p:txBody>
-      </p:sp>
-      <p:sp>
-        <p:nvSpPr>
-          <p:cNvPr id="8" name="Shape 5"/>
-          <p:cNvSpPr/>
-          <p:nvPr/>
-        </p:nvSpPr>
-        <p:spPr>
-          <a:xfrm>
-            <a:off x="548640" y="3069336"/>
-            <a:ext cx="10881360" cy="0"/>
-          </a:xfrm>
-          <a:prstGeom prst="line">
-            <a:avLst/>
-          </a:prstGeom>
-          <a:noFill/>
-          <a:ln w="12700">
-            <a:solidFill>
-              <a:srgbClr val="E5E8F0"/>
-            </a:solidFill>
-            <a:prstDash val="solid"/>
-          </a:ln>
-        </p:spPr>
-      </p:sp>
-      <p:sp>
-        <p:nvSpPr>
-          <p:cNvPr id="9" name="Shape 6"/>
-          <p:cNvSpPr/>
-          <p:nvPr/>
-        </p:nvSpPr>
-        <p:spPr>
-          <a:xfrm>
-            <a:off x="9966960" y="3621024"/>
-            <a:ext cx="621792" cy="621792"/>
-          </a:xfrm>
-          <a:prstGeom prst="ellipse">
-            <a:avLst/>
-          </a:prstGeom>
-          <a:solidFill>
-            <a:srgbClr val="2F3690"/>
-          </a:solidFill>
-          <a:ln/>
-        </p:spPr>
-      </p:sp>
-      <p:pic>
-        <p:nvPicPr>
-          <p:cNvPr id="10" name="Image 1" descr="/home/claude/deck1/icons/handshake.png">    </p:cNvPr>
-          <p:cNvPicPr>
-            <a:picLocks noChangeAspect="1"/>
-          </p:cNvPicPr>
-          <p:nvPr/>
-        </p:nvPicPr>
-        <p:blipFill>
-          <a:blip r:embed="rId2"/>
-          <a:stretch>
-            <a:fillRect/>
-          </a:stretch>
-        </p:blipFill>
-        <p:spPr>
-          <a:xfrm>
-            <a:off x="10128626" y="3782690"/>
-            <a:ext cx="298460" cy="298460"/>
-          </a:xfrm>
-          <a:prstGeom prst="rect">
-            <a:avLst/>
-          </a:prstGeom>
-        </p:spPr>
-      </p:pic>
-      <p:sp>
-        <p:nvSpPr>
-          <p:cNvPr id="11" name="Text 7"/>
-          <p:cNvSpPr txBox="1"/>
-          <p:nvPr/>
-        </p:nvSpPr>
-        <p:spPr>
-          <a:xfrm>
-            <a:off x="548640" y="3124200"/>
-            <a:ext cx="9144000" cy="365760"/>
-          </a:xfrm>
-          <a:prstGeom prst="rect">
-            <a:avLst/>
-          </a:prstGeom>
-          <a:noFill/>
-          <a:ln/>
-        </p:spPr>
-        <p:txBody>
-          <a:bodyPr wrap="square" lIns="0" tIns="0" rIns="0" bIns="0" rtlCol="0" anchor="ctr"/>
-          <a:lstStyle/>
-          <a:p>
-            <a:pPr rtl="1" algn="r" indent="0" marL="0">
-              <a:buNone/>
-            </a:pPr>
-            <a:r>
-              <a:rPr lang="en-US" sz="1550" b="1" dirty="0">
-                <a:solidFill>
-                  <a:srgbClr val="1B1B2F"/>
-                </a:solidFill>
-                <a:latin typeface="Calibri" pitchFamily="34" charset="0"/>
-                <a:ea typeface="Calibri" pitchFamily="34" charset="-122"/>
-                <a:cs typeface="Calibri" pitchFamily="34" charset="-120"/>
-              </a:rPr>
-              <a:t>ولی «توکن‌سازی» به‌طور صریح تشویق می‌شود</a:t>
-            </a:r>
-            <a:endParaRPr lang="en-US" sz="1550" dirty="0"/>
-          </a:p>
-        </p:txBody>
-      </p:sp>
-      <p:sp>
-        <p:nvSpPr>
-          <p:cNvPr id="12" name="Text 8"/>
-          <p:cNvSpPr txBox="1"/>
-          <p:nvPr/>
-        </p:nvSpPr>
-        <p:spPr>
-          <a:xfrm>
-            <a:off x="548640" y="3471672"/>
-            <a:ext cx="9144000" cy="1231392"/>
-          </a:xfrm>
-          <a:prstGeom prst="rect">
-            <a:avLst/>
-          </a:prstGeom>
-          <a:noFill/>
-          <a:ln/>
-        </p:spPr>
-        <p:txBody>
-          <a:bodyPr wrap="square" lIns="0" tIns="0" rIns="0" bIns="0" rtlCol="0" anchor="t"/>
-          <a:lstStyle/>
-          <a:p>
-            <a:pPr rtl="1" algn="r" indent="0" marL="0">
-              <a:buNone/>
-            </a:pPr>
-            <a:r>
-              <a:rPr lang="en-US" sz="1200" dirty="0">
-                <a:solidFill>
-                  <a:srgbClr val="444B66"/>
-                </a:solidFill>
-                <a:latin typeface="Calibri" pitchFamily="34" charset="0"/>
-                <a:ea typeface="Calibri" pitchFamily="34" charset="-122"/>
-                <a:cs typeface="Calibri" pitchFamily="34" charset="-120"/>
-              </a:rPr>
-              <a:t>بانک مرکزی این دو مقوله را رسماً از هم جدا کرده — سورن در دسته‌ی دوم جا می‌گیرد.</a:t>
-            </a:r>
-            <a:endParaRPr lang="en-US" sz="1200" dirty="0"/>
-          </a:p>
-        </p:txBody>
-      </p:sp>
-      <p:sp>
-        <p:nvSpPr>
-          <p:cNvPr id="13" name="Shape 9"/>
-          <p:cNvSpPr/>
-          <p:nvPr/>
-        </p:nvSpPr>
-        <p:spPr>
-          <a:xfrm>
-            <a:off x="548640" y="4684776"/>
-            <a:ext cx="10881360" cy="0"/>
-          </a:xfrm>
-          <a:prstGeom prst="line">
-            <a:avLst/>
-          </a:prstGeom>
-          <a:noFill/>
-          <a:ln w="12700">
-            <a:solidFill>
-              <a:srgbClr val="E5E8F0"/>
-            </a:solidFill>
-            <a:prstDash val="solid"/>
-          </a:ln>
-        </p:spPr>
-      </p:sp>
-      <p:sp>
-        <p:nvSpPr>
-          <p:cNvPr id="14" name="Shape 10"/>
-          <p:cNvSpPr/>
-          <p:nvPr/>
-        </p:nvSpPr>
-        <p:spPr>
-          <a:xfrm>
-            <a:off x="9966960" y="5236464"/>
-            <a:ext cx="621792" cy="621792"/>
-          </a:xfrm>
-          <a:prstGeom prst="ellipse">
-            <a:avLst/>
-          </a:prstGeom>
-          <a:solidFill>
-            <a:srgbClr val="8B6F00"/>
-          </a:solidFill>
-          <a:ln/>
-        </p:spPr>
-      </p:sp>
-      <p:pic>
-        <p:nvPicPr>
-          <p:cNvPr id="15" name="Image 2" descr="/home/claude/deck1/icons/warning.png">    </p:cNvPr>
-          <p:cNvPicPr>
-            <a:picLocks noChangeAspect="1"/>
-          </p:cNvPicPr>
-          <p:nvPr/>
-        </p:nvPicPr>
-        <p:blipFill>
-          <a:blip r:embed="rId3"/>
-          <a:stretch>
-            <a:fillRect/>
-          </a:stretch>
-        </p:blipFill>
-        <p:spPr>
-          <a:xfrm>
-            <a:off x="10128626" y="5398130"/>
-            <a:ext cx="298460" cy="298460"/>
-          </a:xfrm>
-          <a:prstGeom prst="rect">
-            <a:avLst/>
-          </a:prstGeom>
-        </p:spPr>
-      </p:pic>
-      <p:sp>
-        <p:nvSpPr>
-          <p:cNvPr id="16" name="Text 11"/>
-          <p:cNvSpPr txBox="1"/>
-          <p:nvPr/>
-        </p:nvSpPr>
-        <p:spPr>
-          <a:xfrm>
-            <a:off x="548640" y="4739640"/>
-            <a:ext cx="9144000" cy="365760"/>
-          </a:xfrm>
-          <a:prstGeom prst="rect">
-            <a:avLst/>
-          </a:prstGeom>
-          <a:noFill/>
-          <a:ln/>
-        </p:spPr>
-        <p:txBody>
-          <a:bodyPr wrap="square" lIns="0" tIns="0" rIns="0" bIns="0" rtlCol="0" anchor="ctr"/>
-          <a:lstStyle/>
-          <a:p>
-            <a:pPr rtl="1" algn="r" indent="0" marL="0">
-              <a:buNone/>
-            </a:pPr>
-            <a:r>
-              <a:rPr lang="en-US" sz="1550" b="1" dirty="0">
-                <a:solidFill>
-                  <a:srgbClr val="1B1B2F"/>
-                </a:solidFill>
-                <a:latin typeface="Calibri" pitchFamily="34" charset="0"/>
-                <a:ea typeface="Calibri" pitchFamily="34" charset="-122"/>
-                <a:cs typeface="Calibri" pitchFamily="34" charset="-120"/>
-              </a:rPr>
-              <a:t>توکن پگ‌شده به ریال همچنان مسدود است</a:t>
-            </a:r>
-            <a:endParaRPr lang="en-US" sz="1550" dirty="0"/>
-          </a:p>
-        </p:txBody>
-      </p:sp>
-      <p:sp>
-        <p:nvSpPr>
-          <p:cNvPr id="17" name="Text 12"/>
-          <p:cNvSpPr txBox="1"/>
-          <p:nvPr/>
-        </p:nvSpPr>
-        <p:spPr>
-          <a:xfrm>
-            <a:off x="548640" y="5087112"/>
-            <a:ext cx="9144000" cy="1231392"/>
-          </a:xfrm>
-          <a:prstGeom prst="rect">
-            <a:avLst/>
-          </a:prstGeom>
-          <a:noFill/>
-          <a:ln/>
-        </p:spPr>
-        <p:txBody>
-          <a:bodyPr wrap="square" lIns="0" tIns="0" rIns="0" bIns="0" rtlCol="0" anchor="t"/>
-          <a:lstStyle/>
-          <a:p>
-            <a:pPr rtl="1" algn="r" indent="0" marL="0">
-              <a:buNone/>
-            </a:pPr>
-            <a:r>
-              <a:rPr lang="en-US" sz="1200" dirty="0">
-                <a:solidFill>
-                  <a:srgbClr val="444B66"/>
-                </a:solidFill>
-                <a:latin typeface="Calibri" pitchFamily="34" charset="0"/>
-                <a:ea typeface="Calibri" pitchFamily="34" charset="-122"/>
-                <a:cs typeface="Calibri" pitchFamily="34" charset="-120"/>
-              </a:rPr>
-              <a:t>این مسیر فقط برای بانک مرکزی و بانک‌های دارای مجوز بانکی باز است.</a:t>
-            </a:r>
-            <a:endParaRPr lang="en-US" sz="1200" dirty="0"/>
-          </a:p>
-        </p:txBody>
-      </p:sp>
-      <p:sp>
-        <p:nvSpPr>
-          <p:cNvPr id="18" name="Shape 13"/>
-          <p:cNvSpPr/>
-          <p:nvPr/>
-        </p:nvSpPr>
-        <p:spPr>
-          <a:xfrm>
-            <a:off x="429768" y="6446520"/>
-            <a:ext cx="310896" cy="310896"/>
-          </a:xfrm>
-          <a:prstGeom prst="ellipse">
-            <a:avLst/>
-          </a:prstGeom>
-          <a:solidFill>
-            <a:srgbClr val="FFFFFF"/>
-          </a:solidFill>
-          <a:ln/>
-        </p:spPr>
-      </p:sp>
-      <p:pic>
-        <p:nvPicPr>
-          <p:cNvPr id="19" name="Image 3" descr="/home/claude/deck1/assets/logo.png">    </p:cNvPr>
-          <p:cNvPicPr>
-            <a:picLocks noChangeAspect="1"/>
-          </p:cNvPicPr>
-          <p:nvPr/>
-        </p:nvPicPr>
-        <p:blipFill>
-          <a:blip r:embed="rId4"/>
-          <a:stretch>
-            <a:fillRect/>
-          </a:stretch>
-        </p:blipFill>
-        <p:spPr>
-          <a:xfrm>
-            <a:off x="457200" y="6473952"/>
-            <a:ext cx="256032" cy="256032"/>
-          </a:xfrm>
-          <a:prstGeom prst="rect">
-            <a:avLst/>
-          </a:prstGeom>
-        </p:spPr>
-      </p:pic>
-      <p:sp>
-        <p:nvSpPr>
-          <p:cNvPr id="20" name="Text 14"/>
-          <p:cNvSpPr txBox="1"/>
-          <p:nvPr/>
-        </p:nvSpPr>
-        <p:spPr>
-          <a:xfrm>
-            <a:off x="804672" y="6537960"/>
-            <a:ext cx="6949440" cy="274320"/>
-          </a:xfrm>
-          <a:prstGeom prst="rect">
-            <a:avLst/>
-          </a:prstGeom>
-          <a:noFill/>
-          <a:ln/>
-        </p:spPr>
-        <p:txBody>
-          <a:bodyPr wrap="square" lIns="0" tIns="0" rIns="0" bIns="0" rtlCol="0" anchor="ctr"/>
-          <a:lstStyle/>
-          <a:p>
-            <a:pPr rtl="1" algn="r" indent="0" marL="0">
-              <a:buNone/>
-            </a:pPr>
-            <a:r>
-              <a:rPr lang="en-US" sz="1000" dirty="0">
-                <a:solidFill>
-                  <a:srgbClr val="8B93B0"/>
-                </a:solidFill>
-                <a:latin typeface="Calibri" pitchFamily="34" charset="0"/>
-                <a:ea typeface="Calibri" pitchFamily="34" charset="-122"/>
-                <a:cs typeface="Calibri" pitchFamily="34" charset="-120"/>
-              </a:rPr>
-              <a:t>بلاک‌چین سور — ارائه به هیأت‌مدیره‌ی بنیاد</a:t>
-            </a:r>
-            <a:endParaRPr lang="en-US" sz="1000" dirty="0"/>
-          </a:p>
-        </p:txBody>
-      </p:sp>
-      <p:sp>
-        <p:nvSpPr>
-          <p:cNvPr id="21" name="Text 15"/>
           <p:cNvSpPr txBox="1"/>
           <p:nvPr/>
         </p:nvSpPr>
@@ -16661,6 +16605,650 @@
     <p:bg>
       <p:bgPr>
         <a:solidFill>
+          <a:srgbClr val="FFFFFF"/>
+        </a:solidFill>
+      </p:bgPr>
+    </p:bg>
+    <p:spTree>
+      <p:nvGrpSpPr>
+        <p:cNvPr id="1" name=""/>
+        <p:cNvGrpSpPr/>
+        <p:nvPr/>
+      </p:nvGrpSpPr>
+      <p:grpSpPr>
+        <a:xfrm>
+          <a:off x="0" y="0"/>
+          <a:ext cx="0" cy="0"/>
+          <a:chOff x="0" y="0"/>
+          <a:chExt cx="0" cy="0"/>
+        </a:xfrm>
+      </p:grpSpPr>
+      <p:sp>
+        <p:nvSpPr>
+          <p:cNvPr id="2" name="Text 0"/>
+          <p:cNvSpPr txBox="1"/>
+          <p:nvPr/>
+        </p:nvSpPr>
+        <p:spPr>
+          <a:xfrm>
+            <a:off x="548640" y="292608"/>
+            <a:ext cx="11064240" cy="320040"/>
+          </a:xfrm>
+          <a:prstGeom prst="rect">
+            <a:avLst/>
+          </a:prstGeom>
+          <a:noFill/>
+          <a:ln/>
+        </p:spPr>
+        <p:txBody>
+          <a:bodyPr wrap="square" lIns="0" tIns="0" rIns="0" bIns="0" rtlCol="0" anchor="ctr"/>
+          <a:lstStyle/>
+          <a:p>
+            <a:pPr rtl="1" algn="r" indent="0" marL="0">
+              <a:buNone/>
+            </a:pPr>
+            <a:r>
+              <a:rPr lang="en-US" sz="1250" b="1" spc="150" kern="0" dirty="0">
+                <a:solidFill>
+                  <a:srgbClr val="2F3690"/>
+                </a:solidFill>
+                <a:latin typeface="Calibri" pitchFamily="34" charset="0"/>
+                <a:ea typeface="Calibri" pitchFamily="34" charset="-122"/>
+                <a:cs typeface="Calibri" pitchFamily="34" charset="-120"/>
+              </a:rPr>
+              <a:t>بانک مرکزی</a:t>
+            </a:r>
+            <a:endParaRPr lang="en-US" sz="1250" dirty="0"/>
+          </a:p>
+        </p:txBody>
+      </p:sp>
+      <p:sp>
+        <p:nvSpPr>
+          <p:cNvPr id="3" name="Text 1"/>
+          <p:cNvSpPr txBox="1"/>
+          <p:nvPr/>
+        </p:nvSpPr>
+        <p:spPr>
+          <a:xfrm>
+            <a:off x="548640" y="576072"/>
+            <a:ext cx="11064240" cy="685800"/>
+          </a:xfrm>
+          <a:prstGeom prst="rect">
+            <a:avLst/>
+          </a:prstGeom>
+          <a:noFill/>
+          <a:ln/>
+        </p:spPr>
+        <p:txBody>
+          <a:bodyPr wrap="square" lIns="0" tIns="0" rIns="0" bIns="0" rtlCol="0" anchor="ctr"/>
+          <a:lstStyle/>
+          <a:p>
+            <a:pPr rtl="1" algn="r" indent="0" marL="0">
+              <a:buNone/>
+            </a:pPr>
+            <a:r>
+              <a:rPr lang="en-US" sz="2500" b="1" dirty="0">
+                <a:solidFill>
+                  <a:srgbClr val="1B1B2F"/>
+                </a:solidFill>
+                <a:latin typeface="Cambria" pitchFamily="34" charset="0"/>
+                <a:ea typeface="Cambria" pitchFamily="34" charset="-122"/>
+                <a:cs typeface="Cambria" pitchFamily="34" charset="-120"/>
+              </a:rPr>
+              <a:t>تفکیک صریح: توکن‌سازی در مقابل ابزار پرداخت</a:t>
+            </a:r>
+            <a:endParaRPr lang="en-US" sz="2500" dirty="0"/>
+          </a:p>
+        </p:txBody>
+      </p:sp>
+      <p:sp>
+        <p:nvSpPr>
+          <p:cNvPr id="4" name="Shape 2"/>
+          <p:cNvSpPr/>
+          <p:nvPr/>
+        </p:nvSpPr>
+        <p:spPr>
+          <a:xfrm>
+            <a:off x="9966960" y="2005584"/>
+            <a:ext cx="621792" cy="621792"/>
+          </a:xfrm>
+          <a:prstGeom prst="ellipse">
+            <a:avLst/>
+          </a:prstGeom>
+          <a:solidFill>
+            <a:srgbClr val="8B0000"/>
+          </a:solidFill>
+          <a:ln/>
+        </p:spPr>
+      </p:sp>
+      <p:pic>
+        <p:nvPicPr>
+          <p:cNvPr id="5" name="Image 0" descr="/home/claude/deck1/icons/balance.png">    </p:cNvPr>
+          <p:cNvPicPr>
+            <a:picLocks noChangeAspect="1"/>
+          </p:cNvPicPr>
+          <p:nvPr/>
+        </p:nvPicPr>
+        <p:blipFill>
+          <a:blip r:embed="rId1"/>
+          <a:stretch>
+            <a:fillRect/>
+          </a:stretch>
+        </p:blipFill>
+        <p:spPr>
+          <a:xfrm>
+            <a:off x="10128626" y="2167250"/>
+            <a:ext cx="298460" cy="298460"/>
+          </a:xfrm>
+          <a:prstGeom prst="rect">
+            <a:avLst/>
+          </a:prstGeom>
+        </p:spPr>
+      </p:pic>
+      <p:sp>
+        <p:nvSpPr>
+          <p:cNvPr id="6" name="Text 3"/>
+          <p:cNvSpPr txBox="1"/>
+          <p:nvPr/>
+        </p:nvSpPr>
+        <p:spPr>
+          <a:xfrm>
+            <a:off x="548640" y="1508760"/>
+            <a:ext cx="9144000" cy="365760"/>
+          </a:xfrm>
+          <a:prstGeom prst="rect">
+            <a:avLst/>
+          </a:prstGeom>
+          <a:noFill/>
+          <a:ln/>
+        </p:spPr>
+        <p:txBody>
+          <a:bodyPr wrap="square" lIns="0" tIns="0" rIns="0" bIns="0" rtlCol="0" anchor="ctr"/>
+          <a:lstStyle/>
+          <a:p>
+            <a:pPr rtl="1" algn="r" indent="0" marL="0">
+              <a:buNone/>
+            </a:pPr>
+            <a:r>
+              <a:rPr lang="en-US" sz="1550" b="1" dirty="0">
+                <a:solidFill>
+                  <a:srgbClr val="1B1B2F"/>
+                </a:solidFill>
+                <a:latin typeface="Calibri" pitchFamily="34" charset="0"/>
+                <a:ea typeface="Calibri" pitchFamily="34" charset="-122"/>
+                <a:cs typeface="Calibri" pitchFamily="34" charset="-120"/>
+              </a:rPr>
+              <a:t>ممنوعیت استفاده از رمزارز به‌عنوان ابزار پرداخت هنوز پابرجاست</a:t>
+            </a:r>
+            <a:endParaRPr lang="en-US" sz="1550" dirty="0"/>
+          </a:p>
+        </p:txBody>
+      </p:sp>
+      <p:sp>
+        <p:nvSpPr>
+          <p:cNvPr id="7" name="Text 4"/>
+          <p:cNvSpPr txBox="1"/>
+          <p:nvPr/>
+        </p:nvSpPr>
+        <p:spPr>
+          <a:xfrm>
+            <a:off x="548640" y="1856232"/>
+            <a:ext cx="9144000" cy="1231392"/>
+          </a:xfrm>
+          <a:prstGeom prst="rect">
+            <a:avLst/>
+          </a:prstGeom>
+          <a:noFill/>
+          <a:ln/>
+        </p:spPr>
+        <p:txBody>
+          <a:bodyPr wrap="square" lIns="0" tIns="0" rIns="0" bIns="0" rtlCol="0" anchor="t"/>
+          <a:lstStyle/>
+          <a:p>
+            <a:pPr rtl="1" algn="r" indent="0" marL="0">
+              <a:buNone/>
+            </a:pPr>
+            <a:r>
+              <a:rPr lang="en-US" sz="1200" dirty="0">
+                <a:solidFill>
+                  <a:srgbClr val="444B66"/>
+                </a:solidFill>
+                <a:latin typeface="Calibri" pitchFamily="34" charset="0"/>
+                <a:ea typeface="Calibri" pitchFamily="34" charset="-122"/>
+                <a:cs typeface="Calibri" pitchFamily="34" charset="-120"/>
+              </a:rPr>
+              <a:t>به‌تازگی (آذر ۱۴۰۴) توسط معاون بانک مرکزی صریحاً تکرار شد.</a:t>
+            </a:r>
+            <a:endParaRPr lang="en-US" sz="1200" dirty="0"/>
+          </a:p>
+        </p:txBody>
+      </p:sp>
+      <p:sp>
+        <p:nvSpPr>
+          <p:cNvPr id="8" name="Shape 5"/>
+          <p:cNvSpPr/>
+          <p:nvPr/>
+        </p:nvSpPr>
+        <p:spPr>
+          <a:xfrm>
+            <a:off x="548640" y="3069336"/>
+            <a:ext cx="10881360" cy="0"/>
+          </a:xfrm>
+          <a:prstGeom prst="line">
+            <a:avLst/>
+          </a:prstGeom>
+          <a:noFill/>
+          <a:ln w="12700">
+            <a:solidFill>
+              <a:srgbClr val="E5E8F0"/>
+            </a:solidFill>
+            <a:prstDash val="solid"/>
+          </a:ln>
+        </p:spPr>
+      </p:sp>
+      <p:sp>
+        <p:nvSpPr>
+          <p:cNvPr id="9" name="Shape 6"/>
+          <p:cNvSpPr/>
+          <p:nvPr/>
+        </p:nvSpPr>
+        <p:spPr>
+          <a:xfrm>
+            <a:off x="9966960" y="3621024"/>
+            <a:ext cx="621792" cy="621792"/>
+          </a:xfrm>
+          <a:prstGeom prst="ellipse">
+            <a:avLst/>
+          </a:prstGeom>
+          <a:solidFill>
+            <a:srgbClr val="2F3690"/>
+          </a:solidFill>
+          <a:ln/>
+        </p:spPr>
+      </p:sp>
+      <p:pic>
+        <p:nvPicPr>
+          <p:cNvPr id="10" name="Image 1" descr="/home/claude/deck1/icons/handshake.png">    </p:cNvPr>
+          <p:cNvPicPr>
+            <a:picLocks noChangeAspect="1"/>
+          </p:cNvPicPr>
+          <p:nvPr/>
+        </p:nvPicPr>
+        <p:blipFill>
+          <a:blip r:embed="rId2"/>
+          <a:stretch>
+            <a:fillRect/>
+          </a:stretch>
+        </p:blipFill>
+        <p:spPr>
+          <a:xfrm>
+            <a:off x="10128626" y="3782690"/>
+            <a:ext cx="298460" cy="298460"/>
+          </a:xfrm>
+          <a:prstGeom prst="rect">
+            <a:avLst/>
+          </a:prstGeom>
+        </p:spPr>
+      </p:pic>
+      <p:sp>
+        <p:nvSpPr>
+          <p:cNvPr id="11" name="Text 7"/>
+          <p:cNvSpPr txBox="1"/>
+          <p:nvPr/>
+        </p:nvSpPr>
+        <p:spPr>
+          <a:xfrm>
+            <a:off x="548640" y="3124200"/>
+            <a:ext cx="9144000" cy="365760"/>
+          </a:xfrm>
+          <a:prstGeom prst="rect">
+            <a:avLst/>
+          </a:prstGeom>
+          <a:noFill/>
+          <a:ln/>
+        </p:spPr>
+        <p:txBody>
+          <a:bodyPr wrap="square" lIns="0" tIns="0" rIns="0" bIns="0" rtlCol="0" anchor="ctr"/>
+          <a:lstStyle/>
+          <a:p>
+            <a:pPr rtl="1" algn="r" indent="0" marL="0">
+              <a:buNone/>
+            </a:pPr>
+            <a:r>
+              <a:rPr lang="en-US" sz="1550" b="1" dirty="0">
+                <a:solidFill>
+                  <a:srgbClr val="1B1B2F"/>
+                </a:solidFill>
+                <a:latin typeface="Calibri" pitchFamily="34" charset="0"/>
+                <a:ea typeface="Calibri" pitchFamily="34" charset="-122"/>
+                <a:cs typeface="Calibri" pitchFamily="34" charset="-120"/>
+              </a:rPr>
+              <a:t>ولی «توکن‌سازی» به‌طور صریح تشویق می‌شود</a:t>
+            </a:r>
+            <a:endParaRPr lang="en-US" sz="1550" dirty="0"/>
+          </a:p>
+        </p:txBody>
+      </p:sp>
+      <p:sp>
+        <p:nvSpPr>
+          <p:cNvPr id="12" name="Text 8"/>
+          <p:cNvSpPr txBox="1"/>
+          <p:nvPr/>
+        </p:nvSpPr>
+        <p:spPr>
+          <a:xfrm>
+            <a:off x="548640" y="3471672"/>
+            <a:ext cx="9144000" cy="1231392"/>
+          </a:xfrm>
+          <a:prstGeom prst="rect">
+            <a:avLst/>
+          </a:prstGeom>
+          <a:noFill/>
+          <a:ln/>
+        </p:spPr>
+        <p:txBody>
+          <a:bodyPr wrap="square" lIns="0" tIns="0" rIns="0" bIns="0" rtlCol="0" anchor="t"/>
+          <a:lstStyle/>
+          <a:p>
+            <a:pPr rtl="1" algn="r" indent="0" marL="0">
+              <a:buNone/>
+            </a:pPr>
+            <a:r>
+              <a:rPr lang="en-US" sz="1200" dirty="0">
+                <a:solidFill>
+                  <a:srgbClr val="444B66"/>
+                </a:solidFill>
+                <a:latin typeface="Calibri" pitchFamily="34" charset="0"/>
+                <a:ea typeface="Calibri" pitchFamily="34" charset="-122"/>
+                <a:cs typeface="Calibri" pitchFamily="34" charset="-120"/>
+              </a:rPr>
+              <a:t>بانک مرکزی این دو مقوله را رسماً از هم جدا کرده — سورن در دسته‌ی دوم جا می‌گیرد.</a:t>
+            </a:r>
+            <a:endParaRPr lang="en-US" sz="1200" dirty="0"/>
+          </a:p>
+        </p:txBody>
+      </p:sp>
+      <p:sp>
+        <p:nvSpPr>
+          <p:cNvPr id="13" name="Shape 9"/>
+          <p:cNvSpPr/>
+          <p:nvPr/>
+        </p:nvSpPr>
+        <p:spPr>
+          <a:xfrm>
+            <a:off x="548640" y="4684776"/>
+            <a:ext cx="10881360" cy="0"/>
+          </a:xfrm>
+          <a:prstGeom prst="line">
+            <a:avLst/>
+          </a:prstGeom>
+          <a:noFill/>
+          <a:ln w="12700">
+            <a:solidFill>
+              <a:srgbClr val="E5E8F0"/>
+            </a:solidFill>
+            <a:prstDash val="solid"/>
+          </a:ln>
+        </p:spPr>
+      </p:sp>
+      <p:sp>
+        <p:nvSpPr>
+          <p:cNvPr id="14" name="Shape 10"/>
+          <p:cNvSpPr/>
+          <p:nvPr/>
+        </p:nvSpPr>
+        <p:spPr>
+          <a:xfrm>
+            <a:off x="9966960" y="5236464"/>
+            <a:ext cx="621792" cy="621792"/>
+          </a:xfrm>
+          <a:prstGeom prst="ellipse">
+            <a:avLst/>
+          </a:prstGeom>
+          <a:solidFill>
+            <a:srgbClr val="8B6F00"/>
+          </a:solidFill>
+          <a:ln/>
+        </p:spPr>
+      </p:sp>
+      <p:pic>
+        <p:nvPicPr>
+          <p:cNvPr id="15" name="Image 2" descr="/home/claude/deck1/icons/warning.png">    </p:cNvPr>
+          <p:cNvPicPr>
+            <a:picLocks noChangeAspect="1"/>
+          </p:cNvPicPr>
+          <p:nvPr/>
+        </p:nvPicPr>
+        <p:blipFill>
+          <a:blip r:embed="rId3"/>
+          <a:stretch>
+            <a:fillRect/>
+          </a:stretch>
+        </p:blipFill>
+        <p:spPr>
+          <a:xfrm>
+            <a:off x="10128626" y="5398130"/>
+            <a:ext cx="298460" cy="298460"/>
+          </a:xfrm>
+          <a:prstGeom prst="rect">
+            <a:avLst/>
+          </a:prstGeom>
+        </p:spPr>
+      </p:pic>
+      <p:sp>
+        <p:nvSpPr>
+          <p:cNvPr id="16" name="Text 11"/>
+          <p:cNvSpPr txBox="1"/>
+          <p:nvPr/>
+        </p:nvSpPr>
+        <p:spPr>
+          <a:xfrm>
+            <a:off x="548640" y="4739640"/>
+            <a:ext cx="9144000" cy="365760"/>
+          </a:xfrm>
+          <a:prstGeom prst="rect">
+            <a:avLst/>
+          </a:prstGeom>
+          <a:noFill/>
+          <a:ln/>
+        </p:spPr>
+        <p:txBody>
+          <a:bodyPr wrap="square" lIns="0" tIns="0" rIns="0" bIns="0" rtlCol="0" anchor="ctr"/>
+          <a:lstStyle/>
+          <a:p>
+            <a:pPr rtl="1" algn="r" indent="0" marL="0">
+              <a:buNone/>
+            </a:pPr>
+            <a:r>
+              <a:rPr lang="en-US" sz="1550" b="1" dirty="0">
+                <a:solidFill>
+                  <a:srgbClr val="1B1B2F"/>
+                </a:solidFill>
+                <a:latin typeface="Calibri" pitchFamily="34" charset="0"/>
+                <a:ea typeface="Calibri" pitchFamily="34" charset="-122"/>
+                <a:cs typeface="Calibri" pitchFamily="34" charset="-120"/>
+              </a:rPr>
+              <a:t>توکن پگ‌شده به ریال همچنان مسدود است</a:t>
+            </a:r>
+            <a:endParaRPr lang="en-US" sz="1550" dirty="0"/>
+          </a:p>
+        </p:txBody>
+      </p:sp>
+      <p:sp>
+        <p:nvSpPr>
+          <p:cNvPr id="17" name="Text 12"/>
+          <p:cNvSpPr txBox="1"/>
+          <p:nvPr/>
+        </p:nvSpPr>
+        <p:spPr>
+          <a:xfrm>
+            <a:off x="548640" y="5087112"/>
+            <a:ext cx="9144000" cy="1231392"/>
+          </a:xfrm>
+          <a:prstGeom prst="rect">
+            <a:avLst/>
+          </a:prstGeom>
+          <a:noFill/>
+          <a:ln/>
+        </p:spPr>
+        <p:txBody>
+          <a:bodyPr wrap="square" lIns="0" tIns="0" rIns="0" bIns="0" rtlCol="0" anchor="t"/>
+          <a:lstStyle/>
+          <a:p>
+            <a:pPr rtl="1" algn="r" indent="0" marL="0">
+              <a:buNone/>
+            </a:pPr>
+            <a:r>
+              <a:rPr lang="en-US" sz="1200" dirty="0">
+                <a:solidFill>
+                  <a:srgbClr val="444B66"/>
+                </a:solidFill>
+                <a:latin typeface="Calibri" pitchFamily="34" charset="0"/>
+                <a:ea typeface="Calibri" pitchFamily="34" charset="-122"/>
+                <a:cs typeface="Calibri" pitchFamily="34" charset="-120"/>
+              </a:rPr>
+              <a:t>این مسیر فقط برای بانک مرکزی و بانک‌های دارای مجوز بانکی باز است.</a:t>
+            </a:r>
+            <a:endParaRPr lang="en-US" sz="1200" dirty="0"/>
+          </a:p>
+        </p:txBody>
+      </p:sp>
+      <p:sp>
+        <p:nvSpPr>
+          <p:cNvPr id="18" name="Shape 13"/>
+          <p:cNvSpPr/>
+          <p:nvPr/>
+        </p:nvSpPr>
+        <p:spPr>
+          <a:xfrm>
+            <a:off x="429768" y="6446520"/>
+            <a:ext cx="310896" cy="310896"/>
+          </a:xfrm>
+          <a:prstGeom prst="ellipse">
+            <a:avLst/>
+          </a:prstGeom>
+          <a:solidFill>
+            <a:srgbClr val="FFFFFF"/>
+          </a:solidFill>
+          <a:ln/>
+        </p:spPr>
+      </p:sp>
+      <p:pic>
+        <p:nvPicPr>
+          <p:cNvPr id="19" name="Image 3" descr="/home/claude/deck1/assets/logo.png">    </p:cNvPr>
+          <p:cNvPicPr>
+            <a:picLocks noChangeAspect="1"/>
+          </p:cNvPicPr>
+          <p:nvPr/>
+        </p:nvPicPr>
+        <p:blipFill>
+          <a:blip r:embed="rId4"/>
+          <a:stretch>
+            <a:fillRect/>
+          </a:stretch>
+        </p:blipFill>
+        <p:spPr>
+          <a:xfrm>
+            <a:off x="457200" y="6473952"/>
+            <a:ext cx="256032" cy="256032"/>
+          </a:xfrm>
+          <a:prstGeom prst="rect">
+            <a:avLst/>
+          </a:prstGeom>
+        </p:spPr>
+      </p:pic>
+      <p:sp>
+        <p:nvSpPr>
+          <p:cNvPr id="20" name="Text 14"/>
+          <p:cNvSpPr txBox="1"/>
+          <p:nvPr/>
+        </p:nvSpPr>
+        <p:spPr>
+          <a:xfrm>
+            <a:off x="804672" y="6537960"/>
+            <a:ext cx="6949440" cy="274320"/>
+          </a:xfrm>
+          <a:prstGeom prst="rect">
+            <a:avLst/>
+          </a:prstGeom>
+          <a:noFill/>
+          <a:ln/>
+        </p:spPr>
+        <p:txBody>
+          <a:bodyPr wrap="square" lIns="0" tIns="0" rIns="0" bIns="0" rtlCol="0" anchor="ctr"/>
+          <a:lstStyle/>
+          <a:p>
+            <a:pPr rtl="1" algn="r" indent="0" marL="0">
+              <a:buNone/>
+            </a:pPr>
+            <a:r>
+              <a:rPr lang="en-US" sz="1000" dirty="0">
+                <a:solidFill>
+                  <a:srgbClr val="8B93B0"/>
+                </a:solidFill>
+                <a:latin typeface="Calibri" pitchFamily="34" charset="0"/>
+                <a:ea typeface="Calibri" pitchFamily="34" charset="-122"/>
+                <a:cs typeface="Calibri" pitchFamily="34" charset="-120"/>
+              </a:rPr>
+              <a:t>بلاک‌چین سور — ارائه به هیأت‌مدیره‌ی بنیاد</a:t>
+            </a:r>
+            <a:endParaRPr lang="en-US" sz="1000" dirty="0"/>
+          </a:p>
+        </p:txBody>
+      </p:sp>
+      <p:sp>
+        <p:nvSpPr>
+          <p:cNvPr id="21" name="Text 15"/>
+          <p:cNvSpPr txBox="1"/>
+          <p:nvPr/>
+        </p:nvSpPr>
+        <p:spPr>
+          <a:xfrm>
+            <a:off x="11430000" y="6537960"/>
+            <a:ext cx="365760" cy="274320"/>
+          </a:xfrm>
+          <a:prstGeom prst="rect">
+            <a:avLst/>
+          </a:prstGeom>
+          <a:noFill/>
+          <a:ln/>
+        </p:spPr>
+        <p:txBody>
+          <a:bodyPr wrap="square" lIns="0" tIns="0" rIns="0" bIns="0" rtlCol="0" anchor="ctr"/>
+          <a:lstStyle/>
+          <a:p>
+            <a:pPr rtl="1" algn="r" indent="0" marL="0">
+              <a:buNone/>
+            </a:pPr>
+            <a:r>
+              <a:rPr lang="en-US" sz="1000" dirty="0">
+                <a:solidFill>
+                  <a:srgbClr val="8B93B0"/>
+                </a:solidFill>
+                <a:latin typeface="Calibri" pitchFamily="34" charset="0"/>
+                <a:ea typeface="Calibri" pitchFamily="34" charset="-122"/>
+                <a:cs typeface="Calibri" pitchFamily="34" charset="-120"/>
+              </a:rPr>
+              <a:t>29</a:t>
+            </a:r>
+            <a:endParaRPr lang="en-US" sz="1000" dirty="0"/>
+          </a:p>
+        </p:txBody>
+      </p:sp>
+    </p:spTree>
+  </p:cSld>
+  <p:clrMapOvr>
+    <a:masterClrMapping/>
+  </p:clrMapOvr>
+</p:sld>
+</file>
+
+<file path=ppt/slides/slide31.xml><?xml version="1.0" encoding="utf-8"?>
+<p:sld xmlns:a="http://schemas.openxmlformats.org/drawingml/2006/main" xmlns:r="http://schemas.openxmlformats.org/officeDocument/2006/relationships" xmlns:p="http://schemas.openxmlformats.org/presentationml/2006/main">
+  <p:cSld name="Slide 31">
+    <p:bg>
+      <p:bgPr>
+        <a:solidFill>
           <a:srgbClr val="2F3690"/>
         </a:solidFill>
       </p:bgPr>
@@ -16873,7 +17461,7 @@
                 <a:ea typeface="Calibri" pitchFamily="34" charset="-122"/>
                 <a:cs typeface="Calibri" pitchFamily="34" charset="-120"/>
               </a:rPr>
-              <a:t>29</a:t>
+              <a:t>30</a:t>
             </a:r>
             <a:endParaRPr lang="en-US" sz="1000" dirty="0"/>
           </a:p>
@@ -16887,9 +17475,9 @@
 </p:sld>
 </file>
 
-<file path=ppt/slides/slide31.xml><?xml version="1.0" encoding="utf-8"?>
+<file path=ppt/slides/slide32.xml><?xml version="1.0" encoding="utf-8"?>
 <p:sld xmlns:a="http://schemas.openxmlformats.org/drawingml/2006/main" xmlns:r="http://schemas.openxmlformats.org/officeDocument/2006/relationships" xmlns:p="http://schemas.openxmlformats.org/presentationml/2006/main">
-  <p:cSld name="Slide 31">
+  <p:cSld name="Slide 32">
     <p:bg>
       <p:bgPr>
         <a:solidFill>
@@ -16991,7 +17579,7 @@
       </p:sp>
       <p:graphicFrame>
         <p:nvGraphicFramePr>
-          <p:cNvPr id="32" name="Table 0"/>
+          <p:cNvPr id="33" name="Table 0"/>
           <p:cNvGraphicFramePr>
             <a:graphicFrameLocks noGrp="1"/>
           </p:cNvGraphicFramePr>
@@ -17963,7 +18551,7 @@
                 <a:ea typeface="Calibri" pitchFamily="34" charset="-122"/>
                 <a:cs typeface="Calibri" pitchFamily="34" charset="-120"/>
               </a:rPr>
-              <a:t>30</a:t>
+              <a:t>31</a:t>
             </a:r>
             <a:endParaRPr lang="en-US" sz="1000" dirty="0"/>
           </a:p>
@@ -17977,9 +18565,9 @@
 </p:sld>
 </file>
 
-<file path=ppt/slides/slide32.xml><?xml version="1.0" encoding="utf-8"?>
+<file path=ppt/slides/slide33.xml><?xml version="1.0" encoding="utf-8"?>
 <p:sld xmlns:a="http://schemas.openxmlformats.org/drawingml/2006/main" xmlns:r="http://schemas.openxmlformats.org/officeDocument/2006/relationships" xmlns:p="http://schemas.openxmlformats.org/presentationml/2006/main">
-  <p:cSld name="Slide 32">
+  <p:cSld name="Slide 33">
     <p:bg>
       <p:bgPr>
         <a:solidFill>

--- a/presentations/Sur - Board Presentation.pptx
+++ b/presentations/Sur - Board Presentation.pptx
@@ -16411,7 +16411,7 @@
                 <a:ea typeface="Cambria" pitchFamily="34" charset="-122"/>
                 <a:cs typeface="Cambria" pitchFamily="34" charset="-120"/>
               </a:rPr>
-              <a:t>مزیت‌های رقابتی پیشنهادی برای دپ‌ها</a:t>
+              <a:t>مزیت‌های رقابتی و ایده‌های کسب‌وکاری — به‌روزرسانی شد</a:t>
             </a:r>
             <a:endParaRPr lang="en-US" sz="2500" dirty="0"/>
           </a:p>
@@ -16494,7 +16494,7 @@
                 <a:ea typeface="Calibri" pitchFamily="34" charset="-122"/>
                 <a:cs typeface="Calibri" pitchFamily="34" charset="-120"/>
               </a:rPr>
-              <a:t>رجیستری هویت مشترک + رجیستری رسمی کسب‌وکار</a:t>
+              <a:t>مزیت‌های واقعی پلتفرم — ۱۲ مورد مستند</a:t>
             </a:r>
             <a:endParaRPr lang="en-US" sz="1550" dirty="0"/>
           </a:p>
@@ -16533,7 +16533,7 @@
                 <a:ea typeface="Calibri" pitchFamily="34" charset="-122"/>
                 <a:cs typeface="Calibri" pitchFamily="34" charset="-120"/>
               </a:rPr>
-              <a:t>دپ‌ها به‌جای ساخت KYC مستقل، از زیرساخت مشترک استفاده می‌کنند.</a:t>
+              <a:t>حکمرانی کدمحور، بدون فورک کلاینت — در sur-competitive-advantages.md</a:t>
             </a:r>
             <a:endParaRPr lang="en-US" sz="1200" dirty="0"/>
           </a:p>
@@ -16639,7 +16639,7 @@
                 <a:ea typeface="Calibri" pitchFamily="34" charset="-122"/>
                 <a:cs typeface="Calibri" pitchFamily="34" charset="-120"/>
               </a:rPr>
-              <a:t>داوری/حل اختلاف عمومی + سرویس ثبت‌زمان اسناد</a:t>
+              <a:t>تراکنش‌های محرمانه (Zether) — افزوده‌ی تازه</a:t>
             </a:r>
             <a:endParaRPr lang="en-US" sz="1550" dirty="0"/>
           </a:p>
@@ -16678,7 +16678,7 @@
                 <a:ea typeface="Calibri" pitchFamily="34" charset="-122"/>
                 <a:cs typeface="Calibri" pitchFamily="34" charset="-120"/>
               </a:rPr>
-              <a:t>زیرساخت‌های پرکاربرد برای دپ‌های تجاری، آماده برای استفاده‌ی مشترک.</a:t>
+              <a:t>پیشنهاد و قرارداد اسکلت آماده؛ نیازمند تصمیم فورک پیاده‌سازی آدیت‌شده</a:t>
             </a:r>
             <a:endParaRPr lang="en-US" sz="1200" dirty="0"/>
           </a:p>
@@ -16784,7 +16784,7 @@
                 <a:ea typeface="Calibri" pitchFamily="34" charset="-122"/>
                 <a:cs typeface="Calibri" pitchFamily="34" charset="-120"/>
               </a:rPr>
-              <a:t>Oracle بومی قیمت + سرویس نام‌گذاری</a:t>
+              <a:t>۱۰۰ ایده‌ی کسب‌وکاری/دپ مستندشده</a:t>
             </a:r>
             <a:endParaRPr lang="en-US" sz="1550" dirty="0"/>
           </a:p>
@@ -16823,7 +16823,7 @@
                 <a:ea typeface="Calibri" pitchFamily="34" charset="-122"/>
                 <a:cs typeface="Calibri" pitchFamily="34" charset="-120"/>
               </a:rPr>
-              <a:t>نیازهای رایج دپ‌های مالی، بدون وابستگی به زیرساخت خارجی.</a:t>
+              <a:t>از فاکتورینگ تا صرافی غیرمتمرکز — در sur-dapp-business-ideas.md</a:t>
             </a:r>
             <a:endParaRPr lang="en-US" sz="1200" dirty="0"/>
           </a:p>
@@ -20426,7 +20426,7 @@
                           <a:ea typeface="Calibri" pitchFamily="34" charset="-122"/>
                           <a:cs typeface="Calibri" pitchFamily="34" charset="-120"/>
                         </a:rPr>
-                        <a:t>پیشینه‌ی پروژه، تیم، نقشه‌ی راه با تاریخ مشخص</a:t>
+                        <a:t>تیم و مشاوران؛ تاریخ‌های دقیق نقشه‌ی راه (پیشینه و فازبندی ✅ تکمیل شدند)</a:t>
                       </a:r>
                       <a:endParaRPr lang="en-US" sz="1200" dirty="0">
                         <a:latin typeface="Calibri" charset="0"/>
